--- a/知域引擎_项目介绍.pptx
+++ b/知域引擎_项目介绍.pptx
@@ -4,6 +4,9 @@
   <p:sldMasterIdLst>
     <p:sldMasterId id="2147483648" r:id="rId1"/>
   </p:sldMasterIdLst>
+  <p:notesMasterIdLst>
+    <p:notesMasterId r:id="rId17"/>
+  </p:notesMasterIdLst>
   <p:sldIdLst>
     <p:sldId id="256" r:id="rId2"/>
     <p:sldId id="257" r:id="rId3"/>
@@ -21,9 +24,6 @@
     <p:sldId id="269" r:id="rId15"/>
     <p:sldId id="270" r:id="rId16"/>
   </p:sldIdLst>
-  <p:notesMasterIdLst>
-    <p:notesMasterId r:id="rId17"/>
-  </p:notesMasterIdLst>
   <p:sldSz cx="12192000" cy="6858000"/>
   <p:notesSz cx="6858000" cy="12192000"/>
   <p:defaultTextStyle>
@@ -118,6 +118,11 @@
       </a:defRPr>
     </a:lvl9pPr>
   </p:defaultTextStyle>
+  <p:extLst>
+    <p:ext uri="{EFAFB233-063F-42B5-8137-9DF3F51BA10A}">
+      <p15:sldGuideLst xmlns:p15="http://schemas.microsoft.com/office/powerpoint/2012/main"/>
+    </p:ext>
+  </p:extLst>
 </p:presentation>
 </file>
 
@@ -143,234 +148,10 @@
           <a:chExt cx="0" cy="0"/>
         </a:xfrm>
       </p:grpSpPr>
-      <p:sp>
-        <p:nvSpPr>
-          <p:cNvPr id="2" name="Header Placeholder 1"/>
-          <p:cNvSpPr>
-            <a:spLocks noGrp="1"/>
-          </p:cNvSpPr>
-          <p:nvPr>
-            <p:ph type="hdr" sz="quarter"/>
-          </p:nvPr>
-        </p:nvSpPr>
-        <p:spPr>
-          <a:xfrm>
-            <a:off x="0" y="0"/>
-            <a:ext cx="2971800" cy="458788"/>
-          </a:xfrm>
-          <a:prstGeom prst="rect">
-            <a:avLst/>
-          </a:prstGeom>
-        </p:spPr>
-        <p:txBody>
-          <a:bodyPr vert="horz" lIns="91440" tIns="45720" rIns="91440" bIns="45720" rtlCol="0"/>
-          <a:lstStyle>
-            <a:lvl1pPr algn="l">
-              <a:defRPr sz="1200"/>
-            </a:lvl1pPr>
-          </a:lstStyle>
-          <a:p>
-            <a:endParaRPr lang="en-US"/>
-          </a:p>
-        </p:txBody>
-      </p:sp>
-      <p:sp>
-        <p:nvSpPr>
-          <p:cNvPr id="3" name="Date Placeholder 2"/>
-          <p:cNvSpPr>
-            <a:spLocks noGrp="1"/>
-          </p:cNvSpPr>
-          <p:nvPr>
-            <p:ph type="dt" idx="1"/>
-          </p:nvPr>
-        </p:nvSpPr>
-        <p:spPr>
-          <a:xfrm>
-            <a:off x="3884613" y="0"/>
-            <a:ext cx="2971800" cy="458788"/>
-          </a:xfrm>
-          <a:prstGeom prst="rect">
-            <a:avLst/>
-          </a:prstGeom>
-        </p:spPr>
-        <p:txBody>
-          <a:bodyPr vert="horz" lIns="91440" tIns="45720" rIns="91440" bIns="45720" rtlCol="0"/>
-          <a:lstStyle>
-            <a:lvl1pPr algn="r">
-              <a:defRPr sz="1200"/>
-            </a:lvl1pPr>
-          </a:lstStyle>
-          <a:p>
-            <a:fld id="{5282F153-3F37-0F45-9E97-73ACFA13230C}" type="datetimeFigureOut">
-              <a:rPr lang="en-US"/>
-              <a:t>7/23/19</a:t>
-            </a:fld>
-            <a:endParaRPr lang="en-US"/>
-          </a:p>
-        </p:txBody>
-      </p:sp>
-      <p:sp>
-        <p:nvSpPr>
-          <p:cNvPr id="4" name="Slide Image Placeholder 3"/>
-          <p:cNvSpPr>
-            <a:spLocks noGrp="1" noRot="1" noChangeAspect="1"/>
-          </p:cNvSpPr>
-          <p:nvPr>
-            <p:ph type="sldImg" idx="2"/>
-          </p:nvPr>
-        </p:nvSpPr>
-        <p:spPr>
-          <a:xfrm>
-            <a:off x="685800" y="1143000"/>
-            <a:ext cx="5486400" cy="3086100"/>
-          </a:xfrm>
-          <a:prstGeom prst="rect">
-            <a:avLst/>
-          </a:prstGeom>
-          <a:noFill/>
-          <a:ln w="12700">
-            <a:solidFill>
-              <a:prstClr val="black"/>
-            </a:solidFill>
-          </a:ln>
-        </p:spPr>
-        <p:txBody>
-          <a:bodyPr vert="horz" lIns="91440" tIns="45720" rIns="91440" bIns="45720" rtlCol="0" anchor="ctr"/>
-          <a:lstStyle/>
-          <a:p>
-            <a:endParaRPr lang="en-US"/>
-          </a:p>
-        </p:txBody>
-      </p:sp>
-      <p:sp>
-        <p:nvSpPr>
-          <p:cNvPr id="5" name="Notes Placeholder 4"/>
-          <p:cNvSpPr>
-            <a:spLocks noGrp="1"/>
-          </p:cNvSpPr>
-          <p:nvPr>
-            <p:ph type="body" sz="quarter" idx="3"/>
-          </p:nvPr>
-        </p:nvSpPr>
-        <p:spPr>
-          <a:xfrm>
-            <a:off x="685800" y="4400550"/>
-            <a:ext cx="5486400" cy="3600450"/>
-          </a:xfrm>
-          <a:prstGeom prst="rect">
-            <a:avLst/>
-          </a:prstGeom>
-        </p:spPr>
-        <p:txBody>
-          <a:bodyPr vert="horz" lIns="91440" tIns="45720" rIns="91440" bIns="45720" rtlCol="0"/>
-          <a:lstStyle/>
-          <a:p>
-            <a:pPr lvl="0"/>
-            <a:r>
-              <a:rPr lang="en-US"/>
-              <a:t>Click to edit Master text styles</a:t>
-            </a:r>
-          </a:p>
-          <a:p>
-            <a:pPr lvl="1"/>
-            <a:r>
-              <a:rPr lang="en-US"/>
-              <a:t>Second level</a:t>
-            </a:r>
-          </a:p>
-          <a:p>
-            <a:pPr lvl="2"/>
-            <a:r>
-              <a:rPr lang="en-US"/>
-              <a:t>Third level</a:t>
-            </a:r>
-          </a:p>
-          <a:p>
-            <a:pPr lvl="3"/>
-            <a:r>
-              <a:rPr lang="en-US"/>
-              <a:t>Fourth level</a:t>
-            </a:r>
-          </a:p>
-          <a:p>
-            <a:pPr lvl="4"/>
-            <a:r>
-              <a:rPr lang="en-US"/>
-              <a:t>Fifth level</a:t>
-            </a:r>
-          </a:p>
-        </p:txBody>
-      </p:sp>
-      <p:sp>
-        <p:nvSpPr>
-          <p:cNvPr id="6" name="Footer Placeholder 5"/>
-          <p:cNvSpPr>
-            <a:spLocks noGrp="1"/>
-          </p:cNvSpPr>
-          <p:nvPr>
-            <p:ph type="ftr" sz="quarter" idx="4"/>
-          </p:nvPr>
-        </p:nvSpPr>
-        <p:spPr>
-          <a:xfrm>
-            <a:off x="0" y="8685213"/>
-            <a:ext cx="2971800" cy="458787"/>
-          </a:xfrm>
-          <a:prstGeom prst="rect">
-            <a:avLst/>
-          </a:prstGeom>
-        </p:spPr>
-        <p:txBody>
-          <a:bodyPr vert="horz" lIns="91440" tIns="45720" rIns="91440" bIns="45720" rtlCol="0" anchor="b"/>
-          <a:lstStyle>
-            <a:lvl1pPr algn="l">
-              <a:defRPr sz="1200"/>
-            </a:lvl1pPr>
-          </a:lstStyle>
-          <a:p>
-            <a:endParaRPr lang="en-US"/>
-          </a:p>
-        </p:txBody>
-      </p:sp>
-      <p:sp>
-        <p:nvSpPr>
-          <p:cNvPr id="7" name="Slide Number Placeholder 6"/>
-          <p:cNvSpPr>
-            <a:spLocks noGrp="1"/>
-          </p:cNvSpPr>
-          <p:nvPr>
-            <p:ph type="sldNum" sz="quarter" idx="5"/>
-          </p:nvPr>
-        </p:nvSpPr>
-        <p:spPr>
-          <a:xfrm>
-            <a:off x="3884613" y="8685213"/>
-            <a:ext cx="2971800" cy="458787"/>
-          </a:xfrm>
-          <a:prstGeom prst="rect">
-            <a:avLst/>
-          </a:prstGeom>
-        </p:spPr>
-        <p:txBody>
-          <a:bodyPr vert="horz" lIns="91440" tIns="45720" rIns="91440" bIns="45720" rtlCol="0" anchor="b"/>
-          <a:lstStyle>
-            <a:lvl1pPr algn="r">
-              <a:defRPr sz="1200"/>
-            </a:lvl1pPr>
-          </a:lstStyle>
-          <a:p>
-            <a:fld id="{CE5E9CC1-C706-0F49-92D6-E571CC5EEA8F}" type="slidenum">
-              <a:rPr lang="en-US"/>
-              <a:t>‹#›</a:t>
-            </a:fld>
-            <a:endParaRPr lang="en-US"/>
-          </a:p>
-        </p:txBody>
-      </p:sp>
     </p:spTree>
     <p:extLst>
       <p:ext uri="{BB962C8B-B14F-4D97-AF65-F5344CB8AC3E}">
-        <p14:creationId xmlns:p14="http://schemas.microsoft.com/office/powerpoint/2010/main" val="1024086991"/>
+        <p14:creationId xmlns:p14="http://schemas.microsoft.com/office/powerpoint/2010/main" val="1625898402"/>
       </p:ext>
     </p:extLst>
   </p:cSld>
@@ -514,10 +295,6 @@
           <a:bodyPr/>
           <a:lstStyle/>
           <a:p>
-            <a:r>
-              <a:rPr lang="en-US" dirty="0"/>
-              <a:t/>
-            </a:r>
             <a:endParaRPr lang="en-US" dirty="0"/>
           </a:p>
         </p:txBody>
@@ -602,10 +379,6 @@
           <a:bodyPr/>
           <a:lstStyle/>
           <a:p>
-            <a:r>
-              <a:rPr lang="en-US" dirty="0"/>
-              <a:t/>
-            </a:r>
             <a:endParaRPr lang="en-US" dirty="0"/>
           </a:p>
         </p:txBody>
@@ -690,10 +463,6 @@
           <a:bodyPr/>
           <a:lstStyle/>
           <a:p>
-            <a:r>
-              <a:rPr lang="en-US" dirty="0"/>
-              <a:t/>
-            </a:r>
             <a:endParaRPr lang="en-US" dirty="0"/>
           </a:p>
         </p:txBody>
@@ -778,10 +547,6 @@
           <a:bodyPr/>
           <a:lstStyle/>
           <a:p>
-            <a:r>
-              <a:rPr lang="en-US" dirty="0"/>
-              <a:t/>
-            </a:r>
             <a:endParaRPr lang="en-US" dirty="0"/>
           </a:p>
         </p:txBody>
@@ -866,10 +631,6 @@
           <a:bodyPr/>
           <a:lstStyle/>
           <a:p>
-            <a:r>
-              <a:rPr lang="en-US" dirty="0"/>
-              <a:t/>
-            </a:r>
             <a:endParaRPr lang="en-US" dirty="0"/>
           </a:p>
         </p:txBody>
@@ -954,10 +715,6 @@
           <a:bodyPr/>
           <a:lstStyle/>
           <a:p>
-            <a:r>
-              <a:rPr lang="en-US" dirty="0"/>
-              <a:t/>
-            </a:r>
             <a:endParaRPr lang="en-US" dirty="0"/>
           </a:p>
         </p:txBody>
@@ -1042,10 +799,6 @@
           <a:bodyPr/>
           <a:lstStyle/>
           <a:p>
-            <a:r>
-              <a:rPr lang="en-US" dirty="0"/>
-              <a:t/>
-            </a:r>
             <a:endParaRPr lang="en-US" dirty="0"/>
           </a:p>
         </p:txBody>
@@ -1130,10 +883,6 @@
           <a:bodyPr/>
           <a:lstStyle/>
           <a:p>
-            <a:r>
-              <a:rPr lang="en-US" dirty="0"/>
-              <a:t/>
-            </a:r>
             <a:endParaRPr lang="en-US" dirty="0"/>
           </a:p>
         </p:txBody>
@@ -1218,10 +967,6 @@
           <a:bodyPr/>
           <a:lstStyle/>
           <a:p>
-            <a:r>
-              <a:rPr lang="en-US" dirty="0"/>
-              <a:t/>
-            </a:r>
             <a:endParaRPr lang="en-US" dirty="0"/>
           </a:p>
         </p:txBody>
@@ -1306,10 +1051,6 @@
           <a:bodyPr/>
           <a:lstStyle/>
           <a:p>
-            <a:r>
-              <a:rPr lang="en-US" dirty="0"/>
-              <a:t/>
-            </a:r>
             <a:endParaRPr lang="en-US" dirty="0"/>
           </a:p>
         </p:txBody>
@@ -1394,10 +1135,6 @@
           <a:bodyPr/>
           <a:lstStyle/>
           <a:p>
-            <a:r>
-              <a:rPr lang="en-US" dirty="0"/>
-              <a:t/>
-            </a:r>
             <a:endParaRPr lang="en-US" dirty="0"/>
           </a:p>
         </p:txBody>
@@ -1482,10 +1219,6 @@
           <a:bodyPr/>
           <a:lstStyle/>
           <a:p>
-            <a:r>
-              <a:rPr lang="en-US" dirty="0"/>
-              <a:t/>
-            </a:r>
             <a:endParaRPr lang="en-US" dirty="0"/>
           </a:p>
         </p:txBody>
@@ -1570,10 +1303,6 @@
           <a:bodyPr/>
           <a:lstStyle/>
           <a:p>
-            <a:r>
-              <a:rPr lang="en-US" dirty="0"/>
-              <a:t/>
-            </a:r>
             <a:endParaRPr lang="en-US" dirty="0"/>
           </a:p>
         </p:txBody>
@@ -1658,10 +1387,6 @@
           <a:bodyPr/>
           <a:lstStyle/>
           <a:p>
-            <a:r>
-              <a:rPr lang="en-US" dirty="0"/>
-              <a:t/>
-            </a:r>
             <a:endParaRPr lang="en-US" dirty="0"/>
           </a:p>
         </p:txBody>
@@ -1746,10 +1471,6 @@
           <a:bodyPr/>
           <a:lstStyle/>
           <a:p>
-            <a:r>
-              <a:rPr lang="en-US" dirty="0"/>
-              <a:t/>
-            </a:r>
             <a:endParaRPr lang="en-US" dirty="0"/>
           </a:p>
         </p:txBody>
@@ -1823,6 +1544,11 @@
 <file path=ppt/slideMasters/slideMaster1.xml><?xml version="1.0" encoding="utf-8"?>
 <p:sldMaster xmlns:a="http://schemas.openxmlformats.org/drawingml/2006/main" xmlns:r="http://schemas.openxmlformats.org/officeDocument/2006/relationships" xmlns:p="http://schemas.openxmlformats.org/presentationml/2006/main">
   <p:cSld>
+    <p:bg>
+      <p:bgRef idx="1001">
+        <a:schemeClr val="bg1"/>
+      </p:bgRef>
+    </p:bg>
     <p:spTree>
       <p:nvGrpSpPr>
         <p:cNvPr id="1" name=""/>
@@ -2138,6 +1864,13 @@
             <a:prstDash val="solid"/>
           </a:ln>
         </p:spPr>
+        <p:txBody>
+          <a:bodyPr/>
+          <a:lstStyle/>
+          <a:p>
+            <a:endParaRPr lang="zh-CN" altLang="en-US" dirty="0"/>
+          </a:p>
+        </p:txBody>
       </p:sp>
       <p:sp>
         <p:nvSpPr>
@@ -2185,11 +1918,11 @@
           <a:bodyPr wrap="square" rtlCol="0" anchor="ctr"/>
           <a:lstStyle/>
           <a:p>
-            <a:pPr indent="0" marL="0">
-              <a:buNone/>
-            </a:pPr>
-            <a:r>
-              <a:rPr lang="en-US" sz="1100" spc="300" kern="0" dirty="0">
+            <a:pPr marL="0" indent="0">
+              <a:buNone/>
+            </a:pPr>
+            <a:r>
+              <a:rPr lang="en-US" sz="1100" kern="0" spc="300" dirty="0">
                 <a:solidFill>
                   <a:srgbClr val="8B95A5"/>
                 </a:solidFill>
@@ -2224,7 +1957,7 @@
           <a:bodyPr wrap="square" rtlCol="0" anchor="ctr"/>
           <a:lstStyle/>
           <a:p>
-            <a:pPr indent="0" marL="0">
+            <a:pPr marL="0" indent="0">
               <a:buNone/>
             </a:pPr>
             <a:r>
@@ -2239,68 +1972,6 @@
               <a:t>知域引擎</a:t>
             </a:r>
             <a:endParaRPr lang="en-US" sz="4800" dirty="0"/>
-          </a:p>
-        </p:txBody>
-      </p:sp>
-      <p:sp>
-        <p:nvSpPr>
-          <p:cNvPr id="6" name="Text 4"/>
-          <p:cNvSpPr/>
-          <p:nvPr/>
-        </p:nvSpPr>
-        <p:spPr>
-          <a:xfrm>
-            <a:off x="731520" y="3611880"/>
-            <a:ext cx="3657600" cy="822960"/>
-          </a:xfrm>
-          <a:prstGeom prst="rect">
-            <a:avLst/>
-          </a:prstGeom>
-          <a:noFill/>
-          <a:ln/>
-        </p:spPr>
-        <p:txBody>
-          <a:bodyPr wrap="square" rtlCol="0" anchor="ctr"/>
-          <a:lstStyle/>
-          <a:p>
-            <a:pPr indent="0" marL="0">
-              <a:lnSpc>
-                <a:spcPts val="140"/>
-              </a:lnSpc>
-              <a:buNone/>
-            </a:pPr>
-            <a:r>
-              <a:rPr lang="en-US" sz="1800" dirty="0">
-                <a:solidFill>
-                  <a:srgbClr val="C8D0DC"/>
-                </a:solidFill>
-                <a:latin typeface="Microsoft YaHei" pitchFamily="34" charset="0"/>
-                <a:ea typeface="Microsoft YaHei" pitchFamily="34" charset="-122"/>
-                <a:cs typeface="Microsoft YaHei" pitchFamily="34" charset="-120"/>
-              </a:rPr>
-              <a:t>领域知识个性化生成与</a:t>
-            </a:r>
-            <a:endParaRPr lang="en-US" sz="1800" dirty="0"/>
-          </a:p>
-          <a:p>
-            <a:pPr indent="0" marL="0">
-              <a:lnSpc>
-                <a:spcPts val="140"/>
-              </a:lnSpc>
-              <a:buNone/>
-            </a:pPr>
-            <a:r>
-              <a:rPr lang="en-US" sz="1800" dirty="0">
-                <a:solidFill>
-                  <a:srgbClr val="C8D0DC"/>
-                </a:solidFill>
-                <a:latin typeface="Microsoft YaHei" pitchFamily="34" charset="0"/>
-                <a:ea typeface="Microsoft YaHei" pitchFamily="34" charset="-122"/>
-                <a:cs typeface="Microsoft YaHei" pitchFamily="34" charset="-120"/>
-              </a:rPr>
-              <a:t>多智能体协同决策系统</a:t>
-            </a:r>
-            <a:endParaRPr lang="en-US" sz="1800" dirty="0"/>
           </a:p>
         </p:txBody>
       </p:sp>
@@ -2325,7 +1996,7 @@
           <a:bodyPr wrap="square" rtlCol="0" anchor="ctr"/>
           <a:lstStyle/>
           <a:p>
-            <a:pPr indent="0" marL="0">
+            <a:pPr marL="0" indent="0">
               <a:buNone/>
             </a:pPr>
             <a:r>
@@ -2911,12 +2582,12 @@
           <a:ln/>
         </p:spPr>
         <p:txBody>
-          <a:bodyPr wrap="none" lIns="0" tIns="0" rIns="0" bIns="0" rtlCol="0" anchor="t" vert="horz">
+          <a:bodyPr vert="horz" wrap="none" lIns="0" tIns="0" rIns="0" bIns="0" rtlCol="0" anchor="t">
             <a:normAutofit/>
           </a:bodyPr>
           <a:lstStyle/>
           <a:p>
-            <a:pPr indent="0" marL="0">
+            <a:pPr marL="0" indent="0">
               <a:buNone/>
             </a:pPr>
             <a:r>
@@ -2955,7 +2626,7 @@
           <a:bodyPr wrap="square" rtlCol="0" anchor="ctr"/>
           <a:lstStyle/>
           <a:p>
-            <a:pPr indent="0" marL="0">
+            <a:pPr marL="0" indent="0">
               <a:buNone/>
             </a:pPr>
             <a:r>
@@ -2994,7 +2665,7 @@
           <a:bodyPr wrap="square" rtlCol="0" anchor="t"/>
           <a:lstStyle/>
           <a:p>
-            <a:pPr indent="0" marL="0">
+            <a:pPr marL="0" indent="0">
               <a:buNone/>
             </a:pPr>
             <a:r>
@@ -3053,12 +2724,12 @@
           <a:ln/>
         </p:spPr>
         <p:txBody>
-          <a:bodyPr wrap="none" lIns="0" tIns="0" rIns="0" bIns="0" rtlCol="0" anchor="t" vert="horz">
+          <a:bodyPr vert="horz" wrap="none" lIns="0" tIns="0" rIns="0" bIns="0" rtlCol="0" anchor="t">
             <a:normAutofit/>
           </a:bodyPr>
           <a:lstStyle/>
           <a:p>
-            <a:pPr indent="0" marL="0">
+            <a:pPr marL="0" indent="0">
               <a:buNone/>
             </a:pPr>
             <a:r>
@@ -3097,7 +2768,7 @@
           <a:bodyPr wrap="square" rtlCol="0" anchor="ctr"/>
           <a:lstStyle/>
           <a:p>
-            <a:pPr indent="0" marL="0">
+            <a:pPr marL="0" indent="0">
               <a:buNone/>
             </a:pPr>
             <a:r>
@@ -3136,7 +2807,7 @@
           <a:bodyPr wrap="square" rtlCol="0" anchor="t"/>
           <a:lstStyle/>
           <a:p>
-            <a:pPr indent="0" marL="0">
+            <a:pPr marL="0" indent="0">
               <a:buNone/>
             </a:pPr>
             <a:r>
@@ -3195,12 +2866,12 @@
           <a:ln/>
         </p:spPr>
         <p:txBody>
-          <a:bodyPr wrap="none" lIns="0" tIns="0" rIns="0" bIns="0" rtlCol="0" anchor="t" vert="horz">
+          <a:bodyPr vert="horz" wrap="none" lIns="0" tIns="0" rIns="0" bIns="0" rtlCol="0" anchor="t">
             <a:normAutofit/>
           </a:bodyPr>
           <a:lstStyle/>
           <a:p>
-            <a:pPr indent="0" marL="0">
+            <a:pPr marL="0" indent="0">
               <a:buNone/>
             </a:pPr>
             <a:r>
@@ -3239,7 +2910,7 @@
           <a:bodyPr wrap="square" rtlCol="0" anchor="ctr"/>
           <a:lstStyle/>
           <a:p>
-            <a:pPr indent="0" marL="0">
+            <a:pPr marL="0" indent="0">
               <a:buNone/>
             </a:pPr>
             <a:r>
@@ -3278,7 +2949,7 @@
           <a:bodyPr wrap="square" rtlCol="0" anchor="t"/>
           <a:lstStyle/>
           <a:p>
-            <a:pPr indent="0" marL="0">
+            <a:pPr marL="0" indent="0">
               <a:buNone/>
             </a:pPr>
             <a:r>
@@ -3337,12 +3008,12 @@
           <a:ln/>
         </p:spPr>
         <p:txBody>
-          <a:bodyPr wrap="none" lIns="0" tIns="0" rIns="0" bIns="0" rtlCol="0" anchor="t" vert="horz">
+          <a:bodyPr vert="horz" wrap="none" lIns="0" tIns="0" rIns="0" bIns="0" rtlCol="0" anchor="t">
             <a:normAutofit/>
           </a:bodyPr>
           <a:lstStyle/>
           <a:p>
-            <a:pPr indent="0" marL="0">
+            <a:pPr marL="0" indent="0">
               <a:buNone/>
             </a:pPr>
             <a:r>
@@ -3381,19 +3052,18 @@
           <a:bodyPr wrap="square" rtlCol="0" anchor="ctr"/>
           <a:lstStyle/>
           <a:p>
-            <a:pPr indent="0" marL="0">
-              <a:buNone/>
-            </a:pPr>
-            <a:r>
-              <a:rPr lang="en-US" sz="1600" b="1" dirty="0">
+            <a:pPr marL="0" indent="0">
+              <a:buNone/>
+            </a:pPr>
+            <a:r>
+              <a:rPr lang="zh-CN" altLang="en-US" sz="1600" b="1" dirty="0">
                 <a:solidFill>
                   <a:srgbClr val="1A1A2E"/>
                 </a:solidFill>
                 <a:latin typeface="Microsoft YaHei" pitchFamily="34" charset="0"/>
                 <a:ea typeface="Microsoft YaHei" pitchFamily="34" charset="-122"/>
-                <a:cs typeface="Microsoft YaHei" pitchFamily="34" charset="-120"/>
-              </a:rPr>
-              <a:t>全形态部署</a:t>
+              </a:rPr>
+              <a:t>发展规划</a:t>
             </a:r>
             <a:endParaRPr lang="en-US" sz="1600" dirty="0"/>
           </a:p>
@@ -3420,11 +3090,8 @@
           <a:bodyPr wrap="square" rtlCol="0" anchor="t"/>
           <a:lstStyle/>
           <a:p>
-            <a:pPr indent="0" marL="0">
-              <a:buNone/>
-            </a:pPr>
-            <a:r>
-              <a:rPr lang="en-US" sz="1100" dirty="0">
+            <a:r>
+              <a:rPr lang="zh-CN" altLang="en-US" sz="1100" dirty="0">
                 <a:solidFill>
                   <a:srgbClr val="5A6070"/>
                 </a:solidFill>
@@ -3432,48 +3099,18 @@
                 <a:ea typeface="Microsoft YaHei" pitchFamily="34" charset="-122"/>
                 <a:cs typeface="Microsoft YaHei" pitchFamily="34" charset="-120"/>
               </a:rPr>
-              <a:t>Docker / K8s / Windows 桌面版</a:t>
-            </a:r>
-            <a:endParaRPr lang="en-US" sz="1100" dirty="0"/>
-          </a:p>
-        </p:txBody>
-      </p:sp>
-      <p:sp>
-        <p:nvSpPr>
-          <p:cNvPr id="45" name="Text 43"/>
-          <p:cNvSpPr/>
-          <p:nvPr/>
-        </p:nvSpPr>
-        <p:spPr>
-          <a:xfrm>
-            <a:off x="5669280" y="6217920"/>
-            <a:ext cx="5486400" cy="274320"/>
-          </a:xfrm>
-          <a:prstGeom prst="rect">
-            <a:avLst/>
-          </a:prstGeom>
-          <a:noFill/>
-          <a:ln/>
-        </p:spPr>
-        <p:txBody>
-          <a:bodyPr wrap="square" rtlCol="0" anchor="ctr"/>
-          <a:lstStyle/>
-          <a:p>
-            <a:pPr indent="0" marL="0">
-              <a:buNone/>
-            </a:pPr>
-            <a:r>
-              <a:rPr lang="en-US" sz="1000" dirty="0">
-                <a:solidFill>
-                  <a:srgbClr val="5A6070"/>
-                </a:solidFill>
-                <a:latin typeface="Microsoft YaHei" pitchFamily="34" charset="0"/>
-                <a:ea typeface="Microsoft YaHei" pitchFamily="34" charset="-122"/>
-                <a:cs typeface="Microsoft YaHei" pitchFamily="34" charset="-120"/>
-              </a:rPr>
-              <a:t>上海云之脑智能科技有限公司</a:t>
-            </a:r>
-            <a:endParaRPr lang="en-US" sz="1000" dirty="0"/>
+              <a:t>未来项目的规划</a:t>
+            </a:r>
+            <a:endParaRPr lang="en-US" altLang="zh-CN" sz="1100" dirty="0"/>
+          </a:p>
+          <a:p>
+            <a:pPr marL="0" indent="0">
+              <a:buNone/>
+            </a:pPr>
+            <a:endParaRPr lang="en-US" sz="1100" dirty="0">
+              <a:latin typeface="微软雅黑" panose="020B0503020204020204" pitchFamily="34" charset="-122"/>
+              <a:ea typeface="微软雅黑" panose="020B0503020204020204" pitchFamily="34" charset="-122"/>
+            </a:endParaRPr>
           </a:p>
         </p:txBody>
       </p:sp>
@@ -3523,11 +3160,11 @@
           <a:bodyPr wrap="square" rtlCol="0" anchor="ctr"/>
           <a:lstStyle/>
           <a:p>
-            <a:pPr indent="0" marL="0">
-              <a:buNone/>
-            </a:pPr>
-            <a:r>
-              <a:rPr lang="en-US" sz="1100" spc="200" kern="0" dirty="0">
+            <a:pPr marL="0" indent="0">
+              <a:buNone/>
+            </a:pPr>
+            <a:r>
+              <a:rPr lang="en-US" sz="1100" kern="0" spc="200" dirty="0">
                 <a:solidFill>
                   <a:srgbClr val="5A6070"/>
                 </a:solidFill>
@@ -3587,7 +3224,7 @@
           <a:bodyPr wrap="square" rtlCol="0" anchor="ctr"/>
           <a:lstStyle/>
           <a:p>
-            <a:pPr indent="0" marL="0">
+            <a:pPr marL="0" indent="0">
               <a:buNone/>
             </a:pPr>
             <a:r>
@@ -3649,7 +3286,7 @@
           <a:bodyPr wrap="square" rtlCol="0" anchor="ctr"/>
           <a:lstStyle/>
           <a:p>
-            <a:pPr indent="0" marL="0">
+            <a:pPr marL="0" indent="0">
               <a:buNone/>
             </a:pPr>
             <a:r>
@@ -3738,7 +3375,7 @@
           <a:bodyPr wrap="square" rtlCol="0" anchor="ctr"/>
           <a:lstStyle/>
           <a:p>
-            <a:pPr indent="0" marL="0">
+            <a:pPr marL="0" indent="0">
               <a:buNone/>
             </a:pPr>
             <a:r>
@@ -3777,7 +3414,7 @@
           <a:bodyPr wrap="square" rtlCol="0" anchor="ctr"/>
           <a:lstStyle/>
           <a:p>
-            <a:pPr indent="0" marL="0">
+            <a:pPr marL="0" indent="0">
               <a:buNone/>
             </a:pPr>
             <a:r>
@@ -3841,7 +3478,7 @@
           <a:bodyPr wrap="square" rtlCol="0" anchor="ctr"/>
           <a:lstStyle/>
           <a:p>
-            <a:pPr algn="ctr" indent="0" marL="0">
+            <a:pPr marL="0" indent="0" algn="ctr">
               <a:buNone/>
             </a:pPr>
             <a:r>
@@ -3930,7 +3567,7 @@
           <a:bodyPr wrap="square" rtlCol="0" anchor="ctr"/>
           <a:lstStyle/>
           <a:p>
-            <a:pPr indent="0" marL="0">
+            <a:pPr marL="0" indent="0">
               <a:buNone/>
             </a:pPr>
             <a:r>
@@ -3969,7 +3606,7 @@
           <a:bodyPr wrap="square" rtlCol="0" anchor="ctr"/>
           <a:lstStyle/>
           <a:p>
-            <a:pPr indent="0" marL="0">
+            <a:pPr marL="0" indent="0">
               <a:buNone/>
             </a:pPr>
             <a:r>
@@ -4033,7 +3670,7 @@
           <a:bodyPr wrap="square" rtlCol="0" anchor="ctr"/>
           <a:lstStyle/>
           <a:p>
-            <a:pPr algn="ctr" indent="0" marL="0">
+            <a:pPr marL="0" indent="0" algn="ctr">
               <a:buNone/>
             </a:pPr>
             <a:r>
@@ -4122,7 +3759,7 @@
           <a:bodyPr wrap="square" rtlCol="0" anchor="ctr"/>
           <a:lstStyle/>
           <a:p>
-            <a:pPr indent="0" marL="0">
+            <a:pPr marL="0" indent="0">
               <a:buNone/>
             </a:pPr>
             <a:r>
@@ -4161,7 +3798,7 @@
           <a:bodyPr wrap="square" rtlCol="0" anchor="ctr"/>
           <a:lstStyle/>
           <a:p>
-            <a:pPr indent="0" marL="0">
+            <a:pPr marL="0" indent="0">
               <a:buNone/>
             </a:pPr>
             <a:r>
@@ -4225,7 +3862,7 @@
           <a:bodyPr wrap="square" rtlCol="0" anchor="ctr"/>
           <a:lstStyle/>
           <a:p>
-            <a:pPr algn="ctr" indent="0" marL="0">
+            <a:pPr marL="0" indent="0" algn="ctr">
               <a:buNone/>
             </a:pPr>
             <a:r>
@@ -4314,7 +3951,7 @@
           <a:bodyPr wrap="square" rtlCol="0" anchor="ctr"/>
           <a:lstStyle/>
           <a:p>
-            <a:pPr indent="0" marL="0">
+            <a:pPr marL="0" indent="0">
               <a:buNone/>
             </a:pPr>
             <a:r>
@@ -4353,7 +3990,7 @@
           <a:bodyPr wrap="square" rtlCol="0" anchor="ctr"/>
           <a:lstStyle/>
           <a:p>
-            <a:pPr indent="0" marL="0">
+            <a:pPr marL="0" indent="0">
               <a:buNone/>
             </a:pPr>
             <a:r>
@@ -4417,7 +4054,7 @@
           <a:bodyPr wrap="square" rtlCol="0" anchor="ctr"/>
           <a:lstStyle/>
           <a:p>
-            <a:pPr algn="ctr" indent="0" marL="0">
+            <a:pPr marL="0" indent="0" algn="ctr">
               <a:buNone/>
             </a:pPr>
             <a:r>
@@ -4506,7 +4143,7 @@
           <a:bodyPr wrap="square" rtlCol="0" anchor="ctr"/>
           <a:lstStyle/>
           <a:p>
-            <a:pPr indent="0" marL="0">
+            <a:pPr marL="0" indent="0">
               <a:buNone/>
             </a:pPr>
             <a:r>
@@ -4545,7 +4182,7 @@
           <a:bodyPr wrap="square" rtlCol="0" anchor="ctr"/>
           <a:lstStyle/>
           <a:p>
-            <a:pPr indent="0" marL="0">
+            <a:pPr marL="0" indent="0">
               <a:buNone/>
             </a:pPr>
             <a:r>
@@ -4609,7 +4246,7 @@
           <a:bodyPr wrap="square" rtlCol="0" anchor="ctr"/>
           <a:lstStyle/>
           <a:p>
-            <a:pPr algn="ctr" indent="0" marL="0">
+            <a:pPr marL="0" indent="0" algn="ctr">
               <a:buNone/>
             </a:pPr>
             <a:r>
@@ -4648,7 +4285,7 @@
           <a:bodyPr wrap="square" rtlCol="0" anchor="ctr"/>
           <a:lstStyle/>
           <a:p>
-            <a:pPr indent="0" marL="0">
+            <a:pPr marL="0" indent="0">
               <a:buNone/>
             </a:pPr>
             <a:r>
@@ -4709,12 +4346,12 @@
           <a:ln/>
         </p:spPr>
         <p:txBody>
-          <a:bodyPr wrap="none" lIns="0" tIns="0" rIns="0" bIns="0" rtlCol="0" anchor="ctr" vert="horz">
+          <a:bodyPr vert="horz" wrap="none" lIns="0" tIns="0" rIns="0" bIns="0" rtlCol="0" anchor="ctr">
             <a:normAutofit/>
           </a:bodyPr>
           <a:lstStyle/>
           <a:p>
-            <a:pPr indent="0" marL="0">
+            <a:pPr marL="0" indent="0">
               <a:buNone/>
             </a:pPr>
             <a:r>
@@ -4753,7 +4390,7 @@
           <a:bodyPr wrap="square" rtlCol="0" anchor="ctr"/>
           <a:lstStyle/>
           <a:p>
-            <a:pPr indent="0" marL="0">
+            <a:pPr marL="0" indent="0">
               <a:buNone/>
             </a:pPr>
             <a:r>
@@ -4792,7 +4429,7 @@
           <a:bodyPr wrap="square" rtlCol="0" anchor="t"/>
           <a:lstStyle/>
           <a:p>
-            <a:pPr indent="0" marL="0">
+            <a:pPr marL="0" indent="0">
               <a:lnSpc>
                 <a:spcPts val="130"/>
               </a:lnSpc>
@@ -4856,12 +4493,12 @@
           <a:ln/>
         </p:spPr>
         <p:txBody>
-          <a:bodyPr wrap="none" lIns="0" tIns="0" rIns="0" bIns="0" rtlCol="0" anchor="ctr" vert="horz">
+          <a:bodyPr vert="horz" wrap="none" lIns="0" tIns="0" rIns="0" bIns="0" rtlCol="0" anchor="ctr">
             <a:normAutofit/>
           </a:bodyPr>
           <a:lstStyle/>
           <a:p>
-            <a:pPr indent="0" marL="0">
+            <a:pPr marL="0" indent="0">
               <a:buNone/>
             </a:pPr>
             <a:r>
@@ -4900,7 +4537,7 @@
           <a:bodyPr wrap="square" rtlCol="0" anchor="ctr"/>
           <a:lstStyle/>
           <a:p>
-            <a:pPr indent="0" marL="0">
+            <a:pPr marL="0" indent="0">
               <a:buNone/>
             </a:pPr>
             <a:r>
@@ -4939,7 +4576,7 @@
           <a:bodyPr wrap="square" rtlCol="0" anchor="t"/>
           <a:lstStyle/>
           <a:p>
-            <a:pPr indent="0" marL="0">
+            <a:pPr marL="0" indent="0">
               <a:lnSpc>
                 <a:spcPts val="130"/>
               </a:lnSpc>
@@ -5003,12 +4640,12 @@
           <a:ln/>
         </p:spPr>
         <p:txBody>
-          <a:bodyPr wrap="none" lIns="0" tIns="0" rIns="0" bIns="0" rtlCol="0" anchor="ctr" vert="horz">
+          <a:bodyPr vert="horz" wrap="none" lIns="0" tIns="0" rIns="0" bIns="0" rtlCol="0" anchor="ctr">
             <a:normAutofit/>
           </a:bodyPr>
           <a:lstStyle/>
           <a:p>
-            <a:pPr indent="0" marL="0">
+            <a:pPr marL="0" indent="0">
               <a:buNone/>
             </a:pPr>
             <a:r>
@@ -5047,7 +4684,7 @@
           <a:bodyPr wrap="square" rtlCol="0" anchor="ctr"/>
           <a:lstStyle/>
           <a:p>
-            <a:pPr indent="0" marL="0">
+            <a:pPr marL="0" indent="0">
               <a:buNone/>
             </a:pPr>
             <a:r>
@@ -5086,7 +4723,7 @@
           <a:bodyPr wrap="square" rtlCol="0" anchor="t"/>
           <a:lstStyle/>
           <a:p>
-            <a:pPr indent="0" marL="0">
+            <a:pPr marL="0" indent="0">
               <a:lnSpc>
                 <a:spcPts val="130"/>
               </a:lnSpc>
@@ -5150,12 +4787,12 @@
           <a:ln/>
         </p:spPr>
         <p:txBody>
-          <a:bodyPr wrap="none" lIns="0" tIns="0" rIns="0" bIns="0" rtlCol="0" anchor="ctr" vert="horz">
+          <a:bodyPr vert="horz" wrap="none" lIns="0" tIns="0" rIns="0" bIns="0" rtlCol="0" anchor="ctr">
             <a:normAutofit/>
           </a:bodyPr>
           <a:lstStyle/>
           <a:p>
-            <a:pPr indent="0" marL="0">
+            <a:pPr marL="0" indent="0">
               <a:buNone/>
             </a:pPr>
             <a:r>
@@ -5194,7 +4831,7 @@
           <a:bodyPr wrap="square" rtlCol="0" anchor="ctr"/>
           <a:lstStyle/>
           <a:p>
-            <a:pPr indent="0" marL="0">
+            <a:pPr marL="0" indent="0">
               <a:buNone/>
             </a:pPr>
             <a:r>
@@ -5233,7 +4870,7 @@
           <a:bodyPr wrap="square" rtlCol="0" anchor="t"/>
           <a:lstStyle/>
           <a:p>
-            <a:pPr indent="0" marL="0">
+            <a:pPr marL="0" indent="0">
               <a:lnSpc>
                 <a:spcPts val="130"/>
               </a:lnSpc>
@@ -5298,7 +4935,7 @@
           <a:bodyPr wrap="square" rtlCol="0" anchor="ctr"/>
           <a:lstStyle/>
           <a:p>
-            <a:pPr indent="0" marL="0">
+            <a:pPr marL="0" indent="0">
               <a:buNone/>
             </a:pPr>
             <a:r>
@@ -5337,7 +4974,7 @@
           <a:bodyPr wrap="square" rtlCol="0" anchor="ctr"/>
           <a:lstStyle/>
           <a:p>
-            <a:pPr algn="r" indent="0" marL="0">
+            <a:pPr marL="0" indent="0" algn="r">
               <a:buNone/>
             </a:pPr>
             <a:r>
@@ -5401,11 +5038,11 @@
           <a:bodyPr wrap="square" rtlCol="0" anchor="ctr"/>
           <a:lstStyle/>
           <a:p>
-            <a:pPr indent="0" marL="0">
-              <a:buNone/>
-            </a:pPr>
-            <a:r>
-              <a:rPr lang="en-US" sz="1100" spc="200" kern="0" dirty="0">
+            <a:pPr marL="0" indent="0">
+              <a:buNone/>
+            </a:pPr>
+            <a:r>
+              <a:rPr lang="en-US" sz="1100" kern="0" spc="200" dirty="0">
                 <a:solidFill>
                   <a:srgbClr val="5A6070"/>
                 </a:solidFill>
@@ -5465,7 +5102,7 @@
           <a:bodyPr wrap="square" rtlCol="0" anchor="ctr"/>
           <a:lstStyle/>
           <a:p>
-            <a:pPr indent="0" marL="0">
+            <a:pPr marL="0" indent="0">
               <a:buNone/>
             </a:pPr>
             <a:r>
@@ -5602,7 +5239,7 @@
           <a:bodyPr wrap="square" rtlCol="0" anchor="ctr"/>
           <a:lstStyle/>
           <a:p>
-            <a:pPr algn="ctr" indent="0" marL="0">
+            <a:pPr marL="0" indent="0" algn="ctr">
               <a:buNone/>
             </a:pPr>
             <a:r>
@@ -5666,7 +5303,7 @@
           <a:bodyPr wrap="square" rtlCol="0" anchor="ctr"/>
           <a:lstStyle/>
           <a:p>
-            <a:pPr algn="ctr" indent="0" marL="0">
+            <a:pPr marL="0" indent="0" algn="ctr">
               <a:buNone/>
             </a:pPr>
             <a:r>
@@ -5705,7 +5342,7 @@
           <a:bodyPr wrap="square" rtlCol="0" anchor="ctr"/>
           <a:lstStyle/>
           <a:p>
-            <a:pPr indent="0" marL="0">
+            <a:pPr marL="0" indent="0">
               <a:buNone/>
             </a:pPr>
             <a:r>
@@ -5744,7 +5381,7 @@
           <a:bodyPr wrap="square" rtlCol="0" anchor="t"/>
           <a:lstStyle/>
           <a:p>
-            <a:pPr indent="0" marL="0">
+            <a:pPr marL="0" indent="0">
               <a:lnSpc>
                 <a:spcPts val="140"/>
               </a:lnSpc>
@@ -5861,7 +5498,7 @@
           <a:bodyPr wrap="square" rtlCol="0" anchor="ctr"/>
           <a:lstStyle/>
           <a:p>
-            <a:pPr algn="ctr" indent="0" marL="0">
+            <a:pPr marL="0" indent="0" algn="ctr">
               <a:buNone/>
             </a:pPr>
             <a:r>
@@ -5925,7 +5562,7 @@
           <a:bodyPr wrap="square" rtlCol="0" anchor="ctr"/>
           <a:lstStyle/>
           <a:p>
-            <a:pPr algn="ctr" indent="0" marL="0">
+            <a:pPr marL="0" indent="0" algn="ctr">
               <a:buNone/>
             </a:pPr>
             <a:r>
@@ -5964,7 +5601,7 @@
           <a:bodyPr wrap="square" rtlCol="0" anchor="ctr"/>
           <a:lstStyle/>
           <a:p>
-            <a:pPr indent="0" marL="0">
+            <a:pPr marL="0" indent="0">
               <a:buNone/>
             </a:pPr>
             <a:r>
@@ -6003,7 +5640,7 @@
           <a:bodyPr wrap="square" rtlCol="0" anchor="t"/>
           <a:lstStyle/>
           <a:p>
-            <a:pPr indent="0" marL="0">
+            <a:pPr marL="0" indent="0">
               <a:lnSpc>
                 <a:spcPts val="140"/>
               </a:lnSpc>
@@ -6120,7 +5757,7 @@
           <a:bodyPr wrap="square" rtlCol="0" anchor="ctr"/>
           <a:lstStyle/>
           <a:p>
-            <a:pPr algn="ctr" indent="0" marL="0">
+            <a:pPr marL="0" indent="0" algn="ctr">
               <a:buNone/>
             </a:pPr>
             <a:r>
@@ -6184,7 +5821,7 @@
           <a:bodyPr wrap="square" rtlCol="0" anchor="ctr"/>
           <a:lstStyle/>
           <a:p>
-            <a:pPr algn="ctr" indent="0" marL="0">
+            <a:pPr marL="0" indent="0" algn="ctr">
               <a:buNone/>
             </a:pPr>
             <a:r>
@@ -6223,7 +5860,7 @@
           <a:bodyPr wrap="square" rtlCol="0" anchor="ctr"/>
           <a:lstStyle/>
           <a:p>
-            <a:pPr indent="0" marL="0">
+            <a:pPr marL="0" indent="0">
               <a:buNone/>
             </a:pPr>
             <a:r>
@@ -6262,7 +5899,7 @@
           <a:bodyPr wrap="square" rtlCol="0" anchor="t"/>
           <a:lstStyle/>
           <a:p>
-            <a:pPr indent="0" marL="0">
+            <a:pPr marL="0" indent="0">
               <a:lnSpc>
                 <a:spcPts val="140"/>
               </a:lnSpc>
@@ -6379,7 +6016,7 @@
           <a:bodyPr wrap="square" rtlCol="0" anchor="ctr"/>
           <a:lstStyle/>
           <a:p>
-            <a:pPr algn="ctr" indent="0" marL="0">
+            <a:pPr marL="0" indent="0" algn="ctr">
               <a:buNone/>
             </a:pPr>
             <a:r>
@@ -6443,7 +6080,7 @@
           <a:bodyPr wrap="square" rtlCol="0" anchor="ctr"/>
           <a:lstStyle/>
           <a:p>
-            <a:pPr algn="ctr" indent="0" marL="0">
+            <a:pPr marL="0" indent="0" algn="ctr">
               <a:buNone/>
             </a:pPr>
             <a:r>
@@ -6482,7 +6119,7 @@
           <a:bodyPr wrap="square" rtlCol="0" anchor="ctr"/>
           <a:lstStyle/>
           <a:p>
-            <a:pPr indent="0" marL="0">
+            <a:pPr marL="0" indent="0">
               <a:buNone/>
             </a:pPr>
             <a:r>
@@ -6521,7 +6158,7 @@
           <a:bodyPr wrap="square" rtlCol="0" anchor="t"/>
           <a:lstStyle/>
           <a:p>
-            <a:pPr indent="0" marL="0">
+            <a:pPr marL="0" indent="0">
               <a:lnSpc>
                 <a:spcPts val="140"/>
               </a:lnSpc>
@@ -6638,7 +6275,7 @@
           <a:bodyPr wrap="square" rtlCol="0" anchor="ctr"/>
           <a:lstStyle/>
           <a:p>
-            <a:pPr algn="ctr" indent="0" marL="0">
+            <a:pPr marL="0" indent="0" algn="ctr">
               <a:buNone/>
             </a:pPr>
             <a:r>
@@ -6702,7 +6339,7 @@
           <a:bodyPr wrap="square" rtlCol="0" anchor="ctr"/>
           <a:lstStyle/>
           <a:p>
-            <a:pPr algn="ctr" indent="0" marL="0">
+            <a:pPr marL="0" indent="0" algn="ctr">
               <a:buNone/>
             </a:pPr>
             <a:r>
@@ -6741,7 +6378,7 @@
           <a:bodyPr wrap="square" rtlCol="0" anchor="ctr"/>
           <a:lstStyle/>
           <a:p>
-            <a:pPr indent="0" marL="0">
+            <a:pPr marL="0" indent="0">
               <a:buNone/>
             </a:pPr>
             <a:r>
@@ -6780,7 +6417,7 @@
           <a:bodyPr wrap="square" rtlCol="0" anchor="t"/>
           <a:lstStyle/>
           <a:p>
-            <a:pPr indent="0" marL="0">
+            <a:pPr marL="0" indent="0">
               <a:lnSpc>
                 <a:spcPts val="140"/>
               </a:lnSpc>
@@ -6897,7 +6534,7 @@
           <a:bodyPr wrap="square" rtlCol="0" anchor="ctr"/>
           <a:lstStyle/>
           <a:p>
-            <a:pPr algn="ctr" indent="0" marL="0">
+            <a:pPr marL="0" indent="0" algn="ctr">
               <a:buNone/>
             </a:pPr>
             <a:r>
@@ -6961,7 +6598,7 @@
           <a:bodyPr wrap="square" rtlCol="0" anchor="ctr"/>
           <a:lstStyle/>
           <a:p>
-            <a:pPr algn="ctr" indent="0" marL="0">
+            <a:pPr marL="0" indent="0" algn="ctr">
               <a:buNone/>
             </a:pPr>
             <a:r>
@@ -7000,7 +6637,7 @@
           <a:bodyPr wrap="square" rtlCol="0" anchor="ctr"/>
           <a:lstStyle/>
           <a:p>
-            <a:pPr indent="0" marL="0">
+            <a:pPr marL="0" indent="0">
               <a:buNone/>
             </a:pPr>
             <a:r>
@@ -7039,7 +6676,7 @@
           <a:bodyPr wrap="square" rtlCol="0" anchor="t"/>
           <a:lstStyle/>
           <a:p>
-            <a:pPr indent="0" marL="0">
+            <a:pPr marL="0" indent="0">
               <a:lnSpc>
                 <a:spcPts val="140"/>
               </a:lnSpc>
@@ -7106,7 +6743,7 @@
           <a:bodyPr wrap="square" rtlCol="0" anchor="ctr"/>
           <a:lstStyle/>
           <a:p>
-            <a:pPr indent="0" marL="0">
+            <a:pPr marL="0" indent="0">
               <a:buNone/>
             </a:pPr>
             <a:r>
@@ -7145,7 +6782,7 @@
           <a:bodyPr wrap="square" rtlCol="0" anchor="ctr"/>
           <a:lstStyle/>
           <a:p>
-            <a:pPr algn="ctr" indent="0" marL="0">
+            <a:pPr marL="0" indent="0" algn="ctr">
               <a:buNone/>
             </a:pPr>
             <a:r>
@@ -7184,7 +6821,7 @@
           <a:bodyPr wrap="square" rtlCol="0" anchor="ctr"/>
           <a:lstStyle/>
           <a:p>
-            <a:pPr algn="ctr" indent="0" marL="0">
+            <a:pPr marL="0" indent="0" algn="ctr">
               <a:buNone/>
             </a:pPr>
             <a:r>
@@ -7223,7 +6860,7 @@
           <a:bodyPr wrap="square" rtlCol="0" anchor="ctr"/>
           <a:lstStyle/>
           <a:p>
-            <a:pPr algn="ctr" indent="0" marL="0">
+            <a:pPr marL="0" indent="0" algn="ctr">
               <a:buNone/>
             </a:pPr>
             <a:r>
@@ -7262,7 +6899,7 @@
           <a:bodyPr wrap="square" rtlCol="0" anchor="ctr"/>
           <a:lstStyle/>
           <a:p>
-            <a:pPr algn="ctr" indent="0" marL="0">
+            <a:pPr marL="0" indent="0" algn="ctr">
               <a:buNone/>
             </a:pPr>
             <a:r>
@@ -7301,7 +6938,7 @@
           <a:bodyPr wrap="square" rtlCol="0" anchor="ctr"/>
           <a:lstStyle/>
           <a:p>
-            <a:pPr algn="ctr" indent="0" marL="0">
+            <a:pPr marL="0" indent="0" algn="ctr">
               <a:buNone/>
             </a:pPr>
             <a:r>
@@ -7340,7 +6977,7 @@
           <a:bodyPr wrap="square" rtlCol="0" anchor="ctr"/>
           <a:lstStyle/>
           <a:p>
-            <a:pPr algn="ctr" indent="0" marL="0">
+            <a:pPr marL="0" indent="0" algn="ctr">
               <a:buNone/>
             </a:pPr>
             <a:r>
@@ -7379,7 +7016,7 @@
           <a:bodyPr wrap="square" rtlCol="0" anchor="ctr"/>
           <a:lstStyle/>
           <a:p>
-            <a:pPr algn="ctr" indent="0" marL="0">
+            <a:pPr marL="0" indent="0" algn="ctr">
               <a:buNone/>
             </a:pPr>
             <a:r>
@@ -7418,7 +7055,7 @@
           <a:bodyPr wrap="square" rtlCol="0" anchor="ctr"/>
           <a:lstStyle/>
           <a:p>
-            <a:pPr algn="ctr" indent="0" marL="0">
+            <a:pPr marL="0" indent="0" algn="ctr">
               <a:buNone/>
             </a:pPr>
             <a:r>
@@ -7457,7 +7094,7 @@
           <a:bodyPr wrap="square" rtlCol="0" anchor="ctr"/>
           <a:lstStyle/>
           <a:p>
-            <a:pPr algn="ctr" indent="0" marL="0">
+            <a:pPr marL="0" indent="0" algn="ctr">
               <a:buNone/>
             </a:pPr>
             <a:r>
@@ -7519,7 +7156,7 @@
           <a:bodyPr wrap="square" rtlCol="0" anchor="ctr"/>
           <a:lstStyle/>
           <a:p>
-            <a:pPr indent="0" marL="0">
+            <a:pPr marL="0" indent="0">
               <a:buNone/>
             </a:pPr>
             <a:r>
@@ -7558,7 +7195,7 @@
           <a:bodyPr wrap="square" rtlCol="0" anchor="ctr"/>
           <a:lstStyle/>
           <a:p>
-            <a:pPr algn="r" indent="0" marL="0">
+            <a:pPr marL="0" indent="0" algn="r">
               <a:buNone/>
             </a:pPr>
             <a:r>
@@ -7622,11 +7259,11 @@
           <a:bodyPr wrap="square" rtlCol="0" anchor="ctr"/>
           <a:lstStyle/>
           <a:p>
-            <a:pPr indent="0" marL="0">
-              <a:buNone/>
-            </a:pPr>
-            <a:r>
-              <a:rPr lang="en-US" sz="1100" spc="200" kern="0" dirty="0">
+            <a:pPr marL="0" indent="0">
+              <a:buNone/>
+            </a:pPr>
+            <a:r>
+              <a:rPr lang="en-US" sz="1100" kern="0" spc="200" dirty="0">
                 <a:solidFill>
                   <a:srgbClr val="5A6070"/>
                 </a:solidFill>
@@ -7686,7 +7323,7 @@
           <a:bodyPr wrap="square" rtlCol="0" anchor="ctr"/>
           <a:lstStyle/>
           <a:p>
-            <a:pPr indent="0" marL="0">
+            <a:pPr marL="0" indent="0">
               <a:buNone/>
             </a:pPr>
             <a:r>
@@ -7748,7 +7385,7 @@
           <a:bodyPr wrap="square" rtlCol="0" anchor="ctr"/>
           <a:lstStyle/>
           <a:p>
-            <a:pPr indent="0" marL="0">
+            <a:pPr marL="0" indent="0">
               <a:buNone/>
             </a:pPr>
             <a:r>
@@ -7812,7 +7449,7 @@
           <a:bodyPr wrap="square" rtlCol="0" anchor="ctr"/>
           <a:lstStyle/>
           <a:p>
-            <a:pPr indent="0" marL="0">
+            <a:pPr marL="0" indent="0">
               <a:buNone/>
             </a:pPr>
             <a:r>
@@ -7851,7 +7488,7 @@
           <a:bodyPr wrap="square" rtlCol="0" anchor="ctr"/>
           <a:lstStyle/>
           <a:p>
-            <a:pPr indent="0" marL="0">
+            <a:pPr marL="0" indent="0">
               <a:buNone/>
             </a:pPr>
             <a:r>
@@ -7890,7 +7527,7 @@
           <a:bodyPr wrap="square" rtlCol="0" anchor="ctr"/>
           <a:lstStyle/>
           <a:p>
-            <a:pPr indent="0" marL="0">
+            <a:pPr marL="0" indent="0">
               <a:buNone/>
             </a:pPr>
             <a:r>
@@ -7954,7 +7591,7 @@
           <a:bodyPr wrap="square" rtlCol="0" anchor="ctr"/>
           <a:lstStyle/>
           <a:p>
-            <a:pPr algn="ctr" indent="0" marL="0">
+            <a:pPr marL="0" indent="0" algn="ctr">
               <a:buNone/>
             </a:pPr>
             <a:r>
@@ -8018,7 +7655,7 @@
           <a:bodyPr wrap="square" rtlCol="0" anchor="ctr"/>
           <a:lstStyle/>
           <a:p>
-            <a:pPr indent="0" marL="0">
+            <a:pPr marL="0" indent="0">
               <a:buNone/>
             </a:pPr>
             <a:r>
@@ -8057,7 +7694,7 @@
           <a:bodyPr wrap="square" rtlCol="0" anchor="ctr"/>
           <a:lstStyle/>
           <a:p>
-            <a:pPr indent="0" marL="0">
+            <a:pPr marL="0" indent="0">
               <a:buNone/>
             </a:pPr>
             <a:r>
@@ -8096,7 +7733,7 @@
           <a:bodyPr wrap="square" rtlCol="0" anchor="ctr"/>
           <a:lstStyle/>
           <a:p>
-            <a:pPr indent="0" marL="0">
+            <a:pPr marL="0" indent="0">
               <a:buNone/>
             </a:pPr>
             <a:r>
@@ -8160,7 +7797,7 @@
           <a:bodyPr wrap="square" rtlCol="0" anchor="ctr"/>
           <a:lstStyle/>
           <a:p>
-            <a:pPr algn="ctr" indent="0" marL="0">
+            <a:pPr marL="0" indent="0" algn="ctr">
               <a:buNone/>
             </a:pPr>
             <a:r>
@@ -8224,7 +7861,7 @@
           <a:bodyPr wrap="square" rtlCol="0" anchor="ctr"/>
           <a:lstStyle/>
           <a:p>
-            <a:pPr indent="0" marL="0">
+            <a:pPr marL="0" indent="0">
               <a:buNone/>
             </a:pPr>
             <a:r>
@@ -8263,7 +7900,7 @@
           <a:bodyPr wrap="square" rtlCol="0" anchor="ctr"/>
           <a:lstStyle/>
           <a:p>
-            <a:pPr indent="0" marL="0">
+            <a:pPr marL="0" indent="0">
               <a:buNone/>
             </a:pPr>
             <a:r>
@@ -8302,7 +7939,7 @@
           <a:bodyPr wrap="square" rtlCol="0" anchor="ctr"/>
           <a:lstStyle/>
           <a:p>
-            <a:pPr indent="0" marL="0">
+            <a:pPr marL="0" indent="0">
               <a:buNone/>
             </a:pPr>
             <a:r>
@@ -8366,7 +8003,7 @@
           <a:bodyPr wrap="square" rtlCol="0" anchor="ctr"/>
           <a:lstStyle/>
           <a:p>
-            <a:pPr algn="ctr" indent="0" marL="0">
+            <a:pPr marL="0" indent="0" algn="ctr">
               <a:buNone/>
             </a:pPr>
             <a:r>
@@ -8430,7 +8067,7 @@
           <a:bodyPr wrap="square" rtlCol="0" anchor="ctr"/>
           <a:lstStyle/>
           <a:p>
-            <a:pPr indent="0" marL="0">
+            <a:pPr marL="0" indent="0">
               <a:buNone/>
             </a:pPr>
             <a:r>
@@ -8469,7 +8106,7 @@
           <a:bodyPr wrap="square" rtlCol="0" anchor="ctr"/>
           <a:lstStyle/>
           <a:p>
-            <a:pPr indent="0" marL="0">
+            <a:pPr marL="0" indent="0">
               <a:buNone/>
             </a:pPr>
             <a:r>
@@ -8508,7 +8145,7 @@
           <a:bodyPr wrap="square" rtlCol="0" anchor="ctr"/>
           <a:lstStyle/>
           <a:p>
-            <a:pPr indent="0" marL="0">
+            <a:pPr marL="0" indent="0">
               <a:buNone/>
             </a:pPr>
             <a:r>
@@ -8572,7 +8209,7 @@
           <a:bodyPr wrap="square" rtlCol="0" anchor="ctr"/>
           <a:lstStyle/>
           <a:p>
-            <a:pPr algn="ctr" indent="0" marL="0">
+            <a:pPr marL="0" indent="0" algn="ctr">
               <a:buNone/>
             </a:pPr>
             <a:r>
@@ -8636,7 +8273,7 @@
           <a:bodyPr wrap="square" rtlCol="0" anchor="ctr"/>
           <a:lstStyle/>
           <a:p>
-            <a:pPr indent="0" marL="0">
+            <a:pPr marL="0" indent="0">
               <a:buNone/>
             </a:pPr>
             <a:r>
@@ -8675,7 +8312,7 @@
           <a:bodyPr wrap="square" rtlCol="0" anchor="ctr"/>
           <a:lstStyle/>
           <a:p>
-            <a:pPr indent="0" marL="0">
+            <a:pPr marL="0" indent="0">
               <a:buNone/>
             </a:pPr>
             <a:r>
@@ -8714,7 +8351,7 @@
           <a:bodyPr wrap="square" rtlCol="0" anchor="ctr"/>
           <a:lstStyle/>
           <a:p>
-            <a:pPr indent="0" marL="0">
+            <a:pPr marL="0" indent="0">
               <a:buNone/>
             </a:pPr>
             <a:r>
@@ -8778,7 +8415,7 @@
           <a:bodyPr wrap="square" rtlCol="0" anchor="ctr"/>
           <a:lstStyle/>
           <a:p>
-            <a:pPr algn="ctr" indent="0" marL="0">
+            <a:pPr marL="0" indent="0" algn="ctr">
               <a:buNone/>
             </a:pPr>
             <a:r>
@@ -8817,7 +8454,7 @@
           <a:bodyPr wrap="square" rtlCol="0" anchor="ctr"/>
           <a:lstStyle/>
           <a:p>
-            <a:pPr indent="0" marL="0">
+            <a:pPr marL="0" indent="0">
               <a:buNone/>
             </a:pPr>
             <a:r>
@@ -8931,7 +8568,7 @@
           <a:bodyPr wrap="square" rtlCol="0" anchor="ctr"/>
           <a:lstStyle/>
           <a:p>
-            <a:pPr algn="ctr" indent="0" marL="0">
+            <a:pPr marL="0" indent="0" algn="ctr">
               <a:buNone/>
             </a:pPr>
             <a:r>
@@ -8970,7 +8607,7 @@
           <a:bodyPr wrap="square" rtlCol="0" anchor="ctr"/>
           <a:lstStyle/>
           <a:p>
-            <a:pPr indent="0" marL="0">
+            <a:pPr marL="0" indent="0">
               <a:buNone/>
             </a:pPr>
             <a:r>
@@ -9009,7 +8646,7 @@
           <a:bodyPr wrap="square" rtlCol="0" anchor="ctr"/>
           <a:lstStyle/>
           <a:p>
-            <a:pPr indent="0" marL="0">
+            <a:pPr marL="0" indent="0">
               <a:lnSpc>
                 <a:spcPts val="130"/>
               </a:lnSpc>
@@ -9126,7 +8763,7 @@
           <a:bodyPr wrap="square" rtlCol="0" anchor="ctr"/>
           <a:lstStyle/>
           <a:p>
-            <a:pPr algn="ctr" indent="0" marL="0">
+            <a:pPr marL="0" indent="0" algn="ctr">
               <a:buNone/>
             </a:pPr>
             <a:r>
@@ -9165,7 +8802,7 @@
           <a:bodyPr wrap="square" rtlCol="0" anchor="ctr"/>
           <a:lstStyle/>
           <a:p>
-            <a:pPr indent="0" marL="0">
+            <a:pPr marL="0" indent="0">
               <a:buNone/>
             </a:pPr>
             <a:r>
@@ -9204,7 +8841,7 @@
           <a:bodyPr wrap="square" rtlCol="0" anchor="ctr"/>
           <a:lstStyle/>
           <a:p>
-            <a:pPr indent="0" marL="0">
+            <a:pPr marL="0" indent="0">
               <a:lnSpc>
                 <a:spcPts val="130"/>
               </a:lnSpc>
@@ -9321,7 +8958,7 @@
           <a:bodyPr wrap="square" rtlCol="0" anchor="ctr"/>
           <a:lstStyle/>
           <a:p>
-            <a:pPr algn="ctr" indent="0" marL="0">
+            <a:pPr marL="0" indent="0" algn="ctr">
               <a:buNone/>
             </a:pPr>
             <a:r>
@@ -9360,7 +8997,7 @@
           <a:bodyPr wrap="square" rtlCol="0" anchor="ctr"/>
           <a:lstStyle/>
           <a:p>
-            <a:pPr indent="0" marL="0">
+            <a:pPr marL="0" indent="0">
               <a:buNone/>
             </a:pPr>
             <a:r>
@@ -9399,7 +9036,7 @@
           <a:bodyPr wrap="square" rtlCol="0" anchor="ctr"/>
           <a:lstStyle/>
           <a:p>
-            <a:pPr indent="0" marL="0">
+            <a:pPr marL="0" indent="0">
               <a:lnSpc>
                 <a:spcPts val="130"/>
               </a:lnSpc>
@@ -9516,7 +9153,7 @@
           <a:bodyPr wrap="square" rtlCol="0" anchor="ctr"/>
           <a:lstStyle/>
           <a:p>
-            <a:pPr algn="ctr" indent="0" marL="0">
+            <a:pPr marL="0" indent="0" algn="ctr">
               <a:buNone/>
             </a:pPr>
             <a:r>
@@ -9555,7 +9192,7 @@
           <a:bodyPr wrap="square" rtlCol="0" anchor="ctr"/>
           <a:lstStyle/>
           <a:p>
-            <a:pPr indent="0" marL="0">
+            <a:pPr marL="0" indent="0">
               <a:buNone/>
             </a:pPr>
             <a:r>
@@ -9594,7 +9231,7 @@
           <a:bodyPr wrap="square" rtlCol="0" anchor="ctr"/>
           <a:lstStyle/>
           <a:p>
-            <a:pPr indent="0" marL="0">
+            <a:pPr marL="0" indent="0">
               <a:lnSpc>
                 <a:spcPts val="130"/>
               </a:lnSpc>
@@ -9711,7 +9348,7 @@
           <a:bodyPr wrap="square" rtlCol="0" anchor="ctr"/>
           <a:lstStyle/>
           <a:p>
-            <a:pPr algn="ctr" indent="0" marL="0">
+            <a:pPr marL="0" indent="0" algn="ctr">
               <a:buNone/>
             </a:pPr>
             <a:r>
@@ -9750,7 +9387,7 @@
           <a:bodyPr wrap="square" rtlCol="0" anchor="ctr"/>
           <a:lstStyle/>
           <a:p>
-            <a:pPr indent="0" marL="0">
+            <a:pPr marL="0" indent="0">
               <a:buNone/>
             </a:pPr>
             <a:r>
@@ -9789,7 +9426,7 @@
           <a:bodyPr wrap="square" rtlCol="0" anchor="ctr"/>
           <a:lstStyle/>
           <a:p>
-            <a:pPr indent="0" marL="0">
+            <a:pPr marL="0" indent="0">
               <a:lnSpc>
                 <a:spcPts val="130"/>
               </a:lnSpc>
@@ -9856,7 +9493,7 @@
           <a:bodyPr wrap="square" rtlCol="0" anchor="ctr"/>
           <a:lstStyle/>
           <a:p>
-            <a:pPr indent="0" marL="0">
+            <a:pPr marL="0" indent="0">
               <a:buNone/>
             </a:pPr>
             <a:r>
@@ -9895,7 +9532,7 @@
           <a:bodyPr wrap="square" rtlCol="0" anchor="ctr"/>
           <a:lstStyle/>
           <a:p>
-            <a:pPr indent="0" marL="0">
+            <a:pPr marL="0" indent="0">
               <a:lnSpc>
                 <a:spcPts val="130"/>
               </a:lnSpc>
@@ -9960,7 +9597,7 @@
           <a:bodyPr wrap="square" rtlCol="0" anchor="ctr"/>
           <a:lstStyle/>
           <a:p>
-            <a:pPr indent="0" marL="0">
+            <a:pPr marL="0" indent="0">
               <a:buNone/>
             </a:pPr>
             <a:r>
@@ -9999,7 +9636,7 @@
           <a:bodyPr wrap="square" rtlCol="0" anchor="ctr"/>
           <a:lstStyle/>
           <a:p>
-            <a:pPr algn="r" indent="0" marL="0">
+            <a:pPr marL="0" indent="0" algn="r">
               <a:buNone/>
             </a:pPr>
             <a:r>
@@ -10063,11 +9700,11 @@
           <a:bodyPr wrap="square" rtlCol="0" anchor="ctr"/>
           <a:lstStyle/>
           <a:p>
-            <a:pPr indent="0" marL="0">
-              <a:buNone/>
-            </a:pPr>
-            <a:r>
-              <a:rPr lang="en-US" sz="1100" spc="200" kern="0" dirty="0">
+            <a:pPr marL="0" indent="0">
+              <a:buNone/>
+            </a:pPr>
+            <a:r>
+              <a:rPr lang="en-US" sz="1100" kern="0" spc="200" dirty="0">
                 <a:solidFill>
                   <a:srgbClr val="5A6070"/>
                 </a:solidFill>
@@ -10127,7 +9764,7 @@
           <a:bodyPr wrap="square" rtlCol="0" anchor="ctr"/>
           <a:lstStyle/>
           <a:p>
-            <a:pPr indent="0" marL="0">
+            <a:pPr marL="0" indent="0">
               <a:buNone/>
             </a:pPr>
             <a:r>
@@ -10189,7 +9826,7 @@
           <a:bodyPr wrap="square" rtlCol="0" anchor="ctr"/>
           <a:lstStyle/>
           <a:p>
-            <a:pPr indent="0" marL="0">
+            <a:pPr marL="0" indent="0">
               <a:buNone/>
             </a:pPr>
             <a:r>
@@ -10303,7 +9940,7 @@
           <a:bodyPr wrap="square" rtlCol="0" anchor="ctr"/>
           <a:lstStyle/>
           <a:p>
-            <a:pPr algn="ctr" indent="0" marL="0">
+            <a:pPr marL="0" indent="0" algn="ctr">
               <a:buNone/>
             </a:pPr>
             <a:r>
@@ -10342,7 +9979,7 @@
           <a:bodyPr wrap="square" rtlCol="0" anchor="ctr"/>
           <a:lstStyle/>
           <a:p>
-            <a:pPr indent="0" marL="0">
+            <a:pPr marL="0" indent="0">
               <a:buNone/>
             </a:pPr>
             <a:r>
@@ -10381,7 +10018,7 @@
           <a:bodyPr wrap="square" rtlCol="0" anchor="t"/>
           <a:lstStyle/>
           <a:p>
-            <a:pPr indent="0" marL="0">
+            <a:pPr marL="0" indent="0">
               <a:buNone/>
             </a:pPr>
             <a:r>
@@ -10495,7 +10132,7 @@
           <a:bodyPr wrap="square" rtlCol="0" anchor="ctr"/>
           <a:lstStyle/>
           <a:p>
-            <a:pPr algn="ctr" indent="0" marL="0">
+            <a:pPr marL="0" indent="0" algn="ctr">
               <a:buNone/>
             </a:pPr>
             <a:r>
@@ -10534,7 +10171,7 @@
           <a:bodyPr wrap="square" rtlCol="0" anchor="ctr"/>
           <a:lstStyle/>
           <a:p>
-            <a:pPr indent="0" marL="0">
+            <a:pPr marL="0" indent="0">
               <a:buNone/>
             </a:pPr>
             <a:r>
@@ -10573,7 +10210,7 @@
           <a:bodyPr wrap="square" rtlCol="0" anchor="t"/>
           <a:lstStyle/>
           <a:p>
-            <a:pPr indent="0" marL="0">
+            <a:pPr marL="0" indent="0">
               <a:buNone/>
             </a:pPr>
             <a:r>
@@ -10687,7 +10324,7 @@
           <a:bodyPr wrap="square" rtlCol="0" anchor="ctr"/>
           <a:lstStyle/>
           <a:p>
-            <a:pPr algn="ctr" indent="0" marL="0">
+            <a:pPr marL="0" indent="0" algn="ctr">
               <a:buNone/>
             </a:pPr>
             <a:r>
@@ -10726,7 +10363,7 @@
           <a:bodyPr wrap="square" rtlCol="0" anchor="ctr"/>
           <a:lstStyle/>
           <a:p>
-            <a:pPr indent="0" marL="0">
+            <a:pPr marL="0" indent="0">
               <a:buNone/>
             </a:pPr>
             <a:r>
@@ -10765,7 +10402,7 @@
           <a:bodyPr wrap="square" rtlCol="0" anchor="t"/>
           <a:lstStyle/>
           <a:p>
-            <a:pPr indent="0" marL="0">
+            <a:pPr marL="0" indent="0">
               <a:buNone/>
             </a:pPr>
             <a:r>
@@ -10879,7 +10516,7 @@
           <a:bodyPr wrap="square" rtlCol="0" anchor="ctr"/>
           <a:lstStyle/>
           <a:p>
-            <a:pPr algn="ctr" indent="0" marL="0">
+            <a:pPr marL="0" indent="0" algn="ctr">
               <a:buNone/>
             </a:pPr>
             <a:r>
@@ -10918,7 +10555,7 @@
           <a:bodyPr wrap="square" rtlCol="0" anchor="ctr"/>
           <a:lstStyle/>
           <a:p>
-            <a:pPr indent="0" marL="0">
+            <a:pPr marL="0" indent="0">
               <a:buNone/>
             </a:pPr>
             <a:r>
@@ -10957,7 +10594,7 @@
           <a:bodyPr wrap="square" rtlCol="0" anchor="t"/>
           <a:lstStyle/>
           <a:p>
-            <a:pPr indent="0" marL="0">
+            <a:pPr marL="0" indent="0">
               <a:buNone/>
             </a:pPr>
             <a:r>
@@ -11071,7 +10708,7 @@
           <a:bodyPr wrap="square" rtlCol="0" anchor="ctr"/>
           <a:lstStyle/>
           <a:p>
-            <a:pPr algn="ctr" indent="0" marL="0">
+            <a:pPr marL="0" indent="0" algn="ctr">
               <a:buNone/>
             </a:pPr>
             <a:r>
@@ -11110,7 +10747,7 @@
           <a:bodyPr wrap="square" rtlCol="0" anchor="ctr"/>
           <a:lstStyle/>
           <a:p>
-            <a:pPr indent="0" marL="0">
+            <a:pPr marL="0" indent="0">
               <a:buNone/>
             </a:pPr>
             <a:r>
@@ -11149,7 +10786,7 @@
           <a:bodyPr wrap="square" rtlCol="0" anchor="t"/>
           <a:lstStyle/>
           <a:p>
-            <a:pPr indent="0" marL="0">
+            <a:pPr marL="0" indent="0">
               <a:buNone/>
             </a:pPr>
             <a:r>
@@ -11188,7 +10825,7 @@
           <a:bodyPr wrap="square" rtlCol="0" anchor="ctr"/>
           <a:lstStyle/>
           <a:p>
-            <a:pPr indent="0" marL="0">
+            <a:pPr marL="0" indent="0">
               <a:buNone/>
             </a:pPr>
             <a:r>
@@ -11274,12 +10911,12 @@
           <a:ln/>
         </p:spPr>
         <p:txBody>
-          <a:bodyPr wrap="none" lIns="0" tIns="0" rIns="0" bIns="0" rtlCol="0" anchor="ctr" vert="horz">
+          <a:bodyPr vert="horz" wrap="none" lIns="0" tIns="0" rIns="0" bIns="0" rtlCol="0" anchor="ctr">
             <a:normAutofit/>
           </a:bodyPr>
           <a:lstStyle/>
           <a:p>
-            <a:pPr algn="ctr" indent="0" marL="0">
+            <a:pPr marL="0" indent="0" algn="ctr">
               <a:buNone/>
             </a:pPr>
             <a:r>
@@ -11318,7 +10955,7 @@
           <a:bodyPr wrap="square" rtlCol="0" anchor="ctr"/>
           <a:lstStyle/>
           <a:p>
-            <a:pPr indent="0" marL="0">
+            <a:pPr marL="0" indent="0">
               <a:buNone/>
             </a:pPr>
             <a:r>
@@ -11357,7 +10994,7 @@
           <a:bodyPr wrap="square" rtlCol="0" anchor="t"/>
           <a:lstStyle/>
           <a:p>
-            <a:pPr indent="0" marL="0">
+            <a:pPr marL="0" indent="0">
               <a:buNone/>
             </a:pPr>
             <a:r>
@@ -11493,12 +11130,12 @@
           <a:ln/>
         </p:spPr>
         <p:txBody>
-          <a:bodyPr wrap="none" lIns="0" tIns="0" rIns="0" bIns="0" rtlCol="0" anchor="ctr" vert="horz">
+          <a:bodyPr vert="horz" wrap="none" lIns="0" tIns="0" rIns="0" bIns="0" rtlCol="0" anchor="ctr">
             <a:normAutofit/>
           </a:bodyPr>
           <a:lstStyle/>
           <a:p>
-            <a:pPr algn="ctr" indent="0" marL="0">
+            <a:pPr marL="0" indent="0" algn="ctr">
               <a:buNone/>
             </a:pPr>
             <a:r>
@@ -11537,7 +11174,7 @@
           <a:bodyPr wrap="square" rtlCol="0" anchor="ctr"/>
           <a:lstStyle/>
           <a:p>
-            <a:pPr indent="0" marL="0">
+            <a:pPr marL="0" indent="0">
               <a:buNone/>
             </a:pPr>
             <a:r>
@@ -11576,7 +11213,7 @@
           <a:bodyPr wrap="square" rtlCol="0" anchor="t"/>
           <a:lstStyle/>
           <a:p>
-            <a:pPr indent="0" marL="0">
+            <a:pPr marL="0" indent="0">
               <a:buNone/>
             </a:pPr>
             <a:r>
@@ -11712,12 +11349,12 @@
           <a:ln/>
         </p:spPr>
         <p:txBody>
-          <a:bodyPr wrap="none" lIns="0" tIns="0" rIns="0" bIns="0" rtlCol="0" anchor="ctr" vert="horz">
+          <a:bodyPr vert="horz" wrap="none" lIns="0" tIns="0" rIns="0" bIns="0" rtlCol="0" anchor="ctr">
             <a:normAutofit/>
           </a:bodyPr>
           <a:lstStyle/>
           <a:p>
-            <a:pPr algn="ctr" indent="0" marL="0">
+            <a:pPr marL="0" indent="0" algn="ctr">
               <a:buNone/>
             </a:pPr>
             <a:r>
@@ -11756,7 +11393,7 @@
           <a:bodyPr wrap="square" rtlCol="0" anchor="ctr"/>
           <a:lstStyle/>
           <a:p>
-            <a:pPr indent="0" marL="0">
+            <a:pPr marL="0" indent="0">
               <a:buNone/>
             </a:pPr>
             <a:r>
@@ -11795,7 +11432,7 @@
           <a:bodyPr wrap="square" rtlCol="0" anchor="t"/>
           <a:lstStyle/>
           <a:p>
-            <a:pPr indent="0" marL="0">
+            <a:pPr marL="0" indent="0">
               <a:buNone/>
             </a:pPr>
             <a:r>
@@ -11931,12 +11568,12 @@
           <a:ln/>
         </p:spPr>
         <p:txBody>
-          <a:bodyPr wrap="none" lIns="0" tIns="0" rIns="0" bIns="0" rtlCol="0" anchor="ctr" vert="horz">
+          <a:bodyPr vert="horz" wrap="none" lIns="0" tIns="0" rIns="0" bIns="0" rtlCol="0" anchor="ctr">
             <a:normAutofit/>
           </a:bodyPr>
           <a:lstStyle/>
           <a:p>
-            <a:pPr algn="ctr" indent="0" marL="0">
+            <a:pPr marL="0" indent="0" algn="ctr">
               <a:buNone/>
             </a:pPr>
             <a:r>
@@ -11975,7 +11612,7 @@
           <a:bodyPr wrap="square" rtlCol="0" anchor="ctr"/>
           <a:lstStyle/>
           <a:p>
-            <a:pPr indent="0" marL="0">
+            <a:pPr marL="0" indent="0">
               <a:buNone/>
             </a:pPr>
             <a:r>
@@ -12014,7 +11651,7 @@
           <a:bodyPr wrap="square" rtlCol="0" anchor="t"/>
           <a:lstStyle/>
           <a:p>
-            <a:pPr indent="0" marL="0">
+            <a:pPr marL="0" indent="0">
               <a:buNone/>
             </a:pPr>
             <a:r>
@@ -12126,7 +11763,7 @@
           <a:bodyPr wrap="square" rtlCol="0" anchor="ctr"/>
           <a:lstStyle/>
           <a:p>
-            <a:pPr indent="0" marL="0">
+            <a:pPr marL="0" indent="0">
               <a:buNone/>
             </a:pPr>
             <a:r>
@@ -12165,7 +11802,7 @@
           <a:bodyPr wrap="square" rtlCol="0" anchor="ctr"/>
           <a:lstStyle/>
           <a:p>
-            <a:pPr algn="r" indent="0" marL="0">
+            <a:pPr marL="0" indent="0" algn="r">
               <a:buNone/>
             </a:pPr>
             <a:r>
@@ -12229,11 +11866,11 @@
           <a:bodyPr wrap="square" rtlCol="0" anchor="ctr"/>
           <a:lstStyle/>
           <a:p>
-            <a:pPr indent="0" marL="0">
-              <a:buNone/>
-            </a:pPr>
-            <a:r>
-              <a:rPr lang="en-US" sz="1100" spc="200" kern="0" dirty="0">
+            <a:pPr marL="0" indent="0">
+              <a:buNone/>
+            </a:pPr>
+            <a:r>
+              <a:rPr lang="en-US" sz="1100" kern="0" spc="200" dirty="0">
                 <a:solidFill>
                   <a:srgbClr val="5A6070"/>
                 </a:solidFill>
@@ -12293,7 +11930,7 @@
           <a:bodyPr wrap="square" rtlCol="0" anchor="ctr"/>
           <a:lstStyle/>
           <a:p>
-            <a:pPr indent="0" marL="0">
+            <a:pPr marL="0" indent="0">
               <a:buNone/>
             </a:pPr>
             <a:r>
@@ -12402,12 +12039,12 @@
           <a:ln/>
         </p:spPr>
         <p:txBody>
-          <a:bodyPr wrap="none" lIns="0" tIns="0" rIns="0" bIns="0" rtlCol="0" anchor="ctr" vert="horz">
+          <a:bodyPr vert="horz" wrap="none" lIns="0" tIns="0" rIns="0" bIns="0" rtlCol="0" anchor="ctr">
             <a:normAutofit/>
           </a:bodyPr>
           <a:lstStyle/>
           <a:p>
-            <a:pPr algn="ctr" indent="0" marL="0">
+            <a:pPr marL="0" indent="0" algn="ctr">
               <a:buNone/>
             </a:pPr>
             <a:r>
@@ -12471,7 +12108,7 @@
           <a:bodyPr wrap="square" rtlCol="0" anchor="ctr"/>
           <a:lstStyle/>
           <a:p>
-            <a:pPr algn="ctr" indent="0" marL="0">
+            <a:pPr marL="0" indent="0" algn="ctr">
               <a:buNone/>
             </a:pPr>
             <a:r>
@@ -12560,7 +12197,7 @@
           <a:bodyPr wrap="square" rtlCol="0" anchor="ctr"/>
           <a:lstStyle/>
           <a:p>
-            <a:pPr indent="0" marL="0">
+            <a:pPr marL="0" indent="0">
               <a:buNone/>
             </a:pPr>
             <a:r>
@@ -12599,7 +12236,7 @@
           <a:bodyPr wrap="square" rtlCol="0" anchor="ctr"/>
           <a:lstStyle/>
           <a:p>
-            <a:pPr indent="0" marL="0">
+            <a:pPr marL="0" indent="0">
               <a:buNone/>
             </a:pPr>
             <a:r>
@@ -12638,7 +12275,7 @@
           <a:bodyPr wrap="square" rtlCol="0" anchor="ctr"/>
           <a:lstStyle/>
           <a:p>
-            <a:pPr indent="0" marL="0">
+            <a:pPr marL="0" indent="0">
               <a:buNone/>
             </a:pPr>
             <a:r>
@@ -12677,7 +12314,7 @@
           <a:bodyPr wrap="square" rtlCol="0" anchor="ctr"/>
           <a:lstStyle/>
           <a:p>
-            <a:pPr indent="0" marL="0">
+            <a:pPr marL="0" indent="0">
               <a:buNone/>
             </a:pPr>
             <a:r>
@@ -12716,7 +12353,7 @@
           <a:bodyPr wrap="square" rtlCol="0" anchor="ctr"/>
           <a:lstStyle/>
           <a:p>
-            <a:pPr indent="0" marL="0">
+            <a:pPr marL="0" indent="0">
               <a:buNone/>
             </a:pPr>
             <a:r>
@@ -12755,7 +12392,7 @@
           <a:bodyPr wrap="square" rtlCol="0" anchor="ctr"/>
           <a:lstStyle/>
           <a:p>
-            <a:pPr indent="0" marL="0">
+            <a:pPr marL="0" indent="0">
               <a:buNone/>
             </a:pPr>
             <a:r>
@@ -12794,7 +12431,7 @@
           <a:bodyPr wrap="square" rtlCol="0" anchor="ctr"/>
           <a:lstStyle/>
           <a:p>
-            <a:pPr indent="0" marL="0">
+            <a:pPr marL="0" indent="0">
               <a:buNone/>
             </a:pPr>
             <a:r>
@@ -12833,7 +12470,7 @@
           <a:bodyPr wrap="square" rtlCol="0" anchor="ctr"/>
           <a:lstStyle/>
           <a:p>
-            <a:pPr indent="0" marL="0">
+            <a:pPr marL="0" indent="0">
               <a:buNone/>
             </a:pPr>
             <a:r>
@@ -12872,7 +12509,7 @@
           <a:bodyPr wrap="square" rtlCol="0" anchor="ctr"/>
           <a:lstStyle/>
           <a:p>
-            <a:pPr indent="0" marL="0">
+            <a:pPr marL="0" indent="0">
               <a:buNone/>
             </a:pPr>
             <a:r>
@@ -12911,7 +12548,7 @@
           <a:bodyPr wrap="square" rtlCol="0" anchor="ctr"/>
           <a:lstStyle/>
           <a:p>
-            <a:pPr indent="0" marL="0">
+            <a:pPr marL="0" indent="0">
               <a:buNone/>
             </a:pPr>
             <a:r>
@@ -12950,7 +12587,7 @@
           <a:bodyPr wrap="square" rtlCol="0" anchor="ctr"/>
           <a:lstStyle/>
           <a:p>
-            <a:pPr indent="0" marL="0">
+            <a:pPr marL="0" indent="0">
               <a:buNone/>
             </a:pPr>
             <a:r>
@@ -13014,7 +12651,7 @@
           <a:bodyPr wrap="square" rtlCol="0" anchor="ctr"/>
           <a:lstStyle/>
           <a:p>
-            <a:pPr algn="ctr" indent="0" marL="0">
+            <a:pPr marL="0" indent="0" algn="ctr">
               <a:buNone/>
             </a:pPr>
             <a:r>
@@ -13075,12 +12712,12 @@
           <a:ln/>
         </p:spPr>
         <p:txBody>
-          <a:bodyPr wrap="none" lIns="0" tIns="0" rIns="0" bIns="0" rtlCol="0" anchor="ctr" vert="horz">
+          <a:bodyPr vert="horz" wrap="none" lIns="0" tIns="0" rIns="0" bIns="0" rtlCol="0" anchor="ctr">
             <a:normAutofit/>
           </a:bodyPr>
           <a:lstStyle/>
           <a:p>
-            <a:pPr algn="ctr" indent="0" marL="0">
+            <a:pPr marL="0" indent="0" algn="ctr">
               <a:buNone/>
             </a:pPr>
             <a:r>
@@ -13144,7 +12781,7 @@
           <a:bodyPr wrap="square" rtlCol="0" anchor="ctr"/>
           <a:lstStyle/>
           <a:p>
-            <a:pPr algn="ctr" indent="0" marL="0">
+            <a:pPr marL="0" indent="0" algn="ctr">
               <a:buNone/>
             </a:pPr>
             <a:r>
@@ -13233,7 +12870,7 @@
           <a:bodyPr wrap="square" rtlCol="0" anchor="ctr"/>
           <a:lstStyle/>
           <a:p>
-            <a:pPr indent="0" marL="0">
+            <a:pPr marL="0" indent="0">
               <a:buNone/>
             </a:pPr>
             <a:r>
@@ -13272,7 +12909,7 @@
           <a:bodyPr wrap="square" rtlCol="0" anchor="ctr"/>
           <a:lstStyle/>
           <a:p>
-            <a:pPr indent="0" marL="0">
+            <a:pPr marL="0" indent="0">
               <a:buNone/>
             </a:pPr>
             <a:r>
@@ -13311,7 +12948,7 @@
           <a:bodyPr wrap="square" rtlCol="0" anchor="ctr"/>
           <a:lstStyle/>
           <a:p>
-            <a:pPr indent="0" marL="0">
+            <a:pPr marL="0" indent="0">
               <a:buNone/>
             </a:pPr>
             <a:r>
@@ -13350,7 +12987,7 @@
           <a:bodyPr wrap="square" rtlCol="0" anchor="ctr"/>
           <a:lstStyle/>
           <a:p>
-            <a:pPr indent="0" marL="0">
+            <a:pPr marL="0" indent="0">
               <a:buNone/>
             </a:pPr>
             <a:r>
@@ -13389,7 +13026,7 @@
           <a:bodyPr wrap="square" rtlCol="0" anchor="ctr"/>
           <a:lstStyle/>
           <a:p>
-            <a:pPr indent="0" marL="0">
+            <a:pPr marL="0" indent="0">
               <a:buNone/>
             </a:pPr>
             <a:r>
@@ -13428,7 +13065,7 @@
           <a:bodyPr wrap="square" rtlCol="0" anchor="ctr"/>
           <a:lstStyle/>
           <a:p>
-            <a:pPr indent="0" marL="0">
+            <a:pPr marL="0" indent="0">
               <a:buNone/>
             </a:pPr>
             <a:r>
@@ -13467,7 +13104,7 @@
           <a:bodyPr wrap="square" rtlCol="0" anchor="ctr"/>
           <a:lstStyle/>
           <a:p>
-            <a:pPr indent="0" marL="0">
+            <a:pPr marL="0" indent="0">
               <a:buNone/>
             </a:pPr>
             <a:r>
@@ -13506,7 +13143,7 @@
           <a:bodyPr wrap="square" rtlCol="0" anchor="ctr"/>
           <a:lstStyle/>
           <a:p>
-            <a:pPr indent="0" marL="0">
+            <a:pPr marL="0" indent="0">
               <a:buNone/>
             </a:pPr>
             <a:r>
@@ -13545,7 +13182,7 @@
           <a:bodyPr wrap="square" rtlCol="0" anchor="ctr"/>
           <a:lstStyle/>
           <a:p>
-            <a:pPr indent="0" marL="0">
+            <a:pPr marL="0" indent="0">
               <a:buNone/>
             </a:pPr>
             <a:r>
@@ -13584,7 +13221,7 @@
           <a:bodyPr wrap="square" rtlCol="0" anchor="ctr"/>
           <a:lstStyle/>
           <a:p>
-            <a:pPr indent="0" marL="0">
+            <a:pPr marL="0" indent="0">
               <a:buNone/>
             </a:pPr>
             <a:r>
@@ -13623,7 +13260,7 @@
           <a:bodyPr wrap="square" rtlCol="0" anchor="ctr"/>
           <a:lstStyle/>
           <a:p>
-            <a:pPr indent="0" marL="0">
+            <a:pPr marL="0" indent="0">
               <a:buNone/>
             </a:pPr>
             <a:r>
@@ -13687,7 +13324,7 @@
           <a:bodyPr wrap="square" rtlCol="0" anchor="ctr"/>
           <a:lstStyle/>
           <a:p>
-            <a:pPr algn="ctr" indent="0" marL="0">
+            <a:pPr marL="0" indent="0" algn="ctr">
               <a:buNone/>
             </a:pPr>
             <a:r>
@@ -13748,12 +13385,12 @@
           <a:ln/>
         </p:spPr>
         <p:txBody>
-          <a:bodyPr wrap="none" lIns="0" tIns="0" rIns="0" bIns="0" rtlCol="0" anchor="ctr" vert="horz">
+          <a:bodyPr vert="horz" wrap="none" lIns="0" tIns="0" rIns="0" bIns="0" rtlCol="0" anchor="ctr">
             <a:normAutofit/>
           </a:bodyPr>
           <a:lstStyle/>
           <a:p>
-            <a:pPr algn="ctr" indent="0" marL="0">
+            <a:pPr marL="0" indent="0" algn="ctr">
               <a:buNone/>
             </a:pPr>
             <a:r>
@@ -13817,7 +13454,7 @@
           <a:bodyPr wrap="square" rtlCol="0" anchor="ctr"/>
           <a:lstStyle/>
           <a:p>
-            <a:pPr algn="ctr" indent="0" marL="0">
+            <a:pPr marL="0" indent="0" algn="ctr">
               <a:buNone/>
             </a:pPr>
             <a:r>
@@ -13906,7 +13543,7 @@
           <a:bodyPr wrap="square" rtlCol="0" anchor="ctr"/>
           <a:lstStyle/>
           <a:p>
-            <a:pPr indent="0" marL="0">
+            <a:pPr marL="0" indent="0">
               <a:buNone/>
             </a:pPr>
             <a:r>
@@ -13945,7 +13582,7 @@
           <a:bodyPr wrap="square" rtlCol="0" anchor="ctr"/>
           <a:lstStyle/>
           <a:p>
-            <a:pPr indent="0" marL="0">
+            <a:pPr marL="0" indent="0">
               <a:buNone/>
             </a:pPr>
             <a:r>
@@ -13984,7 +13621,7 @@
           <a:bodyPr wrap="square" rtlCol="0" anchor="ctr"/>
           <a:lstStyle/>
           <a:p>
-            <a:pPr indent="0" marL="0">
+            <a:pPr marL="0" indent="0">
               <a:buNone/>
             </a:pPr>
             <a:r>
@@ -14023,7 +13660,7 @@
           <a:bodyPr wrap="square" rtlCol="0" anchor="ctr"/>
           <a:lstStyle/>
           <a:p>
-            <a:pPr indent="0" marL="0">
+            <a:pPr marL="0" indent="0">
               <a:buNone/>
             </a:pPr>
             <a:r>
@@ -14062,7 +13699,7 @@
           <a:bodyPr wrap="square" rtlCol="0" anchor="ctr"/>
           <a:lstStyle/>
           <a:p>
-            <a:pPr indent="0" marL="0">
+            <a:pPr marL="0" indent="0">
               <a:buNone/>
             </a:pPr>
             <a:r>
@@ -14101,7 +13738,7 @@
           <a:bodyPr wrap="square" rtlCol="0" anchor="ctr"/>
           <a:lstStyle/>
           <a:p>
-            <a:pPr indent="0" marL="0">
+            <a:pPr marL="0" indent="0">
               <a:buNone/>
             </a:pPr>
             <a:r>
@@ -14140,7 +13777,7 @@
           <a:bodyPr wrap="square" rtlCol="0" anchor="ctr"/>
           <a:lstStyle/>
           <a:p>
-            <a:pPr indent="0" marL="0">
+            <a:pPr marL="0" indent="0">
               <a:buNone/>
             </a:pPr>
             <a:r>
@@ -14179,7 +13816,7 @@
           <a:bodyPr wrap="square" rtlCol="0" anchor="ctr"/>
           <a:lstStyle/>
           <a:p>
-            <a:pPr indent="0" marL="0">
+            <a:pPr marL="0" indent="0">
               <a:buNone/>
             </a:pPr>
             <a:r>
@@ -14218,7 +13855,7 @@
           <a:bodyPr wrap="square" rtlCol="0" anchor="ctr"/>
           <a:lstStyle/>
           <a:p>
-            <a:pPr indent="0" marL="0">
+            <a:pPr marL="0" indent="0">
               <a:buNone/>
             </a:pPr>
             <a:r>
@@ -14257,7 +13894,7 @@
           <a:bodyPr wrap="square" rtlCol="0" anchor="ctr"/>
           <a:lstStyle/>
           <a:p>
-            <a:pPr indent="0" marL="0">
+            <a:pPr marL="0" indent="0">
               <a:buNone/>
             </a:pPr>
             <a:r>
@@ -14296,7 +13933,7 @@
           <a:bodyPr wrap="square" rtlCol="0" anchor="ctr"/>
           <a:lstStyle/>
           <a:p>
-            <a:pPr indent="0" marL="0">
+            <a:pPr marL="0" indent="0">
               <a:buNone/>
             </a:pPr>
             <a:r>
@@ -14360,7 +13997,7 @@
           <a:bodyPr wrap="square" rtlCol="0" anchor="ctr"/>
           <a:lstStyle/>
           <a:p>
-            <a:pPr algn="ctr" indent="0" marL="0">
+            <a:pPr marL="0" indent="0" algn="ctr">
               <a:buNone/>
             </a:pPr>
             <a:r>
@@ -14421,12 +14058,12 @@
           <a:ln/>
         </p:spPr>
         <p:txBody>
-          <a:bodyPr wrap="none" lIns="0" tIns="0" rIns="0" bIns="0" rtlCol="0" anchor="ctr" vert="horz">
+          <a:bodyPr vert="horz" wrap="none" lIns="0" tIns="0" rIns="0" bIns="0" rtlCol="0" anchor="ctr">
             <a:normAutofit/>
           </a:bodyPr>
           <a:lstStyle/>
           <a:p>
-            <a:pPr algn="ctr" indent="0" marL="0">
+            <a:pPr marL="0" indent="0" algn="ctr">
               <a:buNone/>
             </a:pPr>
             <a:r>
@@ -14490,7 +14127,7 @@
           <a:bodyPr wrap="square" rtlCol="0" anchor="ctr"/>
           <a:lstStyle/>
           <a:p>
-            <a:pPr algn="ctr" indent="0" marL="0">
+            <a:pPr marL="0" indent="0" algn="ctr">
               <a:buNone/>
             </a:pPr>
             <a:r>
@@ -14579,7 +14216,7 @@
           <a:bodyPr wrap="square" rtlCol="0" anchor="ctr"/>
           <a:lstStyle/>
           <a:p>
-            <a:pPr indent="0" marL="0">
+            <a:pPr marL="0" indent="0">
               <a:buNone/>
             </a:pPr>
             <a:r>
@@ -14618,7 +14255,7 @@
           <a:bodyPr wrap="square" rtlCol="0" anchor="ctr"/>
           <a:lstStyle/>
           <a:p>
-            <a:pPr indent="0" marL="0">
+            <a:pPr marL="0" indent="0">
               <a:buNone/>
             </a:pPr>
             <a:r>
@@ -14657,7 +14294,7 @@
           <a:bodyPr wrap="square" rtlCol="0" anchor="ctr"/>
           <a:lstStyle/>
           <a:p>
-            <a:pPr indent="0" marL="0">
+            <a:pPr marL="0" indent="0">
               <a:buNone/>
             </a:pPr>
             <a:r>
@@ -14696,7 +14333,7 @@
           <a:bodyPr wrap="square" rtlCol="0" anchor="ctr"/>
           <a:lstStyle/>
           <a:p>
-            <a:pPr indent="0" marL="0">
+            <a:pPr marL="0" indent="0">
               <a:buNone/>
             </a:pPr>
             <a:r>
@@ -14735,7 +14372,7 @@
           <a:bodyPr wrap="square" rtlCol="0" anchor="ctr"/>
           <a:lstStyle/>
           <a:p>
-            <a:pPr indent="0" marL="0">
+            <a:pPr marL="0" indent="0">
               <a:buNone/>
             </a:pPr>
             <a:r>
@@ -14774,7 +14411,7 @@
           <a:bodyPr wrap="square" rtlCol="0" anchor="ctr"/>
           <a:lstStyle/>
           <a:p>
-            <a:pPr indent="0" marL="0">
+            <a:pPr marL="0" indent="0">
               <a:buNone/>
             </a:pPr>
             <a:r>
@@ -14813,7 +14450,7 @@
           <a:bodyPr wrap="square" rtlCol="0" anchor="ctr"/>
           <a:lstStyle/>
           <a:p>
-            <a:pPr indent="0" marL="0">
+            <a:pPr marL="0" indent="0">
               <a:buNone/>
             </a:pPr>
             <a:r>
@@ -14852,7 +14489,7 @@
           <a:bodyPr wrap="square" rtlCol="0" anchor="ctr"/>
           <a:lstStyle/>
           <a:p>
-            <a:pPr indent="0" marL="0">
+            <a:pPr marL="0" indent="0">
               <a:buNone/>
             </a:pPr>
             <a:r>
@@ -14891,7 +14528,7 @@
           <a:bodyPr wrap="square" rtlCol="0" anchor="ctr"/>
           <a:lstStyle/>
           <a:p>
-            <a:pPr indent="0" marL="0">
+            <a:pPr marL="0" indent="0">
               <a:buNone/>
             </a:pPr>
             <a:r>
@@ -14930,7 +14567,7 @@
           <a:bodyPr wrap="square" rtlCol="0" anchor="ctr"/>
           <a:lstStyle/>
           <a:p>
-            <a:pPr indent="0" marL="0">
+            <a:pPr marL="0" indent="0">
               <a:buNone/>
             </a:pPr>
             <a:r>
@@ -14969,7 +14606,7 @@
           <a:bodyPr wrap="square" rtlCol="0" anchor="ctr"/>
           <a:lstStyle/>
           <a:p>
-            <a:pPr indent="0" marL="0">
+            <a:pPr marL="0" indent="0">
               <a:buNone/>
             </a:pPr>
             <a:r>
@@ -15033,7 +14670,7 @@
           <a:bodyPr wrap="square" rtlCol="0" anchor="ctr"/>
           <a:lstStyle/>
           <a:p>
-            <a:pPr algn="ctr" indent="0" marL="0">
+            <a:pPr marL="0" indent="0" algn="ctr">
               <a:buNone/>
             </a:pPr>
             <a:r>
@@ -15097,7 +14734,7 @@
           <a:bodyPr wrap="square" rtlCol="0" anchor="ctr"/>
           <a:lstStyle/>
           <a:p>
-            <a:pPr indent="0" marL="0">
+            <a:pPr marL="0" indent="0">
               <a:buNone/>
             </a:pPr>
             <a:r>
@@ -15159,7 +14796,7 @@
           <a:bodyPr wrap="square" rtlCol="0" anchor="ctr"/>
           <a:lstStyle/>
           <a:p>
-            <a:pPr indent="0" marL="0">
+            <a:pPr marL="0" indent="0">
               <a:buNone/>
             </a:pPr>
             <a:r>
@@ -15198,7 +14835,7 @@
           <a:bodyPr wrap="square" rtlCol="0" anchor="ctr"/>
           <a:lstStyle/>
           <a:p>
-            <a:pPr algn="r" indent="0" marL="0">
+            <a:pPr marL="0" indent="0" algn="r">
               <a:buNone/>
             </a:pPr>
             <a:r>
@@ -15987,7 +15624,7 @@
           <a:bodyPr wrap="square" rtlCol="0" anchor="ctr"/>
           <a:lstStyle/>
           <a:p>
-            <a:pPr indent="0" marL="0">
+            <a:pPr marL="0" indent="0">
               <a:buNone/>
             </a:pPr>
             <a:r>
@@ -16026,7 +15663,7 @@
           <a:bodyPr wrap="square" rtlCol="0" anchor="ctr"/>
           <a:lstStyle/>
           <a:p>
-            <a:pPr indent="0" marL="0">
+            <a:pPr marL="0" indent="0">
               <a:buNone/>
             </a:pPr>
             <a:r>
@@ -16087,12 +15724,12 @@
           <a:ln/>
         </p:spPr>
         <p:txBody>
-          <a:bodyPr wrap="none" lIns="0" tIns="0" rIns="0" bIns="0" rtlCol="0" anchor="ctr" vert="horz">
+          <a:bodyPr vert="horz" wrap="none" lIns="0" tIns="0" rIns="0" bIns="0" rtlCol="0" anchor="ctr">
             <a:normAutofit/>
           </a:bodyPr>
           <a:lstStyle/>
           <a:p>
-            <a:pPr indent="0" marL="0">
+            <a:pPr marL="0" indent="0">
               <a:buNone/>
             </a:pPr>
             <a:r>
@@ -16131,7 +15768,7 @@
           <a:bodyPr wrap="square" rtlCol="0" anchor="ctr"/>
           <a:lstStyle/>
           <a:p>
-            <a:pPr indent="0" marL="0">
+            <a:pPr marL="0" indent="0">
               <a:buNone/>
             </a:pPr>
             <a:r>
@@ -16167,12 +15804,12 @@
           <a:ln/>
         </p:spPr>
         <p:txBody>
-          <a:bodyPr wrap="none" lIns="0" tIns="0" rIns="0" bIns="0" rtlCol="0" anchor="ctr" vert="horz">
+          <a:bodyPr vert="horz" wrap="none" lIns="0" tIns="0" rIns="0" bIns="0" rtlCol="0" anchor="ctr">
             <a:normAutofit/>
           </a:bodyPr>
           <a:lstStyle/>
           <a:p>
-            <a:pPr indent="0" marL="0">
+            <a:pPr marL="0" indent="0">
               <a:buNone/>
             </a:pPr>
             <a:r>
@@ -16211,7 +15848,7 @@
           <a:bodyPr wrap="square" rtlCol="0" anchor="ctr"/>
           <a:lstStyle/>
           <a:p>
-            <a:pPr indent="0" marL="0">
+            <a:pPr marL="0" indent="0">
               <a:buNone/>
             </a:pPr>
             <a:r>
@@ -16247,12 +15884,12 @@
           <a:ln/>
         </p:spPr>
         <p:txBody>
-          <a:bodyPr wrap="none" lIns="0" tIns="0" rIns="0" bIns="0" rtlCol="0" anchor="ctr" vert="horz">
+          <a:bodyPr vert="horz" wrap="none" lIns="0" tIns="0" rIns="0" bIns="0" rtlCol="0" anchor="ctr">
             <a:normAutofit/>
           </a:bodyPr>
           <a:lstStyle/>
           <a:p>
-            <a:pPr indent="0" marL="0">
+            <a:pPr marL="0" indent="0">
               <a:buNone/>
             </a:pPr>
             <a:r>
@@ -16291,7 +15928,7 @@
           <a:bodyPr wrap="square" rtlCol="0" anchor="ctr"/>
           <a:lstStyle/>
           <a:p>
-            <a:pPr indent="0" marL="0">
+            <a:pPr marL="0" indent="0">
               <a:buNone/>
             </a:pPr>
             <a:r>
@@ -16327,12 +15964,12 @@
           <a:ln/>
         </p:spPr>
         <p:txBody>
-          <a:bodyPr wrap="none" lIns="0" tIns="0" rIns="0" bIns="0" rtlCol="0" anchor="ctr" vert="horz">
+          <a:bodyPr vert="horz" wrap="none" lIns="0" tIns="0" rIns="0" bIns="0" rtlCol="0" anchor="ctr">
             <a:normAutofit/>
           </a:bodyPr>
           <a:lstStyle/>
           <a:p>
-            <a:pPr indent="0" marL="0">
+            <a:pPr marL="0" indent="0">
               <a:buNone/>
             </a:pPr>
             <a:r>
@@ -16371,7 +16008,7 @@
           <a:bodyPr wrap="square" rtlCol="0" anchor="ctr"/>
           <a:lstStyle/>
           <a:p>
-            <a:pPr indent="0" marL="0">
+            <a:pPr marL="0" indent="0">
               <a:buNone/>
             </a:pPr>
             <a:r>
@@ -16384,45 +16021,6 @@
                 <a:cs typeface="Microsoft YaHei" pitchFamily="34" charset="-120"/>
               </a:rPr>
               <a:t>正式版本</a:t>
-            </a:r>
-            <a:endParaRPr lang="en-US" sz="1000" dirty="0"/>
-          </a:p>
-        </p:txBody>
-      </p:sp>
-      <p:sp>
-        <p:nvSpPr>
-          <p:cNvPr id="42" name="Text 40"/>
-          <p:cNvSpPr/>
-          <p:nvPr/>
-        </p:nvSpPr>
-        <p:spPr>
-          <a:xfrm>
-            <a:off x="731520" y="6126480"/>
-            <a:ext cx="5486400" cy="274320"/>
-          </a:xfrm>
-          <a:prstGeom prst="rect">
-            <a:avLst/>
-          </a:prstGeom>
-          <a:noFill/>
-          <a:ln/>
-        </p:spPr>
-        <p:txBody>
-          <a:bodyPr wrap="square" rtlCol="0" anchor="ctr"/>
-          <a:lstStyle/>
-          <a:p>
-            <a:pPr indent="0" marL="0">
-              <a:buNone/>
-            </a:pPr>
-            <a:r>
-              <a:rPr lang="en-US" sz="1000" dirty="0">
-                <a:solidFill>
-                  <a:srgbClr val="475569"/>
-                </a:solidFill>
-                <a:latin typeface="Microsoft YaHei" pitchFamily="34" charset="0"/>
-                <a:ea typeface="Microsoft YaHei" pitchFamily="34" charset="-122"/>
-                <a:cs typeface="Microsoft YaHei" pitchFamily="34" charset="-120"/>
-              </a:rPr>
-              <a:t>上海云之脑智能科技有限公司</a:t>
             </a:r>
             <a:endParaRPr lang="en-US" sz="1000" dirty="0"/>
           </a:p>
@@ -16474,11 +16072,11 @@
           <a:bodyPr wrap="square" rtlCol="0" anchor="ctr"/>
           <a:lstStyle/>
           <a:p>
-            <a:pPr indent="0" marL="0">
-              <a:buNone/>
-            </a:pPr>
-            <a:r>
-              <a:rPr lang="en-US" sz="1100" spc="200" kern="0" dirty="0">
+            <a:pPr marL="0" indent="0">
+              <a:buNone/>
+            </a:pPr>
+            <a:r>
+              <a:rPr lang="en-US" sz="1100" kern="0" spc="200" dirty="0">
                 <a:solidFill>
                   <a:srgbClr val="5A6070"/>
                 </a:solidFill>
@@ -16538,7 +16136,7 @@
           <a:bodyPr wrap="square" rtlCol="0" anchor="ctr"/>
           <a:lstStyle/>
           <a:p>
-            <a:pPr indent="0" marL="0">
+            <a:pPr marL="0" indent="0">
               <a:buNone/>
             </a:pPr>
             <a:r>
@@ -16577,7 +16175,7 @@
           <a:bodyPr wrap="square" rtlCol="0" anchor="ctr"/>
           <a:lstStyle/>
           <a:p>
-            <a:pPr indent="0" marL="0">
+            <a:pPr marL="0" indent="0">
               <a:buNone/>
             </a:pPr>
             <a:r>
@@ -16639,7 +16237,7 @@
           <a:bodyPr wrap="square" rtlCol="0" anchor="ctr"/>
           <a:lstStyle/>
           <a:p>
-            <a:pPr indent="0" marL="0">
+            <a:pPr marL="0" indent="0">
               <a:buNone/>
             </a:pPr>
             <a:r>
@@ -16678,7 +16276,7 @@
           <a:bodyPr wrap="square" rtlCol="0" anchor="t"/>
           <a:lstStyle/>
           <a:p>
-            <a:pPr indent="0" marL="0">
+            <a:pPr marL="0" indent="0">
               <a:buNone/>
             </a:pPr>
             <a:r>
@@ -16717,7 +16315,7 @@
           <a:bodyPr wrap="square" rtlCol="0" anchor="t"/>
           <a:lstStyle/>
           <a:p>
-            <a:pPr indent="0" marL="0">
+            <a:pPr marL="0" indent="0">
               <a:lnSpc>
                 <a:spcPts val="130"/>
               </a:lnSpc>
@@ -16759,7 +16357,7 @@
           <a:bodyPr wrap="square" rtlCol="0" anchor="t"/>
           <a:lstStyle/>
           <a:p>
-            <a:pPr indent="0" marL="0">
+            <a:pPr marL="0" indent="0">
               <a:buNone/>
             </a:pPr>
             <a:r>
@@ -16798,7 +16396,7 @@
           <a:bodyPr wrap="square" rtlCol="0" anchor="t"/>
           <a:lstStyle/>
           <a:p>
-            <a:pPr indent="0" marL="0">
+            <a:pPr marL="0" indent="0">
               <a:lnSpc>
                 <a:spcPts val="130"/>
               </a:lnSpc>
@@ -16840,7 +16438,7 @@
           <a:bodyPr wrap="square" rtlCol="0" anchor="t"/>
           <a:lstStyle/>
           <a:p>
-            <a:pPr indent="0" marL="0">
+            <a:pPr marL="0" indent="0">
               <a:buNone/>
             </a:pPr>
             <a:r>
@@ -16879,7 +16477,7 @@
           <a:bodyPr wrap="square" rtlCol="0" anchor="t"/>
           <a:lstStyle/>
           <a:p>
-            <a:pPr indent="0" marL="0">
+            <a:pPr marL="0" indent="0">
               <a:lnSpc>
                 <a:spcPts val="130"/>
               </a:lnSpc>
@@ -16921,7 +16519,7 @@
           <a:bodyPr wrap="square" rtlCol="0" anchor="t"/>
           <a:lstStyle/>
           <a:p>
-            <a:pPr indent="0" marL="0">
+            <a:pPr marL="0" indent="0">
               <a:buNone/>
             </a:pPr>
             <a:r>
@@ -16960,7 +16558,7 @@
           <a:bodyPr wrap="square" rtlCol="0" anchor="t"/>
           <a:lstStyle/>
           <a:p>
-            <a:pPr indent="0" marL="0">
+            <a:pPr marL="0" indent="0">
               <a:lnSpc>
                 <a:spcPts val="130"/>
               </a:lnSpc>
@@ -17048,7 +16646,7 @@
           <a:bodyPr wrap="square" rtlCol="0" anchor="ctr"/>
           <a:lstStyle/>
           <a:p>
-            <a:pPr indent="0" marL="0">
+            <a:pPr marL="0" indent="0">
               <a:buNone/>
             </a:pPr>
             <a:r>
@@ -17109,12 +16707,12 @@
           <a:ln/>
         </p:spPr>
         <p:txBody>
-          <a:bodyPr wrap="none" lIns="0" tIns="0" rIns="0" bIns="0" rtlCol="0" anchor="ctr" vert="horz">
+          <a:bodyPr vert="horz" wrap="none" lIns="0" tIns="0" rIns="0" bIns="0" rtlCol="0" anchor="ctr">
             <a:normAutofit/>
           </a:bodyPr>
           <a:lstStyle/>
           <a:p>
-            <a:pPr algn="ctr" indent="0" marL="0">
+            <a:pPr marL="0" indent="0" algn="ctr">
               <a:buNone/>
             </a:pPr>
             <a:r>
@@ -17153,7 +16751,7 @@
           <a:bodyPr wrap="square" rtlCol="0" anchor="ctr"/>
           <a:lstStyle/>
           <a:p>
-            <a:pPr indent="0" marL="0">
+            <a:pPr marL="0" indent="0">
               <a:buNone/>
             </a:pPr>
             <a:r>
@@ -17192,7 +16790,7 @@
           <a:bodyPr wrap="square" rtlCol="0" anchor="t"/>
           <a:lstStyle/>
           <a:p>
-            <a:pPr indent="0" marL="0">
+            <a:pPr marL="0" indent="0">
               <a:buNone/>
             </a:pPr>
             <a:r>
@@ -17253,12 +16851,12 @@
           <a:ln/>
         </p:spPr>
         <p:txBody>
-          <a:bodyPr wrap="none" lIns="0" tIns="0" rIns="0" bIns="0" rtlCol="0" anchor="ctr" vert="horz">
+          <a:bodyPr vert="horz" wrap="none" lIns="0" tIns="0" rIns="0" bIns="0" rtlCol="0" anchor="ctr">
             <a:normAutofit/>
           </a:bodyPr>
           <a:lstStyle/>
           <a:p>
-            <a:pPr algn="ctr" indent="0" marL="0">
+            <a:pPr marL="0" indent="0" algn="ctr">
               <a:buNone/>
             </a:pPr>
             <a:r>
@@ -17297,7 +16895,7 @@
           <a:bodyPr wrap="square" rtlCol="0" anchor="ctr"/>
           <a:lstStyle/>
           <a:p>
-            <a:pPr indent="0" marL="0">
+            <a:pPr marL="0" indent="0">
               <a:buNone/>
             </a:pPr>
             <a:r>
@@ -17336,7 +16934,7 @@
           <a:bodyPr wrap="square" rtlCol="0" anchor="t"/>
           <a:lstStyle/>
           <a:p>
-            <a:pPr indent="0" marL="0">
+            <a:pPr marL="0" indent="0">
               <a:buNone/>
             </a:pPr>
             <a:r>
@@ -17397,12 +16995,12 @@
           <a:ln/>
         </p:spPr>
         <p:txBody>
-          <a:bodyPr wrap="none" lIns="0" tIns="0" rIns="0" bIns="0" rtlCol="0" anchor="ctr" vert="horz">
+          <a:bodyPr vert="horz" wrap="none" lIns="0" tIns="0" rIns="0" bIns="0" rtlCol="0" anchor="ctr">
             <a:normAutofit/>
           </a:bodyPr>
           <a:lstStyle/>
           <a:p>
-            <a:pPr algn="ctr" indent="0" marL="0">
+            <a:pPr marL="0" indent="0" algn="ctr">
               <a:buNone/>
             </a:pPr>
             <a:r>
@@ -17441,7 +17039,7 @@
           <a:bodyPr wrap="square" rtlCol="0" anchor="ctr"/>
           <a:lstStyle/>
           <a:p>
-            <a:pPr indent="0" marL="0">
+            <a:pPr marL="0" indent="0">
               <a:buNone/>
             </a:pPr>
             <a:r>
@@ -17480,7 +17078,7 @@
           <a:bodyPr wrap="square" rtlCol="0" anchor="t"/>
           <a:lstStyle/>
           <a:p>
-            <a:pPr indent="0" marL="0">
+            <a:pPr marL="0" indent="0">
               <a:buNone/>
             </a:pPr>
             <a:r>
@@ -17541,12 +17139,12 @@
           <a:ln/>
         </p:spPr>
         <p:txBody>
-          <a:bodyPr wrap="none" lIns="0" tIns="0" rIns="0" bIns="0" rtlCol="0" anchor="ctr" vert="horz">
+          <a:bodyPr vert="horz" wrap="none" lIns="0" tIns="0" rIns="0" bIns="0" rtlCol="0" anchor="ctr">
             <a:normAutofit/>
           </a:bodyPr>
           <a:lstStyle/>
           <a:p>
-            <a:pPr algn="ctr" indent="0" marL="0">
+            <a:pPr marL="0" indent="0" algn="ctr">
               <a:buNone/>
             </a:pPr>
             <a:r>
@@ -17585,7 +17183,7 @@
           <a:bodyPr wrap="square" rtlCol="0" anchor="ctr"/>
           <a:lstStyle/>
           <a:p>
-            <a:pPr indent="0" marL="0">
+            <a:pPr marL="0" indent="0">
               <a:buNone/>
             </a:pPr>
             <a:r>
@@ -17624,7 +17222,7 @@
           <a:bodyPr wrap="square" rtlCol="0" anchor="t"/>
           <a:lstStyle/>
           <a:p>
-            <a:pPr indent="0" marL="0">
+            <a:pPr marL="0" indent="0">
               <a:buNone/>
             </a:pPr>
             <a:r>
@@ -17688,11 +17286,11 @@
           <a:bodyPr wrap="square" rtlCol="0" anchor="ctr"/>
           <a:lstStyle/>
           <a:p>
-            <a:pPr indent="0" marL="0">
-              <a:buNone/>
-            </a:pPr>
-            <a:r>
-              <a:rPr lang="en-US" sz="1100" b="1" spc="100" kern="0" dirty="0">
+            <a:pPr marL="0" indent="0">
+              <a:buNone/>
+            </a:pPr>
+            <a:r>
+              <a:rPr lang="en-US" sz="1100" b="1" kern="0" spc="100" dirty="0">
                 <a:solidFill>
                   <a:srgbClr val="5A6070"/>
                 </a:solidFill>
@@ -17727,7 +17325,7 @@
           <a:bodyPr wrap="square" rtlCol="0" anchor="ctr"/>
           <a:lstStyle/>
           <a:p>
-            <a:pPr indent="0" marL="0">
+            <a:pPr marL="0" indent="0">
               <a:buNone/>
             </a:pPr>
             <a:r>
@@ -17789,7 +17387,7 @@
           <a:bodyPr wrap="square" rtlCol="0" anchor="ctr"/>
           <a:lstStyle/>
           <a:p>
-            <a:pPr indent="0" marL="0">
+            <a:pPr marL="0" indent="0">
               <a:buNone/>
             </a:pPr>
             <a:r>
@@ -17828,7 +17426,7 @@
           <a:bodyPr wrap="square" rtlCol="0" anchor="ctr"/>
           <a:lstStyle/>
           <a:p>
-            <a:pPr algn="r" indent="0" marL="0">
+            <a:pPr marL="0" indent="0" algn="r">
               <a:buNone/>
             </a:pPr>
             <a:r>
@@ -17892,11 +17490,11 @@
           <a:bodyPr wrap="square" rtlCol="0" anchor="ctr"/>
           <a:lstStyle/>
           <a:p>
-            <a:pPr indent="0" marL="0">
-              <a:buNone/>
-            </a:pPr>
-            <a:r>
-              <a:rPr lang="en-US" sz="1100" spc="200" kern="0" dirty="0">
+            <a:pPr marL="0" indent="0">
+              <a:buNone/>
+            </a:pPr>
+            <a:r>
+              <a:rPr lang="en-US" sz="1100" kern="0" spc="200" dirty="0">
                 <a:solidFill>
                   <a:srgbClr val="5A6070"/>
                 </a:solidFill>
@@ -17956,7 +17554,7 @@
           <a:bodyPr wrap="square" rtlCol="0" anchor="ctr"/>
           <a:lstStyle/>
           <a:p>
-            <a:pPr indent="0" marL="0">
+            <a:pPr marL="0" indent="0">
               <a:buNone/>
             </a:pPr>
             <a:r>
@@ -18018,7 +17616,7 @@
           <a:bodyPr wrap="square" rtlCol="0" anchor="ctr"/>
           <a:lstStyle/>
           <a:p>
-            <a:pPr indent="0" marL="0">
+            <a:pPr marL="0" indent="0">
               <a:buNone/>
             </a:pPr>
             <a:r>
@@ -18082,7 +17680,7 @@
           <a:bodyPr wrap="square" rtlCol="0" anchor="ctr"/>
           <a:lstStyle/>
           <a:p>
-            <a:pPr algn="ctr" indent="0" marL="0">
+            <a:pPr marL="0" indent="0" algn="ctr">
               <a:buNone/>
             </a:pPr>
             <a:r>
@@ -18121,7 +17719,7 @@
           <a:bodyPr wrap="square" rtlCol="0" anchor="ctr"/>
           <a:lstStyle/>
           <a:p>
-            <a:pPr indent="0" marL="0">
+            <a:pPr marL="0" indent="0">
               <a:buNone/>
             </a:pPr>
             <a:r>
@@ -18160,7 +17758,7 @@
           <a:bodyPr wrap="square" rtlCol="0" anchor="ctr"/>
           <a:lstStyle/>
           <a:p>
-            <a:pPr indent="0" marL="0">
+            <a:pPr marL="0" indent="0">
               <a:buNone/>
             </a:pPr>
             <a:r>
@@ -18247,7 +17845,7 @@
           <a:bodyPr wrap="square" rtlCol="0" anchor="ctr"/>
           <a:lstStyle/>
           <a:p>
-            <a:pPr algn="ctr" indent="0" marL="0">
+            <a:pPr marL="0" indent="0" algn="ctr">
               <a:buNone/>
             </a:pPr>
             <a:r>
@@ -18286,7 +17884,7 @@
           <a:bodyPr wrap="square" rtlCol="0" anchor="ctr"/>
           <a:lstStyle/>
           <a:p>
-            <a:pPr indent="0" marL="0">
+            <a:pPr marL="0" indent="0">
               <a:buNone/>
             </a:pPr>
             <a:r>
@@ -18325,7 +17923,7 @@
           <a:bodyPr wrap="square" rtlCol="0" anchor="ctr"/>
           <a:lstStyle/>
           <a:p>
-            <a:pPr indent="0" marL="0">
+            <a:pPr marL="0" indent="0">
               <a:buNone/>
             </a:pPr>
             <a:r>
@@ -18412,7 +18010,7 @@
           <a:bodyPr wrap="square" rtlCol="0" anchor="ctr"/>
           <a:lstStyle/>
           <a:p>
-            <a:pPr algn="ctr" indent="0" marL="0">
+            <a:pPr marL="0" indent="0" algn="ctr">
               <a:buNone/>
             </a:pPr>
             <a:r>
@@ -18451,7 +18049,7 @@
           <a:bodyPr wrap="square" rtlCol="0" anchor="ctr"/>
           <a:lstStyle/>
           <a:p>
-            <a:pPr indent="0" marL="0">
+            <a:pPr marL="0" indent="0">
               <a:buNone/>
             </a:pPr>
             <a:r>
@@ -18490,7 +18088,7 @@
           <a:bodyPr wrap="square" rtlCol="0" anchor="ctr"/>
           <a:lstStyle/>
           <a:p>
-            <a:pPr indent="0" marL="0">
+            <a:pPr marL="0" indent="0">
               <a:buNone/>
             </a:pPr>
             <a:r>
@@ -18577,7 +18175,7 @@
           <a:bodyPr wrap="square" rtlCol="0" anchor="ctr"/>
           <a:lstStyle/>
           <a:p>
-            <a:pPr algn="ctr" indent="0" marL="0">
+            <a:pPr marL="0" indent="0" algn="ctr">
               <a:buNone/>
             </a:pPr>
             <a:r>
@@ -18616,7 +18214,7 @@
           <a:bodyPr wrap="square" rtlCol="0" anchor="ctr"/>
           <a:lstStyle/>
           <a:p>
-            <a:pPr indent="0" marL="0">
+            <a:pPr marL="0" indent="0">
               <a:buNone/>
             </a:pPr>
             <a:r>
@@ -18655,7 +18253,7 @@
           <a:bodyPr wrap="square" rtlCol="0" anchor="ctr"/>
           <a:lstStyle/>
           <a:p>
-            <a:pPr indent="0" marL="0">
+            <a:pPr marL="0" indent="0">
               <a:buNone/>
             </a:pPr>
             <a:r>
@@ -18742,7 +18340,7 @@
           <a:bodyPr wrap="square" rtlCol="0" anchor="ctr"/>
           <a:lstStyle/>
           <a:p>
-            <a:pPr algn="ctr" indent="0" marL="0">
+            <a:pPr marL="0" indent="0" algn="ctr">
               <a:buNone/>
             </a:pPr>
             <a:r>
@@ -18781,7 +18379,7 @@
           <a:bodyPr wrap="square" rtlCol="0" anchor="ctr"/>
           <a:lstStyle/>
           <a:p>
-            <a:pPr indent="0" marL="0">
+            <a:pPr marL="0" indent="0">
               <a:buNone/>
             </a:pPr>
             <a:r>
@@ -18820,7 +18418,7 @@
           <a:bodyPr wrap="square" rtlCol="0" anchor="ctr"/>
           <a:lstStyle/>
           <a:p>
-            <a:pPr indent="0" marL="0">
+            <a:pPr marL="0" indent="0">
               <a:buNone/>
             </a:pPr>
             <a:r>
@@ -18907,7 +18505,7 @@
           <a:bodyPr wrap="square" rtlCol="0" anchor="ctr"/>
           <a:lstStyle/>
           <a:p>
-            <a:pPr algn="ctr" indent="0" marL="0">
+            <a:pPr marL="0" indent="0" algn="ctr">
               <a:buNone/>
             </a:pPr>
             <a:r>
@@ -18946,7 +18544,7 @@
           <a:bodyPr wrap="square" rtlCol="0" anchor="ctr"/>
           <a:lstStyle/>
           <a:p>
-            <a:pPr indent="0" marL="0">
+            <a:pPr marL="0" indent="0">
               <a:buNone/>
             </a:pPr>
             <a:r>
@@ -18985,7 +18583,7 @@
           <a:bodyPr wrap="square" rtlCol="0" anchor="ctr"/>
           <a:lstStyle/>
           <a:p>
-            <a:pPr indent="0" marL="0">
+            <a:pPr marL="0" indent="0">
               <a:buNone/>
             </a:pPr>
             <a:r>
@@ -19024,7 +18622,7 @@
           <a:bodyPr wrap="square" rtlCol="0" anchor="ctr"/>
           <a:lstStyle/>
           <a:p>
-            <a:pPr indent="0" marL="0">
+            <a:pPr marL="0" indent="0">
               <a:buNone/>
             </a:pPr>
             <a:r>
@@ -19113,7 +18711,7 @@
           <a:bodyPr wrap="square" rtlCol="0" anchor="ctr"/>
           <a:lstStyle/>
           <a:p>
-            <a:pPr indent="0" marL="0">
+            <a:pPr marL="0" indent="0">
               <a:buNone/>
             </a:pPr>
             <a:r>
@@ -19177,7 +18775,7 @@
           <a:bodyPr wrap="square" rtlCol="0" anchor="ctr"/>
           <a:lstStyle/>
           <a:p>
-            <a:pPr algn="ctr" indent="0" marL="0">
+            <a:pPr marL="0" indent="0" algn="ctr">
               <a:buNone/>
             </a:pPr>
             <a:r>
@@ -19241,7 +18839,7 @@
           <a:bodyPr wrap="square" rtlCol="0" anchor="ctr"/>
           <a:lstStyle/>
           <a:p>
-            <a:pPr algn="ctr" indent="0" marL="0">
+            <a:pPr marL="0" indent="0" algn="ctr">
               <a:buNone/>
             </a:pPr>
             <a:r>
@@ -19305,7 +18903,7 @@
           <a:bodyPr wrap="square" rtlCol="0" anchor="ctr"/>
           <a:lstStyle/>
           <a:p>
-            <a:pPr algn="ctr" indent="0" marL="0">
+            <a:pPr marL="0" indent="0" algn="ctr">
               <a:buNone/>
             </a:pPr>
             <a:r>
@@ -19419,7 +19017,7 @@
           <a:bodyPr wrap="square" rtlCol="0" anchor="ctr"/>
           <a:lstStyle/>
           <a:p>
-            <a:pPr indent="0" marL="0">
+            <a:pPr marL="0" indent="0">
               <a:buNone/>
             </a:pPr>
             <a:r>
@@ -19483,7 +19081,7 @@
           <a:bodyPr wrap="square" rtlCol="0" anchor="ctr"/>
           <a:lstStyle/>
           <a:p>
-            <a:pPr algn="ctr" indent="0" marL="0">
+            <a:pPr marL="0" indent="0" algn="ctr">
               <a:buNone/>
             </a:pPr>
             <a:r>
@@ -19547,7 +19145,7 @@
           <a:bodyPr wrap="square" rtlCol="0" anchor="ctr"/>
           <a:lstStyle/>
           <a:p>
-            <a:pPr algn="ctr" indent="0" marL="0">
+            <a:pPr marL="0" indent="0" algn="ctr">
               <a:buNone/>
             </a:pPr>
             <a:r>
@@ -19611,7 +19209,7 @@
           <a:bodyPr wrap="square" rtlCol="0" anchor="ctr"/>
           <a:lstStyle/>
           <a:p>
-            <a:pPr algn="ctr" indent="0" marL="0">
+            <a:pPr marL="0" indent="0" algn="ctr">
               <a:buNone/>
             </a:pPr>
             <a:r>
@@ -19675,7 +19273,7 @@
           <a:bodyPr wrap="square" rtlCol="0" anchor="ctr"/>
           <a:lstStyle/>
           <a:p>
-            <a:pPr algn="ctr" indent="0" marL="0">
+            <a:pPr marL="0" indent="0" algn="ctr">
               <a:buNone/>
             </a:pPr>
             <a:r>
@@ -19789,7 +19387,7 @@
           <a:bodyPr wrap="square" rtlCol="0" anchor="ctr"/>
           <a:lstStyle/>
           <a:p>
-            <a:pPr indent="0" marL="0">
+            <a:pPr marL="0" indent="0">
               <a:buNone/>
             </a:pPr>
             <a:r>
@@ -19853,7 +19451,7 @@
           <a:bodyPr wrap="square" rtlCol="0" anchor="ctr"/>
           <a:lstStyle/>
           <a:p>
-            <a:pPr algn="ctr" indent="0" marL="0">
+            <a:pPr marL="0" indent="0" algn="ctr">
               <a:buNone/>
             </a:pPr>
             <a:r>
@@ -19917,7 +19515,7 @@
           <a:bodyPr wrap="square" rtlCol="0" anchor="ctr"/>
           <a:lstStyle/>
           <a:p>
-            <a:pPr algn="ctr" indent="0" marL="0">
+            <a:pPr marL="0" indent="0" algn="ctr">
               <a:buNone/>
             </a:pPr>
             <a:r>
@@ -19981,7 +19579,7 @@
           <a:bodyPr wrap="square" rtlCol="0" anchor="ctr"/>
           <a:lstStyle/>
           <a:p>
-            <a:pPr algn="ctr" indent="0" marL="0">
+            <a:pPr marL="0" indent="0" algn="ctr">
               <a:buNone/>
             </a:pPr>
             <a:r>
@@ -20045,7 +19643,7 @@
           <a:bodyPr wrap="square" rtlCol="0" anchor="ctr"/>
           <a:lstStyle/>
           <a:p>
-            <a:pPr algn="ctr" indent="0" marL="0">
+            <a:pPr marL="0" indent="0" algn="ctr">
               <a:buNone/>
             </a:pPr>
             <a:r>
@@ -20159,7 +19757,7 @@
           <a:bodyPr wrap="square" rtlCol="0" anchor="ctr"/>
           <a:lstStyle/>
           <a:p>
-            <a:pPr indent="0" marL="0">
+            <a:pPr marL="0" indent="0">
               <a:buNone/>
             </a:pPr>
             <a:r>
@@ -20223,7 +19821,7 @@
           <a:bodyPr wrap="square" rtlCol="0" anchor="ctr"/>
           <a:lstStyle/>
           <a:p>
-            <a:pPr algn="ctr" indent="0" marL="0">
+            <a:pPr marL="0" indent="0" algn="ctr">
               <a:buNone/>
             </a:pPr>
             <a:r>
@@ -20287,7 +19885,7 @@
           <a:bodyPr wrap="square" rtlCol="0" anchor="ctr"/>
           <a:lstStyle/>
           <a:p>
-            <a:pPr algn="ctr" indent="0" marL="0">
+            <a:pPr marL="0" indent="0" algn="ctr">
               <a:buNone/>
             </a:pPr>
             <a:r>
@@ -20351,7 +19949,7 @@
           <a:bodyPr wrap="square" rtlCol="0" anchor="ctr"/>
           <a:lstStyle/>
           <a:p>
-            <a:pPr algn="ctr" indent="0" marL="0">
+            <a:pPr marL="0" indent="0" algn="ctr">
               <a:buNone/>
             </a:pPr>
             <a:r>
@@ -20415,7 +20013,7 @@
           <a:bodyPr wrap="square" rtlCol="0" anchor="ctr"/>
           <a:lstStyle/>
           <a:p>
-            <a:pPr algn="ctr" indent="0" marL="0">
+            <a:pPr marL="0" indent="0" algn="ctr">
               <a:buNone/>
             </a:pPr>
             <a:r>
@@ -20477,7 +20075,7 @@
           <a:bodyPr wrap="square" rtlCol="0" anchor="ctr"/>
           <a:lstStyle/>
           <a:p>
-            <a:pPr indent="0" marL="0">
+            <a:pPr marL="0" indent="0">
               <a:buNone/>
             </a:pPr>
             <a:r>
@@ -20516,7 +20114,7 @@
           <a:bodyPr wrap="square" rtlCol="0" anchor="ctr"/>
           <a:lstStyle/>
           <a:p>
-            <a:pPr algn="r" indent="0" marL="0">
+            <a:pPr marL="0" indent="0" algn="r">
               <a:buNone/>
             </a:pPr>
             <a:r>
@@ -20580,11 +20178,11 @@
           <a:bodyPr wrap="square" rtlCol="0" anchor="ctr"/>
           <a:lstStyle/>
           <a:p>
-            <a:pPr indent="0" marL="0">
-              <a:buNone/>
-            </a:pPr>
-            <a:r>
-              <a:rPr lang="en-US" sz="1100" spc="200" kern="0" dirty="0">
+            <a:pPr marL="0" indent="0">
+              <a:buNone/>
+            </a:pPr>
+            <a:r>
+              <a:rPr lang="en-US" sz="1100" kern="0" spc="200" dirty="0">
                 <a:solidFill>
                   <a:srgbClr val="5A6070"/>
                 </a:solidFill>
@@ -20644,7 +20242,7 @@
           <a:bodyPr wrap="square" rtlCol="0" anchor="ctr"/>
           <a:lstStyle/>
           <a:p>
-            <a:pPr indent="0" marL="0">
+            <a:pPr marL="0" indent="0">
               <a:buNone/>
             </a:pPr>
             <a:r>
@@ -20753,12 +20351,12 @@
           <a:ln/>
         </p:spPr>
         <p:txBody>
-          <a:bodyPr wrap="none" lIns="0" tIns="0" rIns="0" bIns="0" rtlCol="0" anchor="ctr" vert="horz">
+          <a:bodyPr vert="horz" wrap="none" lIns="0" tIns="0" rIns="0" bIns="0" rtlCol="0" anchor="ctr">
             <a:normAutofit/>
           </a:bodyPr>
           <a:lstStyle/>
           <a:p>
-            <a:pPr indent="0" marL="0">
+            <a:pPr marL="0" indent="0">
               <a:buNone/>
             </a:pPr>
             <a:r>
@@ -20797,7 +20395,7 @@
           <a:bodyPr wrap="square" rtlCol="0" anchor="ctr"/>
           <a:lstStyle/>
           <a:p>
-            <a:pPr indent="0" marL="0">
+            <a:pPr marL="0" indent="0">
               <a:buNone/>
             </a:pPr>
             <a:r>
@@ -20836,7 +20434,7 @@
           <a:bodyPr wrap="square" rtlCol="0" anchor="t"/>
           <a:lstStyle/>
           <a:p>
-            <a:pPr indent="0" marL="0">
+            <a:pPr marL="0" indent="0">
               <a:lnSpc>
                 <a:spcPts val="140"/>
               </a:lnSpc>
@@ -20926,7 +20524,7 @@
           <a:bodyPr wrap="square" rtlCol="0" anchor="ctr"/>
           <a:lstStyle/>
           <a:p>
-            <a:pPr algn="ctr" indent="0" marL="0">
+            <a:pPr marL="0" indent="0" algn="ctr">
               <a:buNone/>
             </a:pPr>
             <a:r>
@@ -20990,7 +20588,7 @@
           <a:bodyPr wrap="square" rtlCol="0" anchor="ctr"/>
           <a:lstStyle/>
           <a:p>
-            <a:pPr algn="ctr" indent="0" marL="0">
+            <a:pPr marL="0" indent="0" algn="ctr">
               <a:buNone/>
             </a:pPr>
             <a:r>
@@ -21054,7 +20652,7 @@
           <a:bodyPr wrap="square" rtlCol="0" anchor="ctr"/>
           <a:lstStyle/>
           <a:p>
-            <a:pPr algn="ctr" indent="0" marL="0">
+            <a:pPr marL="0" indent="0" algn="ctr">
               <a:buNone/>
             </a:pPr>
             <a:r>
@@ -21140,12 +20738,12 @@
           <a:ln/>
         </p:spPr>
         <p:txBody>
-          <a:bodyPr wrap="none" lIns="0" tIns="0" rIns="0" bIns="0" rtlCol="0" anchor="ctr" vert="horz">
+          <a:bodyPr vert="horz" wrap="none" lIns="0" tIns="0" rIns="0" bIns="0" rtlCol="0" anchor="ctr">
             <a:normAutofit/>
           </a:bodyPr>
           <a:lstStyle/>
           <a:p>
-            <a:pPr indent="0" marL="0">
+            <a:pPr marL="0" indent="0">
               <a:buNone/>
             </a:pPr>
             <a:r>
@@ -21184,7 +20782,7 @@
           <a:bodyPr wrap="square" rtlCol="0" anchor="ctr"/>
           <a:lstStyle/>
           <a:p>
-            <a:pPr indent="0" marL="0">
+            <a:pPr marL="0" indent="0">
               <a:buNone/>
             </a:pPr>
             <a:r>
@@ -21223,7 +20821,7 @@
           <a:bodyPr wrap="square" rtlCol="0" anchor="t"/>
           <a:lstStyle/>
           <a:p>
-            <a:pPr indent="0" marL="0">
+            <a:pPr marL="0" indent="0">
               <a:lnSpc>
                 <a:spcPts val="140"/>
               </a:lnSpc>
@@ -21313,7 +20911,7 @@
           <a:bodyPr wrap="square" rtlCol="0" anchor="ctr"/>
           <a:lstStyle/>
           <a:p>
-            <a:pPr algn="ctr" indent="0" marL="0">
+            <a:pPr marL="0" indent="0" algn="ctr">
               <a:buNone/>
             </a:pPr>
             <a:r>
@@ -21377,7 +20975,7 @@
           <a:bodyPr wrap="square" rtlCol="0" anchor="ctr"/>
           <a:lstStyle/>
           <a:p>
-            <a:pPr algn="ctr" indent="0" marL="0">
+            <a:pPr marL="0" indent="0" algn="ctr">
               <a:buNone/>
             </a:pPr>
             <a:r>
@@ -21441,7 +21039,7 @@
           <a:bodyPr wrap="square" rtlCol="0" anchor="ctr"/>
           <a:lstStyle/>
           <a:p>
-            <a:pPr algn="ctr" indent="0" marL="0">
+            <a:pPr marL="0" indent="0" algn="ctr">
               <a:buNone/>
             </a:pPr>
             <a:r>
@@ -21527,12 +21125,12 @@
           <a:ln/>
         </p:spPr>
         <p:txBody>
-          <a:bodyPr wrap="none" lIns="0" tIns="0" rIns="0" bIns="0" rtlCol="0" anchor="ctr" vert="horz">
+          <a:bodyPr vert="horz" wrap="none" lIns="0" tIns="0" rIns="0" bIns="0" rtlCol="0" anchor="ctr">
             <a:normAutofit/>
           </a:bodyPr>
           <a:lstStyle/>
           <a:p>
-            <a:pPr indent="0" marL="0">
+            <a:pPr marL="0" indent="0">
               <a:buNone/>
             </a:pPr>
             <a:r>
@@ -21571,7 +21169,7 @@
           <a:bodyPr wrap="square" rtlCol="0" anchor="ctr"/>
           <a:lstStyle/>
           <a:p>
-            <a:pPr indent="0" marL="0">
+            <a:pPr marL="0" indent="0">
               <a:buNone/>
             </a:pPr>
             <a:r>
@@ -21610,7 +21208,7 @@
           <a:bodyPr wrap="square" rtlCol="0" anchor="t"/>
           <a:lstStyle/>
           <a:p>
-            <a:pPr indent="0" marL="0">
+            <a:pPr marL="0" indent="0">
               <a:lnSpc>
                 <a:spcPts val="140"/>
               </a:lnSpc>
@@ -21700,7 +21298,7 @@
           <a:bodyPr wrap="square" rtlCol="0" anchor="ctr"/>
           <a:lstStyle/>
           <a:p>
-            <a:pPr algn="ctr" indent="0" marL="0">
+            <a:pPr marL="0" indent="0" algn="ctr">
               <a:buNone/>
             </a:pPr>
             <a:r>
@@ -21764,7 +21362,7 @@
           <a:bodyPr wrap="square" rtlCol="0" anchor="ctr"/>
           <a:lstStyle/>
           <a:p>
-            <a:pPr algn="ctr" indent="0" marL="0">
+            <a:pPr marL="0" indent="0" algn="ctr">
               <a:buNone/>
             </a:pPr>
             <a:r>
@@ -21828,7 +21426,7 @@
           <a:bodyPr wrap="square" rtlCol="0" anchor="ctr"/>
           <a:lstStyle/>
           <a:p>
-            <a:pPr algn="ctr" indent="0" marL="0">
+            <a:pPr marL="0" indent="0" algn="ctr">
               <a:buNone/>
             </a:pPr>
             <a:r>
@@ -21914,12 +21512,12 @@
           <a:ln/>
         </p:spPr>
         <p:txBody>
-          <a:bodyPr wrap="none" lIns="0" tIns="0" rIns="0" bIns="0" rtlCol="0" anchor="ctr" vert="horz">
+          <a:bodyPr vert="horz" wrap="none" lIns="0" tIns="0" rIns="0" bIns="0" rtlCol="0" anchor="ctr">
             <a:normAutofit/>
           </a:bodyPr>
           <a:lstStyle/>
           <a:p>
-            <a:pPr indent="0" marL="0">
+            <a:pPr marL="0" indent="0">
               <a:buNone/>
             </a:pPr>
             <a:r>
@@ -21958,7 +21556,7 @@
           <a:bodyPr wrap="square" rtlCol="0" anchor="ctr"/>
           <a:lstStyle/>
           <a:p>
-            <a:pPr indent="0" marL="0">
+            <a:pPr marL="0" indent="0">
               <a:buNone/>
             </a:pPr>
             <a:r>
@@ -21997,7 +21595,7 @@
           <a:bodyPr wrap="square" rtlCol="0" anchor="t"/>
           <a:lstStyle/>
           <a:p>
-            <a:pPr indent="0" marL="0">
+            <a:pPr marL="0" indent="0">
               <a:lnSpc>
                 <a:spcPts val="140"/>
               </a:lnSpc>
@@ -22087,7 +21685,7 @@
           <a:bodyPr wrap="square" rtlCol="0" anchor="ctr"/>
           <a:lstStyle/>
           <a:p>
-            <a:pPr algn="ctr" indent="0" marL="0">
+            <a:pPr marL="0" indent="0" algn="ctr">
               <a:buNone/>
             </a:pPr>
             <a:r>
@@ -22151,7 +21749,7 @@
           <a:bodyPr wrap="square" rtlCol="0" anchor="ctr"/>
           <a:lstStyle/>
           <a:p>
-            <a:pPr algn="ctr" indent="0" marL="0">
+            <a:pPr marL="0" indent="0" algn="ctr">
               <a:buNone/>
             </a:pPr>
             <a:r>
@@ -22215,7 +21813,7 @@
           <a:bodyPr wrap="square" rtlCol="0" anchor="ctr"/>
           <a:lstStyle/>
           <a:p>
-            <a:pPr algn="ctr" indent="0" marL="0">
+            <a:pPr marL="0" indent="0" algn="ctr">
               <a:buNone/>
             </a:pPr>
             <a:r>
@@ -22301,12 +21899,12 @@
           <a:ln/>
         </p:spPr>
         <p:txBody>
-          <a:bodyPr wrap="none" lIns="0" tIns="0" rIns="0" bIns="0" rtlCol="0" anchor="ctr" vert="horz">
+          <a:bodyPr vert="horz" wrap="none" lIns="0" tIns="0" rIns="0" bIns="0" rtlCol="0" anchor="ctr">
             <a:normAutofit/>
           </a:bodyPr>
           <a:lstStyle/>
           <a:p>
-            <a:pPr indent="0" marL="0">
+            <a:pPr marL="0" indent="0">
               <a:buNone/>
             </a:pPr>
             <a:r>
@@ -22345,7 +21943,7 @@
           <a:bodyPr wrap="square" rtlCol="0" anchor="ctr"/>
           <a:lstStyle/>
           <a:p>
-            <a:pPr indent="0" marL="0">
+            <a:pPr marL="0" indent="0">
               <a:buNone/>
             </a:pPr>
             <a:r>
@@ -22384,7 +21982,7 @@
           <a:bodyPr wrap="square" rtlCol="0" anchor="t"/>
           <a:lstStyle/>
           <a:p>
-            <a:pPr indent="0" marL="0">
+            <a:pPr marL="0" indent="0">
               <a:lnSpc>
                 <a:spcPts val="140"/>
               </a:lnSpc>
@@ -22474,7 +22072,7 @@
           <a:bodyPr wrap="square" rtlCol="0" anchor="ctr"/>
           <a:lstStyle/>
           <a:p>
-            <a:pPr algn="ctr" indent="0" marL="0">
+            <a:pPr marL="0" indent="0" algn="ctr">
               <a:buNone/>
             </a:pPr>
             <a:r>
@@ -22538,7 +22136,7 @@
           <a:bodyPr wrap="square" rtlCol="0" anchor="ctr"/>
           <a:lstStyle/>
           <a:p>
-            <a:pPr algn="ctr" indent="0" marL="0">
+            <a:pPr marL="0" indent="0" algn="ctr">
               <a:buNone/>
             </a:pPr>
             <a:r>
@@ -22602,7 +22200,7 @@
           <a:bodyPr wrap="square" rtlCol="0" anchor="ctr"/>
           <a:lstStyle/>
           <a:p>
-            <a:pPr algn="ctr" indent="0" marL="0">
+            <a:pPr marL="0" indent="0" algn="ctr">
               <a:buNone/>
             </a:pPr>
             <a:r>
@@ -22688,12 +22286,12 @@
           <a:ln/>
         </p:spPr>
         <p:txBody>
-          <a:bodyPr wrap="none" lIns="0" tIns="0" rIns="0" bIns="0" rtlCol="0" anchor="ctr" vert="horz">
+          <a:bodyPr vert="horz" wrap="none" lIns="0" tIns="0" rIns="0" bIns="0" rtlCol="0" anchor="ctr">
             <a:normAutofit/>
           </a:bodyPr>
           <a:lstStyle/>
           <a:p>
-            <a:pPr indent="0" marL="0">
+            <a:pPr marL="0" indent="0">
               <a:buNone/>
             </a:pPr>
             <a:r>
@@ -22732,7 +22330,7 @@
           <a:bodyPr wrap="square" rtlCol="0" anchor="ctr"/>
           <a:lstStyle/>
           <a:p>
-            <a:pPr indent="0" marL="0">
+            <a:pPr marL="0" indent="0">
               <a:buNone/>
             </a:pPr>
             <a:r>
@@ -22771,7 +22369,7 @@
           <a:bodyPr wrap="square" rtlCol="0" anchor="t"/>
           <a:lstStyle/>
           <a:p>
-            <a:pPr indent="0" marL="0">
+            <a:pPr marL="0" indent="0">
               <a:lnSpc>
                 <a:spcPts val="140"/>
               </a:lnSpc>
@@ -22861,7 +22459,7 @@
           <a:bodyPr wrap="square" rtlCol="0" anchor="ctr"/>
           <a:lstStyle/>
           <a:p>
-            <a:pPr algn="ctr" indent="0" marL="0">
+            <a:pPr marL="0" indent="0" algn="ctr">
               <a:buNone/>
             </a:pPr>
             <a:r>
@@ -22925,7 +22523,7 @@
           <a:bodyPr wrap="square" rtlCol="0" anchor="ctr"/>
           <a:lstStyle/>
           <a:p>
-            <a:pPr algn="ctr" indent="0" marL="0">
+            <a:pPr marL="0" indent="0" algn="ctr">
               <a:buNone/>
             </a:pPr>
             <a:r>
@@ -22989,7 +22587,7 @@
           <a:bodyPr wrap="square" rtlCol="0" anchor="ctr"/>
           <a:lstStyle/>
           <a:p>
-            <a:pPr algn="ctr" indent="0" marL="0">
+            <a:pPr marL="0" indent="0" algn="ctr">
               <a:buNone/>
             </a:pPr>
             <a:r>
@@ -23051,7 +22649,7 @@
           <a:bodyPr wrap="square" rtlCol="0" anchor="ctr"/>
           <a:lstStyle/>
           <a:p>
-            <a:pPr indent="0" marL="0">
+            <a:pPr marL="0" indent="0">
               <a:buNone/>
             </a:pPr>
             <a:r>
@@ -23090,7 +22688,7 @@
           <a:bodyPr wrap="square" rtlCol="0" anchor="ctr"/>
           <a:lstStyle/>
           <a:p>
-            <a:pPr algn="r" indent="0" marL="0">
+            <a:pPr marL="0" indent="0" algn="r">
               <a:buNone/>
             </a:pPr>
             <a:r>
@@ -23154,11 +22752,11 @@
           <a:bodyPr wrap="square" rtlCol="0" anchor="ctr"/>
           <a:lstStyle/>
           <a:p>
-            <a:pPr indent="0" marL="0">
-              <a:buNone/>
-            </a:pPr>
-            <a:r>
-              <a:rPr lang="en-US" sz="1100" spc="200" kern="0" dirty="0">
+            <a:pPr marL="0" indent="0">
+              <a:buNone/>
+            </a:pPr>
+            <a:r>
+              <a:rPr lang="en-US" sz="1100" kern="0" spc="200" dirty="0">
                 <a:solidFill>
                   <a:srgbClr val="5A6070"/>
                 </a:solidFill>
@@ -23218,7 +22816,7 @@
           <a:bodyPr wrap="square" rtlCol="0" anchor="ctr"/>
           <a:lstStyle/>
           <a:p>
-            <a:pPr indent="0" marL="0">
+            <a:pPr marL="0" indent="0">
               <a:buNone/>
             </a:pPr>
             <a:r>
@@ -23355,7 +22953,7 @@
           <a:bodyPr wrap="square" rtlCol="0" anchor="ctr"/>
           <a:lstStyle/>
           <a:p>
-            <a:pPr algn="ctr" indent="0" marL="0">
+            <a:pPr marL="0" indent="0" algn="ctr">
               <a:buNone/>
             </a:pPr>
             <a:r>
@@ -23394,7 +22992,7 @@
           <a:bodyPr wrap="square" rtlCol="0" anchor="ctr"/>
           <a:lstStyle/>
           <a:p>
-            <a:pPr algn="ctr" indent="0" marL="0">
+            <a:pPr marL="0" indent="0" algn="ctr">
               <a:buNone/>
             </a:pPr>
             <a:r>
@@ -23433,7 +23031,7 @@
           <a:bodyPr wrap="square" rtlCol="0" anchor="ctr"/>
           <a:lstStyle/>
           <a:p>
-            <a:pPr algn="ctr" indent="0" marL="0">
+            <a:pPr marL="0" indent="0" algn="ctr">
               <a:buNone/>
             </a:pPr>
             <a:r>
@@ -23472,7 +23070,7 @@
           <a:bodyPr wrap="square" rtlCol="0" anchor="t"/>
           <a:lstStyle/>
           <a:p>
-            <a:pPr algn="ctr" indent="0" marL="0">
+            <a:pPr marL="0" indent="0" algn="ctr">
               <a:buNone/>
             </a:pPr>
             <a:r>
@@ -23586,7 +23184,7 @@
           <a:bodyPr wrap="square" rtlCol="0" anchor="ctr"/>
           <a:lstStyle/>
           <a:p>
-            <a:pPr algn="ctr" indent="0" marL="0">
+            <a:pPr marL="0" indent="0" algn="ctr">
               <a:buNone/>
             </a:pPr>
             <a:r>
@@ -23625,7 +23223,7 @@
           <a:bodyPr wrap="square" rtlCol="0" anchor="ctr"/>
           <a:lstStyle/>
           <a:p>
-            <a:pPr algn="ctr" indent="0" marL="0">
+            <a:pPr marL="0" indent="0" algn="ctr">
               <a:buNone/>
             </a:pPr>
             <a:r>
@@ -23664,7 +23262,7 @@
           <a:bodyPr wrap="square" rtlCol="0" anchor="ctr"/>
           <a:lstStyle/>
           <a:p>
-            <a:pPr algn="ctr" indent="0" marL="0">
+            <a:pPr marL="0" indent="0" algn="ctr">
               <a:buNone/>
             </a:pPr>
             <a:r>
@@ -23703,7 +23301,7 @@
           <a:bodyPr wrap="square" rtlCol="0" anchor="t"/>
           <a:lstStyle/>
           <a:p>
-            <a:pPr algn="ctr" indent="0" marL="0">
+            <a:pPr marL="0" indent="0" algn="ctr">
               <a:buNone/>
             </a:pPr>
             <a:r>
@@ -23817,7 +23415,7 @@
           <a:bodyPr wrap="square" rtlCol="0" anchor="ctr"/>
           <a:lstStyle/>
           <a:p>
-            <a:pPr algn="ctr" indent="0" marL="0">
+            <a:pPr marL="0" indent="0" algn="ctr">
               <a:buNone/>
             </a:pPr>
             <a:r>
@@ -23856,7 +23454,7 @@
           <a:bodyPr wrap="square" rtlCol="0" anchor="ctr"/>
           <a:lstStyle/>
           <a:p>
-            <a:pPr algn="ctr" indent="0" marL="0">
+            <a:pPr marL="0" indent="0" algn="ctr">
               <a:buNone/>
             </a:pPr>
             <a:r>
@@ -23895,7 +23493,7 @@
           <a:bodyPr wrap="square" rtlCol="0" anchor="ctr"/>
           <a:lstStyle/>
           <a:p>
-            <a:pPr algn="ctr" indent="0" marL="0">
+            <a:pPr marL="0" indent="0" algn="ctr">
               <a:buNone/>
             </a:pPr>
             <a:r>
@@ -23934,7 +23532,7 @@
           <a:bodyPr wrap="square" rtlCol="0" anchor="t"/>
           <a:lstStyle/>
           <a:p>
-            <a:pPr algn="ctr" indent="0" marL="0">
+            <a:pPr marL="0" indent="0" algn="ctr">
               <a:buNone/>
             </a:pPr>
             <a:r>
@@ -24048,7 +23646,7 @@
           <a:bodyPr wrap="square" rtlCol="0" anchor="ctr"/>
           <a:lstStyle/>
           <a:p>
-            <a:pPr algn="ctr" indent="0" marL="0">
+            <a:pPr marL="0" indent="0" algn="ctr">
               <a:buNone/>
             </a:pPr>
             <a:r>
@@ -24087,7 +23685,7 @@
           <a:bodyPr wrap="square" rtlCol="0" anchor="ctr"/>
           <a:lstStyle/>
           <a:p>
-            <a:pPr algn="ctr" indent="0" marL="0">
+            <a:pPr marL="0" indent="0" algn="ctr">
               <a:buNone/>
             </a:pPr>
             <a:r>
@@ -24126,7 +23724,7 @@
           <a:bodyPr wrap="square" rtlCol="0" anchor="ctr"/>
           <a:lstStyle/>
           <a:p>
-            <a:pPr algn="ctr" indent="0" marL="0">
+            <a:pPr marL="0" indent="0" algn="ctr">
               <a:buNone/>
             </a:pPr>
             <a:r>
@@ -24165,7 +23763,7 @@
           <a:bodyPr wrap="square" rtlCol="0" anchor="t"/>
           <a:lstStyle/>
           <a:p>
-            <a:pPr algn="ctr" indent="0" marL="0">
+            <a:pPr marL="0" indent="0" algn="ctr">
               <a:buNone/>
             </a:pPr>
             <a:r>
@@ -24204,7 +23802,7 @@
           <a:bodyPr wrap="square" rtlCol="0" anchor="ctr"/>
           <a:lstStyle/>
           <a:p>
-            <a:pPr indent="0" marL="0">
+            <a:pPr marL="0" indent="0">
               <a:buNone/>
             </a:pPr>
             <a:r>
@@ -24240,16 +23838,16 @@
           <a:ln/>
         </p:spPr>
         <p:txBody>
-          <a:bodyPr wrap="none" lIns="0" tIns="0" rIns="0" bIns="0" rtlCol="0" anchor="ctr" vert="horz">
+          <a:bodyPr vert="horz" wrap="none" lIns="0" tIns="0" rIns="0" bIns="0" rtlCol="0" anchor="ctr">
             <a:normAutofit/>
           </a:bodyPr>
           <a:lstStyle/>
           <a:p>
-            <a:pPr indent="0" marL="0">
-              <a:buNone/>
-            </a:pPr>
-            <a:r>
-              <a:rPr lang="en-US" sz="900" b="1" spc="100" kern="0" dirty="0">
+            <a:pPr marL="0" indent="0">
+              <a:buNone/>
+            </a:pPr>
+            <a:r>
+              <a:rPr lang="en-US" sz="900" b="1" kern="0" spc="100" dirty="0">
                 <a:solidFill>
                   <a:srgbClr val="1E5AA8"/>
                 </a:solidFill>
@@ -24309,7 +23907,7 @@
           <a:bodyPr wrap="square" rtlCol="0" anchor="ctr"/>
           <a:lstStyle/>
           <a:p>
-            <a:pPr algn="ctr" indent="0" marL="0">
+            <a:pPr marL="0" indent="0" algn="ctr">
               <a:buNone/>
             </a:pPr>
             <a:r>
@@ -24348,7 +23946,7 @@
           <a:bodyPr wrap="square" rtlCol="0" anchor="t"/>
           <a:lstStyle/>
           <a:p>
-            <a:pPr algn="ctr" indent="0" marL="0">
+            <a:pPr marL="0" indent="0" algn="ctr">
               <a:buNone/>
             </a:pPr>
             <a:r>
@@ -24432,16 +24030,16 @@
           <a:ln/>
         </p:spPr>
         <p:txBody>
-          <a:bodyPr wrap="none" lIns="0" tIns="0" rIns="0" bIns="0" rtlCol="0" anchor="ctr" vert="horz">
+          <a:bodyPr vert="horz" wrap="none" lIns="0" tIns="0" rIns="0" bIns="0" rtlCol="0" anchor="ctr">
             <a:normAutofit/>
           </a:bodyPr>
           <a:lstStyle/>
           <a:p>
-            <a:pPr indent="0" marL="0">
-              <a:buNone/>
-            </a:pPr>
-            <a:r>
-              <a:rPr lang="en-US" sz="900" b="1" spc="100" kern="0" dirty="0">
+            <a:pPr marL="0" indent="0">
+              <a:buNone/>
+            </a:pPr>
+            <a:r>
+              <a:rPr lang="en-US" sz="900" b="1" kern="0" spc="100" dirty="0">
                 <a:solidFill>
                   <a:srgbClr val="1E5AA8"/>
                 </a:solidFill>
@@ -24501,7 +24099,7 @@
           <a:bodyPr wrap="square" rtlCol="0" anchor="ctr"/>
           <a:lstStyle/>
           <a:p>
-            <a:pPr algn="ctr" indent="0" marL="0">
+            <a:pPr marL="0" indent="0" algn="ctr">
               <a:buNone/>
             </a:pPr>
             <a:r>
@@ -24540,7 +24138,7 @@
           <a:bodyPr wrap="square" rtlCol="0" anchor="t"/>
           <a:lstStyle/>
           <a:p>
-            <a:pPr algn="ctr" indent="0" marL="0">
+            <a:pPr marL="0" indent="0" algn="ctr">
               <a:buNone/>
             </a:pPr>
             <a:r>
@@ -24624,16 +24222,16 @@
           <a:ln/>
         </p:spPr>
         <p:txBody>
-          <a:bodyPr wrap="none" lIns="0" tIns="0" rIns="0" bIns="0" rtlCol="0" anchor="ctr" vert="horz">
+          <a:bodyPr vert="horz" wrap="none" lIns="0" tIns="0" rIns="0" bIns="0" rtlCol="0" anchor="ctr">
             <a:normAutofit/>
           </a:bodyPr>
           <a:lstStyle/>
           <a:p>
-            <a:pPr indent="0" marL="0">
-              <a:buNone/>
-            </a:pPr>
-            <a:r>
-              <a:rPr lang="en-US" sz="900" b="1" spc="100" kern="0" dirty="0">
+            <a:pPr marL="0" indent="0">
+              <a:buNone/>
+            </a:pPr>
+            <a:r>
+              <a:rPr lang="en-US" sz="900" b="1" kern="0" spc="100" dirty="0">
                 <a:solidFill>
                   <a:srgbClr val="1E5AA8"/>
                 </a:solidFill>
@@ -24693,7 +24291,7 @@
           <a:bodyPr wrap="square" rtlCol="0" anchor="ctr"/>
           <a:lstStyle/>
           <a:p>
-            <a:pPr algn="ctr" indent="0" marL="0">
+            <a:pPr marL="0" indent="0" algn="ctr">
               <a:buNone/>
             </a:pPr>
             <a:r>
@@ -24732,7 +24330,7 @@
           <a:bodyPr wrap="square" rtlCol="0" anchor="t"/>
           <a:lstStyle/>
           <a:p>
-            <a:pPr algn="ctr" indent="0" marL="0">
+            <a:pPr marL="0" indent="0" algn="ctr">
               <a:buNone/>
             </a:pPr>
             <a:r>
@@ -24816,16 +24414,16 @@
           <a:ln/>
         </p:spPr>
         <p:txBody>
-          <a:bodyPr wrap="none" lIns="0" tIns="0" rIns="0" bIns="0" rtlCol="0" anchor="ctr" vert="horz">
+          <a:bodyPr vert="horz" wrap="none" lIns="0" tIns="0" rIns="0" bIns="0" rtlCol="0" anchor="ctr">
             <a:normAutofit/>
           </a:bodyPr>
           <a:lstStyle/>
           <a:p>
-            <a:pPr indent="0" marL="0">
-              <a:buNone/>
-            </a:pPr>
-            <a:r>
-              <a:rPr lang="en-US" sz="900" b="1" spc="100" kern="0" dirty="0">
+            <a:pPr marL="0" indent="0">
+              <a:buNone/>
+            </a:pPr>
+            <a:r>
+              <a:rPr lang="en-US" sz="900" b="1" kern="0" spc="100" dirty="0">
                 <a:solidFill>
                   <a:srgbClr val="1E5AA8"/>
                 </a:solidFill>
@@ -24885,7 +24483,7 @@
           <a:bodyPr wrap="square" rtlCol="0" anchor="ctr"/>
           <a:lstStyle/>
           <a:p>
-            <a:pPr algn="ctr" indent="0" marL="0">
+            <a:pPr marL="0" indent="0" algn="ctr">
               <a:buNone/>
             </a:pPr>
             <a:r>
@@ -24924,7 +24522,7 @@
           <a:bodyPr wrap="square" rtlCol="0" anchor="t"/>
           <a:lstStyle/>
           <a:p>
-            <a:pPr algn="ctr" indent="0" marL="0">
+            <a:pPr marL="0" indent="0" algn="ctr">
               <a:buNone/>
             </a:pPr>
             <a:r>
@@ -24985,12 +24583,12 @@
           <a:ln/>
         </p:spPr>
         <p:txBody>
-          <a:bodyPr wrap="none" lIns="0" tIns="0" rIns="0" bIns="0" rtlCol="0" anchor="ctr" vert="horz">
+          <a:bodyPr vert="horz" wrap="none" lIns="0" tIns="0" rIns="0" bIns="0" rtlCol="0" anchor="ctr">
             <a:normAutofit/>
           </a:bodyPr>
           <a:lstStyle/>
           <a:p>
-            <a:pPr algn="ctr" indent="0" marL="0">
+            <a:pPr marL="0" indent="0" algn="ctr">
               <a:buNone/>
             </a:pPr>
             <a:r>
@@ -25029,7 +24627,7 @@
           <a:bodyPr wrap="square" rtlCol="0" anchor="ctr"/>
           <a:lstStyle/>
           <a:p>
-            <a:pPr algn="ctr" indent="0" marL="0">
+            <a:pPr marL="0" indent="0" algn="ctr">
               <a:buNone/>
             </a:pPr>
             <a:r>
@@ -25065,12 +24663,12 @@
           <a:ln/>
         </p:spPr>
         <p:txBody>
-          <a:bodyPr wrap="none" lIns="0" tIns="0" rIns="0" bIns="0" rtlCol="0" anchor="ctr" vert="horz">
+          <a:bodyPr vert="horz" wrap="none" lIns="0" tIns="0" rIns="0" bIns="0" rtlCol="0" anchor="ctr">
             <a:normAutofit/>
           </a:bodyPr>
           <a:lstStyle/>
           <a:p>
-            <a:pPr algn="ctr" indent="0" marL="0">
+            <a:pPr marL="0" indent="0" algn="ctr">
               <a:buNone/>
             </a:pPr>
             <a:r>
@@ -25109,7 +24707,7 @@
           <a:bodyPr wrap="square" rtlCol="0" anchor="ctr"/>
           <a:lstStyle/>
           <a:p>
-            <a:pPr algn="ctr" indent="0" marL="0">
+            <a:pPr marL="0" indent="0" algn="ctr">
               <a:buNone/>
             </a:pPr>
             <a:r>
@@ -25145,12 +24743,12 @@
           <a:ln/>
         </p:spPr>
         <p:txBody>
-          <a:bodyPr wrap="none" lIns="0" tIns="0" rIns="0" bIns="0" rtlCol="0" anchor="ctr" vert="horz">
+          <a:bodyPr vert="horz" wrap="none" lIns="0" tIns="0" rIns="0" bIns="0" rtlCol="0" anchor="ctr">
             <a:normAutofit/>
           </a:bodyPr>
           <a:lstStyle/>
           <a:p>
-            <a:pPr algn="ctr" indent="0" marL="0">
+            <a:pPr marL="0" indent="0" algn="ctr">
               <a:buNone/>
             </a:pPr>
             <a:r>
@@ -25189,7 +24787,7 @@
           <a:bodyPr wrap="square" rtlCol="0" anchor="ctr"/>
           <a:lstStyle/>
           <a:p>
-            <a:pPr algn="ctr" indent="0" marL="0">
+            <a:pPr marL="0" indent="0" algn="ctr">
               <a:buNone/>
             </a:pPr>
             <a:r>
@@ -25225,12 +24823,12 @@
           <a:ln/>
         </p:spPr>
         <p:txBody>
-          <a:bodyPr wrap="none" lIns="0" tIns="0" rIns="0" bIns="0" rtlCol="0" anchor="ctr" vert="horz">
+          <a:bodyPr vert="horz" wrap="none" lIns="0" tIns="0" rIns="0" bIns="0" rtlCol="0" anchor="ctr">
             <a:normAutofit/>
           </a:bodyPr>
           <a:lstStyle/>
           <a:p>
-            <a:pPr algn="ctr" indent="0" marL="0">
+            <a:pPr marL="0" indent="0" algn="ctr">
               <a:buNone/>
             </a:pPr>
             <a:r>
@@ -25269,7 +24867,7 @@
           <a:bodyPr wrap="square" rtlCol="0" anchor="ctr"/>
           <a:lstStyle/>
           <a:p>
-            <a:pPr algn="ctr" indent="0" marL="0">
+            <a:pPr marL="0" indent="0" algn="ctr">
               <a:buNone/>
             </a:pPr>
             <a:r>
@@ -25331,7 +24929,7 @@
           <a:bodyPr wrap="square" rtlCol="0" anchor="ctr"/>
           <a:lstStyle/>
           <a:p>
-            <a:pPr indent="0" marL="0">
+            <a:pPr marL="0" indent="0">
               <a:buNone/>
             </a:pPr>
             <a:r>
@@ -25370,7 +24968,7 @@
           <a:bodyPr wrap="square" rtlCol="0" anchor="ctr"/>
           <a:lstStyle/>
           <a:p>
-            <a:pPr algn="r" indent="0" marL="0">
+            <a:pPr marL="0" indent="0" algn="r">
               <a:buNone/>
             </a:pPr>
             <a:r>
@@ -25434,11 +25032,11 @@
           <a:bodyPr wrap="square" rtlCol="0" anchor="ctr"/>
           <a:lstStyle/>
           <a:p>
-            <a:pPr indent="0" marL="0">
-              <a:buNone/>
-            </a:pPr>
-            <a:r>
-              <a:rPr lang="en-US" sz="1100" spc="200" kern="0" dirty="0">
+            <a:pPr marL="0" indent="0">
+              <a:buNone/>
+            </a:pPr>
+            <a:r>
+              <a:rPr lang="en-US" sz="1100" kern="0" spc="200" dirty="0">
                 <a:solidFill>
                   <a:srgbClr val="5A6070"/>
                 </a:solidFill>
@@ -25498,7 +25096,7 @@
           <a:bodyPr wrap="square" rtlCol="0" anchor="ctr"/>
           <a:lstStyle/>
           <a:p>
-            <a:pPr indent="0" marL="0">
+            <a:pPr marL="0" indent="0">
               <a:buNone/>
             </a:pPr>
             <a:r>
@@ -25560,7 +25158,7 @@
           <a:bodyPr wrap="square" rtlCol="0" anchor="ctr"/>
           <a:lstStyle/>
           <a:p>
-            <a:pPr indent="0" marL="0">
+            <a:pPr marL="0" indent="0">
               <a:buNone/>
             </a:pPr>
             <a:r>
@@ -25621,12 +25219,12 @@
           <a:ln/>
         </p:spPr>
         <p:txBody>
-          <a:bodyPr wrap="none" lIns="0" tIns="0" rIns="0" bIns="0" rtlCol="0" anchor="ctr" vert="horz">
+          <a:bodyPr vert="horz" wrap="none" lIns="0" tIns="0" rIns="0" bIns="0" rtlCol="0" anchor="ctr">
             <a:normAutofit/>
           </a:bodyPr>
           <a:lstStyle/>
           <a:p>
-            <a:pPr algn="ctr" indent="0" marL="0">
+            <a:pPr marL="0" indent="0" algn="ctr">
               <a:buNone/>
             </a:pPr>
             <a:r>
@@ -25665,7 +25263,7 @@
           <a:bodyPr wrap="square" rtlCol="0" anchor="ctr"/>
           <a:lstStyle/>
           <a:p>
-            <a:pPr indent="0" marL="0">
+            <a:pPr marL="0" indent="0">
               <a:buNone/>
             </a:pPr>
             <a:r>
@@ -25704,7 +25302,7 @@
           <a:bodyPr wrap="square" rtlCol="0" anchor="t"/>
           <a:lstStyle/>
           <a:p>
-            <a:pPr indent="0" marL="0">
+            <a:pPr marL="0" indent="0">
               <a:buNone/>
             </a:pPr>
             <a:r>
@@ -25788,12 +25386,12 @@
           <a:ln/>
         </p:spPr>
         <p:txBody>
-          <a:bodyPr wrap="none" lIns="0" tIns="0" rIns="0" bIns="0" rtlCol="0" anchor="ctr" vert="horz">
+          <a:bodyPr vert="horz" wrap="none" lIns="0" tIns="0" rIns="0" bIns="0" rtlCol="0" anchor="ctr">
             <a:normAutofit/>
           </a:bodyPr>
           <a:lstStyle/>
           <a:p>
-            <a:pPr algn="ctr" indent="0" marL="0">
+            <a:pPr marL="0" indent="0" algn="ctr">
               <a:buNone/>
             </a:pPr>
             <a:r>
@@ -25832,7 +25430,7 @@
           <a:bodyPr wrap="square" rtlCol="0" anchor="ctr"/>
           <a:lstStyle/>
           <a:p>
-            <a:pPr indent="0" marL="0">
+            <a:pPr marL="0" indent="0">
               <a:buNone/>
             </a:pPr>
             <a:r>
@@ -25871,7 +25469,7 @@
           <a:bodyPr wrap="square" rtlCol="0" anchor="t"/>
           <a:lstStyle/>
           <a:p>
-            <a:pPr indent="0" marL="0">
+            <a:pPr marL="0" indent="0">
               <a:buNone/>
             </a:pPr>
             <a:r>
@@ -25955,12 +25553,12 @@
           <a:ln/>
         </p:spPr>
         <p:txBody>
-          <a:bodyPr wrap="none" lIns="0" tIns="0" rIns="0" bIns="0" rtlCol="0" anchor="ctr" vert="horz">
+          <a:bodyPr vert="horz" wrap="none" lIns="0" tIns="0" rIns="0" bIns="0" rtlCol="0" anchor="ctr">
             <a:normAutofit/>
           </a:bodyPr>
           <a:lstStyle/>
           <a:p>
-            <a:pPr algn="ctr" indent="0" marL="0">
+            <a:pPr marL="0" indent="0" algn="ctr">
               <a:buNone/>
             </a:pPr>
             <a:r>
@@ -25999,7 +25597,7 @@
           <a:bodyPr wrap="square" rtlCol="0" anchor="ctr"/>
           <a:lstStyle/>
           <a:p>
-            <a:pPr indent="0" marL="0">
+            <a:pPr marL="0" indent="0">
               <a:buNone/>
             </a:pPr>
             <a:r>
@@ -26038,7 +25636,7 @@
           <a:bodyPr wrap="square" rtlCol="0" anchor="t"/>
           <a:lstStyle/>
           <a:p>
-            <a:pPr indent="0" marL="0">
+            <a:pPr marL="0" indent="0">
               <a:buNone/>
             </a:pPr>
             <a:r>
@@ -26122,12 +25720,12 @@
           <a:ln/>
         </p:spPr>
         <p:txBody>
-          <a:bodyPr wrap="none" lIns="0" tIns="0" rIns="0" bIns="0" rtlCol="0" anchor="ctr" vert="horz">
+          <a:bodyPr vert="horz" wrap="none" lIns="0" tIns="0" rIns="0" bIns="0" rtlCol="0" anchor="ctr">
             <a:normAutofit/>
           </a:bodyPr>
           <a:lstStyle/>
           <a:p>
-            <a:pPr algn="ctr" indent="0" marL="0">
+            <a:pPr marL="0" indent="0" algn="ctr">
               <a:buNone/>
             </a:pPr>
             <a:r>
@@ -26166,7 +25764,7 @@
           <a:bodyPr wrap="square" rtlCol="0" anchor="ctr"/>
           <a:lstStyle/>
           <a:p>
-            <a:pPr indent="0" marL="0">
+            <a:pPr marL="0" indent="0">
               <a:buNone/>
             </a:pPr>
             <a:r>
@@ -26205,7 +25803,7 @@
           <a:bodyPr wrap="square" rtlCol="0" anchor="t"/>
           <a:lstStyle/>
           <a:p>
-            <a:pPr indent="0" marL="0">
+            <a:pPr marL="0" indent="0">
               <a:buNone/>
             </a:pPr>
             <a:r>
@@ -26289,12 +25887,12 @@
           <a:ln/>
         </p:spPr>
         <p:txBody>
-          <a:bodyPr wrap="none" lIns="0" tIns="0" rIns="0" bIns="0" rtlCol="0" anchor="ctr" vert="horz">
+          <a:bodyPr vert="horz" wrap="none" lIns="0" tIns="0" rIns="0" bIns="0" rtlCol="0" anchor="ctr">
             <a:normAutofit/>
           </a:bodyPr>
           <a:lstStyle/>
           <a:p>
-            <a:pPr algn="ctr" indent="0" marL="0">
+            <a:pPr marL="0" indent="0" algn="ctr">
               <a:buNone/>
             </a:pPr>
             <a:r>
@@ -26333,7 +25931,7 @@
           <a:bodyPr wrap="square" rtlCol="0" anchor="ctr"/>
           <a:lstStyle/>
           <a:p>
-            <a:pPr indent="0" marL="0">
+            <a:pPr marL="0" indent="0">
               <a:buNone/>
             </a:pPr>
             <a:r>
@@ -26372,7 +25970,7 @@
           <a:bodyPr wrap="square" rtlCol="0" anchor="t"/>
           <a:lstStyle/>
           <a:p>
-            <a:pPr indent="0" marL="0">
+            <a:pPr marL="0" indent="0">
               <a:buNone/>
             </a:pPr>
             <a:r>
@@ -26411,7 +26009,7 @@
           <a:bodyPr wrap="square" rtlCol="0" anchor="ctr"/>
           <a:lstStyle/>
           <a:p>
-            <a:pPr indent="0" marL="0">
+            <a:pPr marL="0" indent="0">
               <a:buNone/>
             </a:pPr>
             <a:r>
@@ -26500,7 +26098,7 @@
           <a:bodyPr wrap="square" rtlCol="0" anchor="ctr"/>
           <a:lstStyle/>
           <a:p>
-            <a:pPr algn="ctr" indent="0" marL="0">
+            <a:pPr marL="0" indent="0" algn="ctr">
               <a:buNone/>
             </a:pPr>
             <a:r>
@@ -26539,7 +26137,7 @@
           <a:bodyPr wrap="square" rtlCol="0" anchor="ctr"/>
           <a:lstStyle/>
           <a:p>
-            <a:pPr indent="0" marL="0">
+            <a:pPr marL="0" indent="0">
               <a:buNone/>
             </a:pPr>
             <a:r>
@@ -26578,7 +26176,7 @@
           <a:bodyPr wrap="square" rtlCol="0" anchor="ctr"/>
           <a:lstStyle/>
           <a:p>
-            <a:pPr indent="0" marL="0">
+            <a:pPr marL="0" indent="0">
               <a:buNone/>
             </a:pPr>
             <a:r>
@@ -26667,7 +26265,7 @@
           <a:bodyPr wrap="square" rtlCol="0" anchor="ctr"/>
           <a:lstStyle/>
           <a:p>
-            <a:pPr algn="ctr" indent="0" marL="0">
+            <a:pPr marL="0" indent="0" algn="ctr">
               <a:buNone/>
             </a:pPr>
             <a:r>
@@ -26706,7 +26304,7 @@
           <a:bodyPr wrap="square" rtlCol="0" anchor="ctr"/>
           <a:lstStyle/>
           <a:p>
-            <a:pPr indent="0" marL="0">
+            <a:pPr marL="0" indent="0">
               <a:buNone/>
             </a:pPr>
             <a:r>
@@ -26745,7 +26343,7 @@
           <a:bodyPr wrap="square" rtlCol="0" anchor="ctr"/>
           <a:lstStyle/>
           <a:p>
-            <a:pPr indent="0" marL="0">
+            <a:pPr marL="0" indent="0">
               <a:buNone/>
             </a:pPr>
             <a:r>
@@ -26834,7 +26432,7 @@
           <a:bodyPr wrap="square" rtlCol="0" anchor="ctr"/>
           <a:lstStyle/>
           <a:p>
-            <a:pPr algn="ctr" indent="0" marL="0">
+            <a:pPr marL="0" indent="0" algn="ctr">
               <a:buNone/>
             </a:pPr>
             <a:r>
@@ -26873,7 +26471,7 @@
           <a:bodyPr wrap="square" rtlCol="0" anchor="ctr"/>
           <a:lstStyle/>
           <a:p>
-            <a:pPr indent="0" marL="0">
+            <a:pPr marL="0" indent="0">
               <a:buNone/>
             </a:pPr>
             <a:r>
@@ -26912,7 +26510,7 @@
           <a:bodyPr wrap="square" rtlCol="0" anchor="ctr"/>
           <a:lstStyle/>
           <a:p>
-            <a:pPr indent="0" marL="0">
+            <a:pPr marL="0" indent="0">
               <a:buNone/>
             </a:pPr>
             <a:r>
@@ -27001,7 +26599,7 @@
           <a:bodyPr wrap="square" rtlCol="0" anchor="ctr"/>
           <a:lstStyle/>
           <a:p>
-            <a:pPr algn="ctr" indent="0" marL="0">
+            <a:pPr marL="0" indent="0" algn="ctr">
               <a:buNone/>
             </a:pPr>
             <a:r>
@@ -27040,7 +26638,7 @@
           <a:bodyPr wrap="square" rtlCol="0" anchor="ctr"/>
           <a:lstStyle/>
           <a:p>
-            <a:pPr indent="0" marL="0">
+            <a:pPr marL="0" indent="0">
               <a:buNone/>
             </a:pPr>
             <a:r>
@@ -27079,7 +26677,7 @@
           <a:bodyPr wrap="square" rtlCol="0" anchor="ctr"/>
           <a:lstStyle/>
           <a:p>
-            <a:pPr indent="0" marL="0">
+            <a:pPr marL="0" indent="0">
               <a:buNone/>
             </a:pPr>
             <a:r>
@@ -27168,7 +26766,7 @@
           <a:bodyPr wrap="square" rtlCol="0" anchor="ctr"/>
           <a:lstStyle/>
           <a:p>
-            <a:pPr algn="ctr" indent="0" marL="0">
+            <a:pPr marL="0" indent="0" algn="ctr">
               <a:buNone/>
             </a:pPr>
             <a:r>
@@ -27207,7 +26805,7 @@
           <a:bodyPr wrap="square" rtlCol="0" anchor="ctr"/>
           <a:lstStyle/>
           <a:p>
-            <a:pPr indent="0" marL="0">
+            <a:pPr marL="0" indent="0">
               <a:buNone/>
             </a:pPr>
             <a:r>
@@ -27246,7 +26844,7 @@
           <a:bodyPr wrap="square" rtlCol="0" anchor="ctr"/>
           <a:lstStyle/>
           <a:p>
-            <a:pPr indent="0" marL="0">
+            <a:pPr marL="0" indent="0">
               <a:buNone/>
             </a:pPr>
             <a:r>
@@ -27335,7 +26933,7 @@
           <a:bodyPr wrap="square" rtlCol="0" anchor="ctr"/>
           <a:lstStyle/>
           <a:p>
-            <a:pPr algn="ctr" indent="0" marL="0">
+            <a:pPr marL="0" indent="0" algn="ctr">
               <a:buNone/>
             </a:pPr>
             <a:r>
@@ -27374,7 +26972,7 @@
           <a:bodyPr wrap="square" rtlCol="0" anchor="ctr"/>
           <a:lstStyle/>
           <a:p>
-            <a:pPr indent="0" marL="0">
+            <a:pPr marL="0" indent="0">
               <a:buNone/>
             </a:pPr>
             <a:r>
@@ -27413,7 +27011,7 @@
           <a:bodyPr wrap="square" rtlCol="0" anchor="ctr"/>
           <a:lstStyle/>
           <a:p>
-            <a:pPr indent="0" marL="0">
+            <a:pPr marL="0" indent="0">
               <a:buNone/>
             </a:pPr>
             <a:r>
@@ -27474,12 +27072,12 @@
           <a:ln/>
         </p:spPr>
         <p:txBody>
-          <a:bodyPr wrap="none" lIns="0" tIns="0" rIns="0" bIns="0" rtlCol="0" anchor="ctr" vert="horz">
+          <a:bodyPr vert="horz" wrap="none" lIns="0" tIns="0" rIns="0" bIns="0" rtlCol="0" anchor="ctr">
             <a:normAutofit/>
           </a:bodyPr>
           <a:lstStyle/>
           <a:p>
-            <a:pPr algn="ctr" indent="0" marL="0">
+            <a:pPr marL="0" indent="0" algn="ctr">
               <a:buNone/>
             </a:pPr>
             <a:r>
@@ -27518,7 +27116,7 @@
           <a:bodyPr wrap="square" rtlCol="0" anchor="ctr"/>
           <a:lstStyle/>
           <a:p>
-            <a:pPr algn="ctr" indent="0" marL="0">
+            <a:pPr marL="0" indent="0" algn="ctr">
               <a:buNone/>
             </a:pPr>
             <a:r>
@@ -27554,12 +27152,12 @@
           <a:ln/>
         </p:spPr>
         <p:txBody>
-          <a:bodyPr wrap="none" lIns="0" tIns="0" rIns="0" bIns="0" rtlCol="0" anchor="ctr" vert="horz">
+          <a:bodyPr vert="horz" wrap="none" lIns="0" tIns="0" rIns="0" bIns="0" rtlCol="0" anchor="ctr">
             <a:normAutofit/>
           </a:bodyPr>
           <a:lstStyle/>
           <a:p>
-            <a:pPr algn="ctr" indent="0" marL="0">
+            <a:pPr marL="0" indent="0" algn="ctr">
               <a:buNone/>
             </a:pPr>
             <a:r>
@@ -27598,7 +27196,7 @@
           <a:bodyPr wrap="square" rtlCol="0" anchor="ctr"/>
           <a:lstStyle/>
           <a:p>
-            <a:pPr algn="ctr" indent="0" marL="0">
+            <a:pPr marL="0" indent="0" algn="ctr">
               <a:buNone/>
             </a:pPr>
             <a:r>
@@ -27634,12 +27232,12 @@
           <a:ln/>
         </p:spPr>
         <p:txBody>
-          <a:bodyPr wrap="none" lIns="0" tIns="0" rIns="0" bIns="0" rtlCol="0" anchor="ctr" vert="horz">
+          <a:bodyPr vert="horz" wrap="none" lIns="0" tIns="0" rIns="0" bIns="0" rtlCol="0" anchor="ctr">
             <a:normAutofit/>
           </a:bodyPr>
           <a:lstStyle/>
           <a:p>
-            <a:pPr algn="ctr" indent="0" marL="0">
+            <a:pPr marL="0" indent="0" algn="ctr">
               <a:buNone/>
             </a:pPr>
             <a:r>
@@ -27678,7 +27276,7 @@
           <a:bodyPr wrap="square" rtlCol="0" anchor="ctr"/>
           <a:lstStyle/>
           <a:p>
-            <a:pPr algn="ctr" indent="0" marL="0">
+            <a:pPr marL="0" indent="0" algn="ctr">
               <a:buNone/>
             </a:pPr>
             <a:r>
@@ -27714,12 +27312,12 @@
           <a:ln/>
         </p:spPr>
         <p:txBody>
-          <a:bodyPr wrap="none" lIns="0" tIns="0" rIns="0" bIns="0" rtlCol="0" anchor="ctr" vert="horz">
+          <a:bodyPr vert="horz" wrap="none" lIns="0" tIns="0" rIns="0" bIns="0" rtlCol="0" anchor="ctr">
             <a:normAutofit/>
           </a:bodyPr>
           <a:lstStyle/>
           <a:p>
-            <a:pPr algn="ctr" indent="0" marL="0">
+            <a:pPr marL="0" indent="0" algn="ctr">
               <a:buNone/>
             </a:pPr>
             <a:r>
@@ -27758,7 +27356,7 @@
           <a:bodyPr wrap="square" rtlCol="0" anchor="ctr"/>
           <a:lstStyle/>
           <a:p>
-            <a:pPr algn="ctr" indent="0" marL="0">
+            <a:pPr marL="0" indent="0" algn="ctr">
               <a:buNone/>
             </a:pPr>
             <a:r>
@@ -27820,7 +27418,7 @@
           <a:bodyPr wrap="square" rtlCol="0" anchor="ctr"/>
           <a:lstStyle/>
           <a:p>
-            <a:pPr indent="0" marL="0">
+            <a:pPr marL="0" indent="0">
               <a:buNone/>
             </a:pPr>
             <a:r>
@@ -27859,7 +27457,7 @@
           <a:bodyPr wrap="square" rtlCol="0" anchor="ctr"/>
           <a:lstStyle/>
           <a:p>
-            <a:pPr algn="r" indent="0" marL="0">
+            <a:pPr marL="0" indent="0" algn="r">
               <a:buNone/>
             </a:pPr>
             <a:r>
@@ -27923,11 +27521,11 @@
           <a:bodyPr wrap="square" rtlCol="0" anchor="ctr"/>
           <a:lstStyle/>
           <a:p>
-            <a:pPr indent="0" marL="0">
-              <a:buNone/>
-            </a:pPr>
-            <a:r>
-              <a:rPr lang="en-US" sz="1100" spc="200" kern="0" dirty="0">
+            <a:pPr marL="0" indent="0">
+              <a:buNone/>
+            </a:pPr>
+            <a:r>
+              <a:rPr lang="en-US" sz="1100" kern="0" spc="200" dirty="0">
                 <a:solidFill>
                   <a:srgbClr val="5A6070"/>
                 </a:solidFill>
@@ -27987,7 +27585,7 @@
           <a:bodyPr wrap="square" rtlCol="0" anchor="ctr"/>
           <a:lstStyle/>
           <a:p>
-            <a:pPr indent="0" marL="0">
+            <a:pPr marL="0" indent="0">
               <a:buNone/>
             </a:pPr>
             <a:r>
@@ -28049,7 +27647,7 @@
           <a:bodyPr wrap="square" rtlCol="0" anchor="ctr"/>
           <a:lstStyle/>
           <a:p>
-            <a:pPr indent="0" marL="0">
+            <a:pPr marL="0" indent="0">
               <a:buNone/>
             </a:pPr>
             <a:r>
@@ -28113,7 +27711,7 @@
           <a:bodyPr wrap="square" rtlCol="0" anchor="ctr"/>
           <a:lstStyle/>
           <a:p>
-            <a:pPr indent="0" marL="0">
+            <a:pPr marL="0" indent="0">
               <a:buNone/>
             </a:pPr>
             <a:r>
@@ -28152,7 +27750,7 @@
           <a:bodyPr wrap="square" rtlCol="0" anchor="ctr"/>
           <a:lstStyle/>
           <a:p>
-            <a:pPr indent="0" marL="0">
+            <a:pPr marL="0" indent="0">
               <a:buNone/>
             </a:pPr>
             <a:r>
@@ -28216,7 +27814,7 @@
           <a:bodyPr wrap="square" rtlCol="0" anchor="ctr"/>
           <a:lstStyle/>
           <a:p>
-            <a:pPr algn="ctr" indent="0" marL="0">
+            <a:pPr marL="0" indent="0" algn="ctr">
               <a:buNone/>
             </a:pPr>
             <a:r>
@@ -28280,7 +27878,7 @@
           <a:bodyPr wrap="square" rtlCol="0" anchor="ctr"/>
           <a:lstStyle/>
           <a:p>
-            <a:pPr indent="0" marL="0">
+            <a:pPr marL="0" indent="0">
               <a:buNone/>
             </a:pPr>
             <a:r>
@@ -28319,7 +27917,7 @@
           <a:bodyPr wrap="square" rtlCol="0" anchor="ctr"/>
           <a:lstStyle/>
           <a:p>
-            <a:pPr indent="0" marL="0">
+            <a:pPr marL="0" indent="0">
               <a:buNone/>
             </a:pPr>
             <a:r>
@@ -28383,7 +27981,7 @@
           <a:bodyPr wrap="square" rtlCol="0" anchor="ctr"/>
           <a:lstStyle/>
           <a:p>
-            <a:pPr algn="ctr" indent="0" marL="0">
+            <a:pPr marL="0" indent="0" algn="ctr">
               <a:buNone/>
             </a:pPr>
             <a:r>
@@ -28447,7 +28045,7 @@
           <a:bodyPr wrap="square" rtlCol="0" anchor="ctr"/>
           <a:lstStyle/>
           <a:p>
-            <a:pPr indent="0" marL="0">
+            <a:pPr marL="0" indent="0">
               <a:buNone/>
             </a:pPr>
             <a:r>
@@ -28486,7 +28084,7 @@
           <a:bodyPr wrap="square" rtlCol="0" anchor="ctr"/>
           <a:lstStyle/>
           <a:p>
-            <a:pPr indent="0" marL="0">
+            <a:pPr marL="0" indent="0">
               <a:buNone/>
             </a:pPr>
             <a:r>
@@ -28550,7 +28148,7 @@
           <a:bodyPr wrap="square" rtlCol="0" anchor="ctr"/>
           <a:lstStyle/>
           <a:p>
-            <a:pPr algn="ctr" indent="0" marL="0">
+            <a:pPr marL="0" indent="0" algn="ctr">
               <a:buNone/>
             </a:pPr>
             <a:r>
@@ -28614,7 +28212,7 @@
           <a:bodyPr wrap="square" rtlCol="0" anchor="ctr"/>
           <a:lstStyle/>
           <a:p>
-            <a:pPr indent="0" marL="0">
+            <a:pPr marL="0" indent="0">
               <a:buNone/>
             </a:pPr>
             <a:r>
@@ -28653,7 +28251,7 @@
           <a:bodyPr wrap="square" rtlCol="0" anchor="ctr"/>
           <a:lstStyle/>
           <a:p>
-            <a:pPr indent="0" marL="0">
+            <a:pPr marL="0" indent="0">
               <a:buNone/>
             </a:pPr>
             <a:r>
@@ -28717,7 +28315,7 @@
           <a:bodyPr wrap="square" rtlCol="0" anchor="ctr"/>
           <a:lstStyle/>
           <a:p>
-            <a:pPr algn="ctr" indent="0" marL="0">
+            <a:pPr marL="0" indent="0" algn="ctr">
               <a:buNone/>
             </a:pPr>
             <a:r>
@@ -28781,7 +28379,7 @@
           <a:bodyPr wrap="square" rtlCol="0" anchor="ctr"/>
           <a:lstStyle/>
           <a:p>
-            <a:pPr indent="0" marL="0">
+            <a:pPr marL="0" indent="0">
               <a:buNone/>
             </a:pPr>
             <a:r>
@@ -28820,7 +28418,7 @@
           <a:bodyPr wrap="square" rtlCol="0" anchor="ctr"/>
           <a:lstStyle/>
           <a:p>
-            <a:pPr indent="0" marL="0">
+            <a:pPr marL="0" indent="0">
               <a:buNone/>
             </a:pPr>
             <a:r>
@@ -28884,7 +28482,7 @@
           <a:bodyPr wrap="square" rtlCol="0" anchor="ctr"/>
           <a:lstStyle/>
           <a:p>
-            <a:pPr algn="ctr" indent="0" marL="0">
+            <a:pPr marL="0" indent="0" algn="ctr">
               <a:buNone/>
             </a:pPr>
             <a:r>
@@ -28923,7 +28521,7 @@
           <a:bodyPr wrap="square" rtlCol="0" anchor="ctr"/>
           <a:lstStyle/>
           <a:p>
-            <a:pPr indent="0" marL="0">
+            <a:pPr marL="0" indent="0">
               <a:buNone/>
             </a:pPr>
             <a:r>
@@ -29037,7 +28635,7 @@
           <a:bodyPr wrap="square" rtlCol="0" anchor="ctr"/>
           <a:lstStyle/>
           <a:p>
-            <a:pPr algn="ctr" indent="0" marL="0">
+            <a:pPr marL="0" indent="0" algn="ctr">
               <a:buNone/>
             </a:pPr>
             <a:r>
@@ -29076,7 +28674,7 @@
           <a:bodyPr wrap="square" rtlCol="0" anchor="ctr"/>
           <a:lstStyle/>
           <a:p>
-            <a:pPr indent="0" marL="0">
+            <a:pPr marL="0" indent="0">
               <a:buNone/>
             </a:pPr>
             <a:r>
@@ -29115,7 +28713,7 @@
           <a:bodyPr wrap="square" rtlCol="0" anchor="t"/>
           <a:lstStyle/>
           <a:p>
-            <a:pPr indent="0" marL="0">
+            <a:pPr marL="0" indent="0">
               <a:lnSpc>
                 <a:spcPts val="130"/>
               </a:lnSpc>
@@ -29232,7 +28830,7 @@
           <a:bodyPr wrap="square" rtlCol="0" anchor="ctr"/>
           <a:lstStyle/>
           <a:p>
-            <a:pPr algn="ctr" indent="0" marL="0">
+            <a:pPr marL="0" indent="0" algn="ctr">
               <a:buNone/>
             </a:pPr>
             <a:r>
@@ -29271,7 +28869,7 @@
           <a:bodyPr wrap="square" rtlCol="0" anchor="ctr"/>
           <a:lstStyle/>
           <a:p>
-            <a:pPr indent="0" marL="0">
+            <a:pPr marL="0" indent="0">
               <a:buNone/>
             </a:pPr>
             <a:r>
@@ -29310,7 +28908,7 @@
           <a:bodyPr wrap="square" rtlCol="0" anchor="t"/>
           <a:lstStyle/>
           <a:p>
-            <a:pPr indent="0" marL="0">
+            <a:pPr marL="0" indent="0">
               <a:lnSpc>
                 <a:spcPts val="130"/>
               </a:lnSpc>
@@ -29427,7 +29025,7 @@
           <a:bodyPr wrap="square" rtlCol="0" anchor="ctr"/>
           <a:lstStyle/>
           <a:p>
-            <a:pPr algn="ctr" indent="0" marL="0">
+            <a:pPr marL="0" indent="0" algn="ctr">
               <a:buNone/>
             </a:pPr>
             <a:r>
@@ -29466,7 +29064,7 @@
           <a:bodyPr wrap="square" rtlCol="0" anchor="ctr"/>
           <a:lstStyle/>
           <a:p>
-            <a:pPr indent="0" marL="0">
+            <a:pPr marL="0" indent="0">
               <a:buNone/>
             </a:pPr>
             <a:r>
@@ -29505,7 +29103,7 @@
           <a:bodyPr wrap="square" rtlCol="0" anchor="t"/>
           <a:lstStyle/>
           <a:p>
-            <a:pPr indent="0" marL="0">
+            <a:pPr marL="0" indent="0">
               <a:lnSpc>
                 <a:spcPts val="130"/>
               </a:lnSpc>
@@ -29622,7 +29220,7 @@
           <a:bodyPr wrap="square" rtlCol="0" anchor="ctr"/>
           <a:lstStyle/>
           <a:p>
-            <a:pPr algn="ctr" indent="0" marL="0">
+            <a:pPr marL="0" indent="0" algn="ctr">
               <a:buNone/>
             </a:pPr>
             <a:r>
@@ -29661,7 +29259,7 @@
           <a:bodyPr wrap="square" rtlCol="0" anchor="ctr"/>
           <a:lstStyle/>
           <a:p>
-            <a:pPr indent="0" marL="0">
+            <a:pPr marL="0" indent="0">
               <a:buNone/>
             </a:pPr>
             <a:r>
@@ -29700,7 +29298,7 @@
           <a:bodyPr wrap="square" rtlCol="0" anchor="t"/>
           <a:lstStyle/>
           <a:p>
-            <a:pPr indent="0" marL="0">
+            <a:pPr marL="0" indent="0">
               <a:lnSpc>
                 <a:spcPts val="130"/>
               </a:lnSpc>
@@ -29767,7 +29365,7 @@
           <a:bodyPr wrap="square" rtlCol="0" anchor="ctr"/>
           <a:lstStyle/>
           <a:p>
-            <a:pPr indent="0" marL="0">
+            <a:pPr marL="0" indent="0">
               <a:buNone/>
             </a:pPr>
             <a:r>
@@ -29806,7 +29404,7 @@
           <a:bodyPr wrap="square" rtlCol="0" anchor="ctr"/>
           <a:lstStyle/>
           <a:p>
-            <a:pPr indent="0" marL="0">
+            <a:pPr marL="0" indent="0">
               <a:buNone/>
             </a:pPr>
             <a:r>
@@ -29868,7 +29466,7 @@
           <a:bodyPr wrap="square" rtlCol="0" anchor="ctr"/>
           <a:lstStyle/>
           <a:p>
-            <a:pPr indent="0" marL="0">
+            <a:pPr marL="0" indent="0">
               <a:buNone/>
             </a:pPr>
             <a:r>
@@ -29907,7 +29505,7 @@
           <a:bodyPr wrap="square" rtlCol="0" anchor="ctr"/>
           <a:lstStyle/>
           <a:p>
-            <a:pPr algn="r" indent="0" marL="0">
+            <a:pPr marL="0" indent="0" algn="r">
               <a:buNone/>
             </a:pPr>
             <a:r>
@@ -29971,11 +29569,11 @@
           <a:bodyPr wrap="square" rtlCol="0" anchor="ctr"/>
           <a:lstStyle/>
           <a:p>
-            <a:pPr indent="0" marL="0">
-              <a:buNone/>
-            </a:pPr>
-            <a:r>
-              <a:rPr lang="en-US" sz="1100" spc="200" kern="0" dirty="0">
+            <a:pPr marL="0" indent="0">
+              <a:buNone/>
+            </a:pPr>
+            <a:r>
+              <a:rPr lang="en-US" sz="1100" kern="0" spc="200" dirty="0">
                 <a:solidFill>
                   <a:srgbClr val="5A6070"/>
                 </a:solidFill>
@@ -30035,7 +29633,7 @@
           <a:bodyPr wrap="square" rtlCol="0" anchor="ctr"/>
           <a:lstStyle/>
           <a:p>
-            <a:pPr indent="0" marL="0">
+            <a:pPr marL="0" indent="0">
               <a:buNone/>
             </a:pPr>
             <a:r>
@@ -30097,7 +29695,7 @@
           <a:bodyPr wrap="square" rtlCol="0" anchor="ctr"/>
           <a:lstStyle/>
           <a:p>
-            <a:pPr indent="0" marL="0">
+            <a:pPr marL="0" indent="0">
               <a:buNone/>
             </a:pPr>
             <a:r>
@@ -30211,7 +29809,7 @@
           <a:bodyPr wrap="square" rtlCol="0" anchor="ctr"/>
           <a:lstStyle/>
           <a:p>
-            <a:pPr algn="ctr" indent="0" marL="0">
+            <a:pPr marL="0" indent="0" algn="ctr">
               <a:buNone/>
             </a:pPr>
             <a:r>
@@ -30250,7 +29848,7 @@
           <a:bodyPr wrap="square" rtlCol="0" anchor="ctr"/>
           <a:lstStyle/>
           <a:p>
-            <a:pPr indent="0" marL="0">
+            <a:pPr marL="0" indent="0">
               <a:buNone/>
             </a:pPr>
             <a:r>
@@ -30289,7 +29887,7 @@
           <a:bodyPr wrap="square" rtlCol="0" anchor="ctr"/>
           <a:lstStyle/>
           <a:p>
-            <a:pPr indent="0" marL="0">
+            <a:pPr marL="0" indent="0">
               <a:lnSpc>
                 <a:spcPts val="130"/>
               </a:lnSpc>
@@ -30406,7 +30004,7 @@
           <a:bodyPr wrap="square" rtlCol="0" anchor="ctr"/>
           <a:lstStyle/>
           <a:p>
-            <a:pPr algn="ctr" indent="0" marL="0">
+            <a:pPr marL="0" indent="0" algn="ctr">
               <a:buNone/>
             </a:pPr>
             <a:r>
@@ -30445,7 +30043,7 @@
           <a:bodyPr wrap="square" rtlCol="0" anchor="ctr"/>
           <a:lstStyle/>
           <a:p>
-            <a:pPr indent="0" marL="0">
+            <a:pPr marL="0" indent="0">
               <a:buNone/>
             </a:pPr>
             <a:r>
@@ -30484,7 +30082,7 @@
           <a:bodyPr wrap="square" rtlCol="0" anchor="ctr"/>
           <a:lstStyle/>
           <a:p>
-            <a:pPr indent="0" marL="0">
+            <a:pPr marL="0" indent="0">
               <a:lnSpc>
                 <a:spcPts val="130"/>
               </a:lnSpc>
@@ -30601,7 +30199,7 @@
           <a:bodyPr wrap="square" rtlCol="0" anchor="ctr"/>
           <a:lstStyle/>
           <a:p>
-            <a:pPr algn="ctr" indent="0" marL="0">
+            <a:pPr marL="0" indent="0" algn="ctr">
               <a:buNone/>
             </a:pPr>
             <a:r>
@@ -30640,7 +30238,7 @@
           <a:bodyPr wrap="square" rtlCol="0" anchor="ctr"/>
           <a:lstStyle/>
           <a:p>
-            <a:pPr indent="0" marL="0">
+            <a:pPr marL="0" indent="0">
               <a:buNone/>
             </a:pPr>
             <a:r>
@@ -30679,7 +30277,7 @@
           <a:bodyPr wrap="square" rtlCol="0" anchor="ctr"/>
           <a:lstStyle/>
           <a:p>
-            <a:pPr indent="0" marL="0">
+            <a:pPr marL="0" indent="0">
               <a:lnSpc>
                 <a:spcPts val="130"/>
               </a:lnSpc>
@@ -30796,7 +30394,7 @@
           <a:bodyPr wrap="square" rtlCol="0" anchor="ctr"/>
           <a:lstStyle/>
           <a:p>
-            <a:pPr algn="ctr" indent="0" marL="0">
+            <a:pPr marL="0" indent="0" algn="ctr">
               <a:buNone/>
             </a:pPr>
             <a:r>
@@ -30835,7 +30433,7 @@
           <a:bodyPr wrap="square" rtlCol="0" anchor="ctr"/>
           <a:lstStyle/>
           <a:p>
-            <a:pPr indent="0" marL="0">
+            <a:pPr marL="0" indent="0">
               <a:buNone/>
             </a:pPr>
             <a:r>
@@ -30874,7 +30472,7 @@
           <a:bodyPr wrap="square" rtlCol="0" anchor="ctr"/>
           <a:lstStyle/>
           <a:p>
-            <a:pPr indent="0" marL="0">
+            <a:pPr marL="0" indent="0">
               <a:lnSpc>
                 <a:spcPts val="130"/>
               </a:lnSpc>
@@ -30991,7 +30589,7 @@
           <a:bodyPr wrap="square" rtlCol="0" anchor="ctr"/>
           <a:lstStyle/>
           <a:p>
-            <a:pPr algn="ctr" indent="0" marL="0">
+            <a:pPr marL="0" indent="0" algn="ctr">
               <a:buNone/>
             </a:pPr>
             <a:r>
@@ -31030,7 +30628,7 @@
           <a:bodyPr wrap="square" rtlCol="0" anchor="ctr"/>
           <a:lstStyle/>
           <a:p>
-            <a:pPr indent="0" marL="0">
+            <a:pPr marL="0" indent="0">
               <a:buNone/>
             </a:pPr>
             <a:r>
@@ -31069,7 +30667,7 @@
           <a:bodyPr wrap="square" rtlCol="0" anchor="ctr"/>
           <a:lstStyle/>
           <a:p>
-            <a:pPr indent="0" marL="0">
+            <a:pPr marL="0" indent="0">
               <a:lnSpc>
                 <a:spcPts val="130"/>
               </a:lnSpc>
@@ -31186,7 +30784,7 @@
           <a:bodyPr wrap="square" rtlCol="0" anchor="ctr"/>
           <a:lstStyle/>
           <a:p>
-            <a:pPr algn="ctr" indent="0" marL="0">
+            <a:pPr marL="0" indent="0" algn="ctr">
               <a:buNone/>
             </a:pPr>
             <a:r>
@@ -31225,7 +30823,7 @@
           <a:bodyPr wrap="square" rtlCol="0" anchor="ctr"/>
           <a:lstStyle/>
           <a:p>
-            <a:pPr indent="0" marL="0">
+            <a:pPr marL="0" indent="0">
               <a:buNone/>
             </a:pPr>
             <a:r>
@@ -31264,7 +30862,7 @@
           <a:bodyPr wrap="square" rtlCol="0" anchor="ctr"/>
           <a:lstStyle/>
           <a:p>
-            <a:pPr indent="0" marL="0">
+            <a:pPr marL="0" indent="0">
               <a:lnSpc>
                 <a:spcPts val="130"/>
               </a:lnSpc>
@@ -31306,7 +30904,7 @@
           <a:bodyPr wrap="square" rtlCol="0" anchor="ctr"/>
           <a:lstStyle/>
           <a:p>
-            <a:pPr indent="0" marL="0">
+            <a:pPr marL="0" indent="0">
               <a:buNone/>
             </a:pPr>
             <a:r>
@@ -31367,12 +30965,12 @@
           <a:ln/>
         </p:spPr>
         <p:txBody>
-          <a:bodyPr wrap="none" lIns="0" tIns="0" rIns="0" bIns="0" rtlCol="0" anchor="ctr" vert="horz">
+          <a:bodyPr vert="horz" wrap="none" lIns="0" tIns="0" rIns="0" bIns="0" rtlCol="0" anchor="ctr">
             <a:normAutofit/>
           </a:bodyPr>
           <a:lstStyle/>
           <a:p>
-            <a:pPr algn="ctr" indent="0" marL="0">
+            <a:pPr marL="0" indent="0" algn="ctr">
               <a:buNone/>
             </a:pPr>
             <a:r>
@@ -31436,7 +31034,7 @@
           <a:bodyPr wrap="square" rtlCol="0" anchor="ctr"/>
           <a:lstStyle/>
           <a:p>
-            <a:pPr indent="0" marL="0">
+            <a:pPr marL="0" indent="0">
               <a:buNone/>
             </a:pPr>
             <a:r>
@@ -31475,7 +31073,7 @@
           <a:bodyPr wrap="square" rtlCol="0" anchor="t"/>
           <a:lstStyle/>
           <a:p>
-            <a:pPr indent="0" marL="0">
+            <a:pPr marL="0" indent="0">
               <a:buNone/>
             </a:pPr>
             <a:r>
@@ -31559,12 +31157,12 @@
           <a:ln/>
         </p:spPr>
         <p:txBody>
-          <a:bodyPr wrap="none" lIns="0" tIns="0" rIns="0" bIns="0" rtlCol="0" anchor="ctr" vert="horz">
+          <a:bodyPr vert="horz" wrap="none" lIns="0" tIns="0" rIns="0" bIns="0" rtlCol="0" anchor="ctr">
             <a:normAutofit/>
           </a:bodyPr>
           <a:lstStyle/>
           <a:p>
-            <a:pPr algn="ctr" indent="0" marL="0">
+            <a:pPr marL="0" indent="0" algn="ctr">
               <a:buNone/>
             </a:pPr>
             <a:r>
@@ -31628,7 +31226,7 @@
           <a:bodyPr wrap="square" rtlCol="0" anchor="ctr"/>
           <a:lstStyle/>
           <a:p>
-            <a:pPr indent="0" marL="0">
+            <a:pPr marL="0" indent="0">
               <a:buNone/>
             </a:pPr>
             <a:r>
@@ -31667,7 +31265,7 @@
           <a:bodyPr wrap="square" rtlCol="0" anchor="t"/>
           <a:lstStyle/>
           <a:p>
-            <a:pPr indent="0" marL="0">
+            <a:pPr marL="0" indent="0">
               <a:buNone/>
             </a:pPr>
             <a:r>
@@ -31751,12 +31349,12 @@
           <a:ln/>
         </p:spPr>
         <p:txBody>
-          <a:bodyPr wrap="none" lIns="0" tIns="0" rIns="0" bIns="0" rtlCol="0" anchor="ctr" vert="horz">
+          <a:bodyPr vert="horz" wrap="none" lIns="0" tIns="0" rIns="0" bIns="0" rtlCol="0" anchor="ctr">
             <a:normAutofit/>
           </a:bodyPr>
           <a:lstStyle/>
           <a:p>
-            <a:pPr algn="ctr" indent="0" marL="0">
+            <a:pPr marL="0" indent="0" algn="ctr">
               <a:buNone/>
             </a:pPr>
             <a:r>
@@ -31820,7 +31418,7 @@
           <a:bodyPr wrap="square" rtlCol="0" anchor="ctr"/>
           <a:lstStyle/>
           <a:p>
-            <a:pPr indent="0" marL="0">
+            <a:pPr marL="0" indent="0">
               <a:buNone/>
             </a:pPr>
             <a:r>
@@ -31859,7 +31457,7 @@
           <a:bodyPr wrap="square" rtlCol="0" anchor="t"/>
           <a:lstStyle/>
           <a:p>
-            <a:pPr indent="0" marL="0">
+            <a:pPr marL="0" indent="0">
               <a:buNone/>
             </a:pPr>
             <a:r>
@@ -31943,12 +31541,12 @@
           <a:ln/>
         </p:spPr>
         <p:txBody>
-          <a:bodyPr wrap="none" lIns="0" tIns="0" rIns="0" bIns="0" rtlCol="0" anchor="ctr" vert="horz">
+          <a:bodyPr vert="horz" wrap="none" lIns="0" tIns="0" rIns="0" bIns="0" rtlCol="0" anchor="ctr">
             <a:normAutofit/>
           </a:bodyPr>
           <a:lstStyle/>
           <a:p>
-            <a:pPr algn="ctr" indent="0" marL="0">
+            <a:pPr marL="0" indent="0" algn="ctr">
               <a:buNone/>
             </a:pPr>
             <a:r>
@@ -32012,7 +31610,7 @@
           <a:bodyPr wrap="square" rtlCol="0" anchor="ctr"/>
           <a:lstStyle/>
           <a:p>
-            <a:pPr indent="0" marL="0">
+            <a:pPr marL="0" indent="0">
               <a:buNone/>
             </a:pPr>
             <a:r>
@@ -32051,7 +31649,7 @@
           <a:bodyPr wrap="square" rtlCol="0" anchor="t"/>
           <a:lstStyle/>
           <a:p>
-            <a:pPr indent="0" marL="0">
+            <a:pPr marL="0" indent="0">
               <a:buNone/>
             </a:pPr>
             <a:r>
@@ -32135,12 +31733,12 @@
           <a:ln/>
         </p:spPr>
         <p:txBody>
-          <a:bodyPr wrap="none" lIns="0" tIns="0" rIns="0" bIns="0" rtlCol="0" anchor="ctr" vert="horz">
+          <a:bodyPr vert="horz" wrap="none" lIns="0" tIns="0" rIns="0" bIns="0" rtlCol="0" anchor="ctr">
             <a:normAutofit/>
           </a:bodyPr>
           <a:lstStyle/>
           <a:p>
-            <a:pPr algn="ctr" indent="0" marL="0">
+            <a:pPr marL="0" indent="0" algn="ctr">
               <a:buNone/>
             </a:pPr>
             <a:r>
@@ -32204,7 +31802,7 @@
           <a:bodyPr wrap="square" rtlCol="0" anchor="ctr"/>
           <a:lstStyle/>
           <a:p>
-            <a:pPr indent="0" marL="0">
+            <a:pPr marL="0" indent="0">
               <a:buNone/>
             </a:pPr>
             <a:r>
@@ -32243,7 +31841,7 @@
           <a:bodyPr wrap="square" rtlCol="0" anchor="t"/>
           <a:lstStyle/>
           <a:p>
-            <a:pPr indent="0" marL="0">
+            <a:pPr marL="0" indent="0">
               <a:buNone/>
             </a:pPr>
             <a:r>
@@ -32307,7 +31905,7 @@
           <a:bodyPr wrap="square" rtlCol="0" anchor="ctr"/>
           <a:lstStyle/>
           <a:p>
-            <a:pPr indent="0" marL="0">
+            <a:pPr marL="0" indent="0">
               <a:buNone/>
             </a:pPr>
             <a:r>
@@ -32346,7 +31944,7 @@
           <a:bodyPr wrap="square" rtlCol="0" anchor="ctr"/>
           <a:lstStyle/>
           <a:p>
-            <a:pPr indent="0" marL="0">
+            <a:pPr marL="0" indent="0">
               <a:buNone/>
             </a:pPr>
             <a:r>
@@ -32385,7 +31983,7 @@
           <a:bodyPr wrap="square" rtlCol="0" anchor="ctr"/>
           <a:lstStyle/>
           <a:p>
-            <a:pPr indent="0" marL="0">
+            <a:pPr marL="0" indent="0">
               <a:buNone/>
             </a:pPr>
             <a:r>
@@ -32424,7 +32022,7 @@
           <a:bodyPr wrap="square" rtlCol="0" anchor="ctr"/>
           <a:lstStyle/>
           <a:p>
-            <a:pPr indent="0" marL="0">
+            <a:pPr marL="0" indent="0">
               <a:buNone/>
             </a:pPr>
             <a:r>
@@ -32463,7 +32061,7 @@
           <a:bodyPr wrap="square" rtlCol="0" anchor="ctr"/>
           <a:lstStyle/>
           <a:p>
-            <a:pPr indent="0" marL="0">
+            <a:pPr marL="0" indent="0">
               <a:buNone/>
             </a:pPr>
             <a:r>
@@ -32525,7 +32123,7 @@
           <a:bodyPr wrap="square" rtlCol="0" anchor="ctr"/>
           <a:lstStyle/>
           <a:p>
-            <a:pPr indent="0" marL="0">
+            <a:pPr marL="0" indent="0">
               <a:buNone/>
             </a:pPr>
             <a:r>
@@ -32564,7 +32162,7 @@
           <a:bodyPr wrap="square" rtlCol="0" anchor="ctr"/>
           <a:lstStyle/>
           <a:p>
-            <a:pPr algn="r" indent="0" marL="0">
+            <a:pPr marL="0" indent="0" algn="r">
               <a:buNone/>
             </a:pPr>
             <a:r>
@@ -32628,11 +32226,11 @@
           <a:bodyPr wrap="square" rtlCol="0" anchor="ctr"/>
           <a:lstStyle/>
           <a:p>
-            <a:pPr indent="0" marL="0">
-              <a:buNone/>
-            </a:pPr>
-            <a:r>
-              <a:rPr lang="en-US" sz="1100" spc="200" kern="0" dirty="0">
+            <a:pPr marL="0" indent="0">
+              <a:buNone/>
+            </a:pPr>
+            <a:r>
+              <a:rPr lang="en-US" sz="1100" kern="0" spc="200" dirty="0">
                 <a:solidFill>
                   <a:srgbClr val="5A6070"/>
                 </a:solidFill>
@@ -32692,7 +32290,7 @@
           <a:bodyPr wrap="square" rtlCol="0" anchor="ctr"/>
           <a:lstStyle/>
           <a:p>
-            <a:pPr indent="0" marL="0">
+            <a:pPr marL="0" indent="0">
               <a:buNone/>
             </a:pPr>
             <a:r>
@@ -32754,7 +32352,7 @@
           <a:bodyPr wrap="square" rtlCol="0" anchor="ctr"/>
           <a:lstStyle/>
           <a:p>
-            <a:pPr indent="0" marL="0">
+            <a:pPr marL="0" indent="0">
               <a:buNone/>
             </a:pPr>
             <a:r>
@@ -32843,7 +32441,7 @@
           <a:bodyPr wrap="square" rtlCol="0" anchor="ctr"/>
           <a:lstStyle/>
           <a:p>
-            <a:pPr indent="0" marL="0">
+            <a:pPr marL="0" indent="0">
               <a:buNone/>
             </a:pPr>
             <a:r>
@@ -32882,7 +32480,7 @@
           <a:bodyPr wrap="square" rtlCol="0" anchor="ctr"/>
           <a:lstStyle/>
           <a:p>
-            <a:pPr indent="0" marL="0">
+            <a:pPr marL="0" indent="0">
               <a:buNone/>
             </a:pPr>
             <a:r>
@@ -32918,12 +32516,12 @@
           <a:ln/>
         </p:spPr>
         <p:txBody>
-          <a:bodyPr wrap="none" lIns="0" tIns="0" rIns="0" bIns="0" rtlCol="0" anchor="ctr" vert="horz">
+          <a:bodyPr vert="horz" wrap="none" lIns="0" tIns="0" rIns="0" bIns="0" rtlCol="0" anchor="ctr">
             <a:normAutofit/>
           </a:bodyPr>
           <a:lstStyle/>
           <a:p>
-            <a:pPr algn="r" indent="0" marL="0">
+            <a:pPr marL="0" indent="0" algn="r">
               <a:buNone/>
             </a:pPr>
             <a:r>
@@ -33012,7 +32610,7 @@
           <a:bodyPr wrap="square" rtlCol="0" anchor="ctr"/>
           <a:lstStyle/>
           <a:p>
-            <a:pPr indent="0" marL="0">
+            <a:pPr marL="0" indent="0">
               <a:buNone/>
             </a:pPr>
             <a:r>
@@ -33051,7 +32649,7 @@
           <a:bodyPr wrap="square" rtlCol="0" anchor="ctr"/>
           <a:lstStyle/>
           <a:p>
-            <a:pPr indent="0" marL="0">
+            <a:pPr marL="0" indent="0">
               <a:buNone/>
             </a:pPr>
             <a:r>
@@ -33087,12 +32685,12 @@
           <a:ln/>
         </p:spPr>
         <p:txBody>
-          <a:bodyPr wrap="none" lIns="0" tIns="0" rIns="0" bIns="0" rtlCol="0" anchor="ctr" vert="horz">
+          <a:bodyPr vert="horz" wrap="none" lIns="0" tIns="0" rIns="0" bIns="0" rtlCol="0" anchor="ctr">
             <a:normAutofit/>
           </a:bodyPr>
           <a:lstStyle/>
           <a:p>
-            <a:pPr algn="r" indent="0" marL="0">
+            <a:pPr marL="0" indent="0" algn="r">
               <a:buNone/>
             </a:pPr>
             <a:r>
@@ -33181,7 +32779,7 @@
           <a:bodyPr wrap="square" rtlCol="0" anchor="ctr"/>
           <a:lstStyle/>
           <a:p>
-            <a:pPr indent="0" marL="0">
+            <a:pPr marL="0" indent="0">
               <a:buNone/>
             </a:pPr>
             <a:r>
@@ -33220,7 +32818,7 @@
           <a:bodyPr wrap="square" rtlCol="0" anchor="ctr"/>
           <a:lstStyle/>
           <a:p>
-            <a:pPr indent="0" marL="0">
+            <a:pPr marL="0" indent="0">
               <a:buNone/>
             </a:pPr>
             <a:r>
@@ -33256,12 +32854,12 @@
           <a:ln/>
         </p:spPr>
         <p:txBody>
-          <a:bodyPr wrap="none" lIns="0" tIns="0" rIns="0" bIns="0" rtlCol="0" anchor="ctr" vert="horz">
+          <a:bodyPr vert="horz" wrap="none" lIns="0" tIns="0" rIns="0" bIns="0" rtlCol="0" anchor="ctr">
             <a:normAutofit/>
           </a:bodyPr>
           <a:lstStyle/>
           <a:p>
-            <a:pPr algn="r" indent="0" marL="0">
+            <a:pPr marL="0" indent="0" algn="r">
               <a:buNone/>
             </a:pPr>
             <a:r>
@@ -33350,7 +32948,7 @@
           <a:bodyPr wrap="square" rtlCol="0" anchor="ctr"/>
           <a:lstStyle/>
           <a:p>
-            <a:pPr indent="0" marL="0">
+            <a:pPr marL="0" indent="0">
               <a:buNone/>
             </a:pPr>
             <a:r>
@@ -33389,7 +32987,7 @@
           <a:bodyPr wrap="square" rtlCol="0" anchor="ctr"/>
           <a:lstStyle/>
           <a:p>
-            <a:pPr indent="0" marL="0">
+            <a:pPr marL="0" indent="0">
               <a:buNone/>
             </a:pPr>
             <a:r>
@@ -33425,12 +33023,12 @@
           <a:ln/>
         </p:spPr>
         <p:txBody>
-          <a:bodyPr wrap="none" lIns="0" tIns="0" rIns="0" bIns="0" rtlCol="0" anchor="ctr" vert="horz">
+          <a:bodyPr vert="horz" wrap="none" lIns="0" tIns="0" rIns="0" bIns="0" rtlCol="0" anchor="ctr">
             <a:normAutofit/>
           </a:bodyPr>
           <a:lstStyle/>
           <a:p>
-            <a:pPr algn="r" indent="0" marL="0">
+            <a:pPr marL="0" indent="0" algn="r">
               <a:buNone/>
             </a:pPr>
             <a:r>
@@ -33469,7 +33067,7 @@
           <a:bodyPr wrap="square" rtlCol="0" anchor="ctr"/>
           <a:lstStyle/>
           <a:p>
-            <a:pPr indent="0" marL="0">
+            <a:pPr marL="0" indent="0">
               <a:buNone/>
             </a:pPr>
             <a:r>
@@ -33558,7 +33156,7 @@
           <a:bodyPr wrap="square" rtlCol="0" anchor="ctr"/>
           <a:lstStyle/>
           <a:p>
-            <a:pPr algn="ctr" indent="0" marL="0">
+            <a:pPr marL="0" indent="0" algn="ctr">
               <a:buNone/>
             </a:pPr>
             <a:r>
@@ -33597,7 +33195,7 @@
           <a:bodyPr wrap="square" rtlCol="0" anchor="ctr"/>
           <a:lstStyle/>
           <a:p>
-            <a:pPr indent="0" marL="0">
+            <a:pPr marL="0" indent="0">
               <a:buNone/>
             </a:pPr>
             <a:r>
@@ -33636,7 +33234,7 @@
           <a:bodyPr wrap="square" rtlCol="0" anchor="ctr"/>
           <a:lstStyle/>
           <a:p>
-            <a:pPr indent="0" marL="0">
+            <a:pPr marL="0" indent="0">
               <a:buNone/>
             </a:pPr>
             <a:r>
@@ -33725,7 +33323,7 @@
           <a:bodyPr wrap="square" rtlCol="0" anchor="ctr"/>
           <a:lstStyle/>
           <a:p>
-            <a:pPr algn="ctr" indent="0" marL="0">
+            <a:pPr marL="0" indent="0" algn="ctr">
               <a:buNone/>
             </a:pPr>
             <a:r>
@@ -33764,7 +33362,7 @@
           <a:bodyPr wrap="square" rtlCol="0" anchor="ctr"/>
           <a:lstStyle/>
           <a:p>
-            <a:pPr indent="0" marL="0">
+            <a:pPr marL="0" indent="0">
               <a:buNone/>
             </a:pPr>
             <a:r>
@@ -33803,7 +33401,7 @@
           <a:bodyPr wrap="square" rtlCol="0" anchor="ctr"/>
           <a:lstStyle/>
           <a:p>
-            <a:pPr indent="0" marL="0">
+            <a:pPr marL="0" indent="0">
               <a:buNone/>
             </a:pPr>
             <a:r>
@@ -33892,7 +33490,7 @@
           <a:bodyPr wrap="square" rtlCol="0" anchor="ctr"/>
           <a:lstStyle/>
           <a:p>
-            <a:pPr algn="ctr" indent="0" marL="0">
+            <a:pPr marL="0" indent="0" algn="ctr">
               <a:buNone/>
             </a:pPr>
             <a:r>
@@ -33931,7 +33529,7 @@
           <a:bodyPr wrap="square" rtlCol="0" anchor="ctr"/>
           <a:lstStyle/>
           <a:p>
-            <a:pPr indent="0" marL="0">
+            <a:pPr marL="0" indent="0">
               <a:buNone/>
             </a:pPr>
             <a:r>
@@ -33970,7 +33568,7 @@
           <a:bodyPr wrap="square" rtlCol="0" anchor="ctr"/>
           <a:lstStyle/>
           <a:p>
-            <a:pPr indent="0" marL="0">
+            <a:pPr marL="0" indent="0">
               <a:buNone/>
             </a:pPr>
             <a:r>
@@ -34059,7 +33657,7 @@
           <a:bodyPr wrap="square" rtlCol="0" anchor="ctr"/>
           <a:lstStyle/>
           <a:p>
-            <a:pPr algn="ctr" indent="0" marL="0">
+            <a:pPr marL="0" indent="0" algn="ctr">
               <a:buNone/>
             </a:pPr>
             <a:r>
@@ -34098,7 +33696,7 @@
           <a:bodyPr wrap="square" rtlCol="0" anchor="ctr"/>
           <a:lstStyle/>
           <a:p>
-            <a:pPr indent="0" marL="0">
+            <a:pPr marL="0" indent="0">
               <a:buNone/>
             </a:pPr>
             <a:r>
@@ -34137,7 +33735,7 @@
           <a:bodyPr wrap="square" rtlCol="0" anchor="ctr"/>
           <a:lstStyle/>
           <a:p>
-            <a:pPr indent="0" marL="0">
+            <a:pPr marL="0" indent="0">
               <a:buNone/>
             </a:pPr>
             <a:r>
@@ -34226,7 +33824,7 @@
           <a:bodyPr wrap="square" rtlCol="0" anchor="ctr"/>
           <a:lstStyle/>
           <a:p>
-            <a:pPr algn="ctr" indent="0" marL="0">
+            <a:pPr marL="0" indent="0" algn="ctr">
               <a:buNone/>
             </a:pPr>
             <a:r>
@@ -34265,7 +33863,7 @@
           <a:bodyPr wrap="square" rtlCol="0" anchor="ctr"/>
           <a:lstStyle/>
           <a:p>
-            <a:pPr indent="0" marL="0">
+            <a:pPr marL="0" indent="0">
               <a:buNone/>
             </a:pPr>
             <a:r>
@@ -34304,7 +33902,7 @@
           <a:bodyPr wrap="square" rtlCol="0" anchor="ctr"/>
           <a:lstStyle/>
           <a:p>
-            <a:pPr indent="0" marL="0">
+            <a:pPr marL="0" indent="0">
               <a:buNone/>
             </a:pPr>
             <a:r>
@@ -34368,7 +33966,7 @@
           <a:bodyPr wrap="square" rtlCol="0" anchor="ctr"/>
           <a:lstStyle/>
           <a:p>
-            <a:pPr indent="0" marL="0">
+            <a:pPr marL="0" indent="0">
               <a:buNone/>
             </a:pPr>
             <a:r>
@@ -34407,7 +34005,7 @@
           <a:bodyPr wrap="square" rtlCol="0" anchor="ctr"/>
           <a:lstStyle/>
           <a:p>
-            <a:pPr algn="ctr" indent="0" marL="0">
+            <a:pPr marL="0" indent="0" algn="ctr">
               <a:buNone/>
             </a:pPr>
             <a:r>
@@ -34494,7 +34092,7 @@
           <a:bodyPr wrap="square" rtlCol="0" anchor="ctr"/>
           <a:lstStyle/>
           <a:p>
-            <a:pPr algn="ctr" indent="0" marL="0">
+            <a:pPr marL="0" indent="0" algn="ctr">
               <a:buNone/>
             </a:pPr>
             <a:r>
@@ -34581,7 +34179,7 @@
           <a:bodyPr wrap="square" rtlCol="0" anchor="ctr"/>
           <a:lstStyle/>
           <a:p>
-            <a:pPr algn="ctr" indent="0" marL="0">
+            <a:pPr marL="0" indent="0" algn="ctr">
               <a:buNone/>
             </a:pPr>
             <a:r>
@@ -34668,7 +34266,7 @@
           <a:bodyPr wrap="square" rtlCol="0" anchor="ctr"/>
           <a:lstStyle/>
           <a:p>
-            <a:pPr algn="ctr" indent="0" marL="0">
+            <a:pPr marL="0" indent="0" algn="ctr">
               <a:buNone/>
             </a:pPr>
             <a:r>
@@ -34755,7 +34353,7 @@
           <a:bodyPr wrap="square" rtlCol="0" anchor="ctr"/>
           <a:lstStyle/>
           <a:p>
-            <a:pPr algn="ctr" indent="0" marL="0">
+            <a:pPr marL="0" indent="0" algn="ctr">
               <a:buNone/>
             </a:pPr>
             <a:r>
@@ -34842,7 +34440,7 @@
           <a:bodyPr wrap="square" rtlCol="0" anchor="ctr"/>
           <a:lstStyle/>
           <a:p>
-            <a:pPr algn="ctr" indent="0" marL="0">
+            <a:pPr marL="0" indent="0" algn="ctr">
               <a:buNone/>
             </a:pPr>
             <a:r>
@@ -34904,7 +34502,7 @@
           <a:bodyPr wrap="square" rtlCol="0" anchor="ctr"/>
           <a:lstStyle/>
           <a:p>
-            <a:pPr indent="0" marL="0">
+            <a:pPr marL="0" indent="0">
               <a:buNone/>
             </a:pPr>
             <a:r>
@@ -34943,7 +34541,7 @@
           <a:bodyPr wrap="square" rtlCol="0" anchor="ctr"/>
           <a:lstStyle/>
           <a:p>
-            <a:pPr algn="r" indent="0" marL="0">
+            <a:pPr marL="0" indent="0" algn="r">
               <a:buNone/>
             </a:pPr>
             <a:r>
@@ -35262,4 +34860,319 @@
     </a:ext>
   </a:extLst>
 </a:theme>
+</file>
+
+<file path=ppt/theme/theme2.xml><?xml version="1.0" encoding="utf-8"?>
+<a:theme xmlns:a="http://schemas.openxmlformats.org/drawingml/2006/main" name="Office 主题​​">
+  <a:themeElements>
+    <a:clrScheme name="Office">
+      <a:dk1>
+        <a:sysClr val="windowText" lastClr="000000"/>
+      </a:dk1>
+      <a:lt1>
+        <a:sysClr val="window" lastClr="FFFFFF"/>
+      </a:lt1>
+      <a:dk2>
+        <a:srgbClr val="0E2841"/>
+      </a:dk2>
+      <a:lt2>
+        <a:srgbClr val="E8E8E8"/>
+      </a:lt2>
+      <a:accent1>
+        <a:srgbClr val="156082"/>
+      </a:accent1>
+      <a:accent2>
+        <a:srgbClr val="E97132"/>
+      </a:accent2>
+      <a:accent3>
+        <a:srgbClr val="196B24"/>
+      </a:accent3>
+      <a:accent4>
+        <a:srgbClr val="0F9ED5"/>
+      </a:accent4>
+      <a:accent5>
+        <a:srgbClr val="A02B93"/>
+      </a:accent5>
+      <a:accent6>
+        <a:srgbClr val="4EA72E"/>
+      </a:accent6>
+      <a:hlink>
+        <a:srgbClr val="467886"/>
+      </a:hlink>
+      <a:folHlink>
+        <a:srgbClr val="96607D"/>
+      </a:folHlink>
+    </a:clrScheme>
+    <a:fontScheme name="Office">
+      <a:majorFont>
+        <a:latin typeface="等线 Light" panose="02110004020202020204"/>
+        <a:ea typeface=""/>
+        <a:cs typeface=""/>
+        <a:font script="Jpan" typeface="游ゴシック Light"/>
+        <a:font script="Hang" typeface="맑은 고딕"/>
+        <a:font script="Hans" typeface="等线 Light"/>
+        <a:font script="Hant" typeface="新細明體"/>
+        <a:font script="Arab" typeface="Times New Roman"/>
+        <a:font script="Hebr" typeface="Times New Roman"/>
+        <a:font script="Thai" typeface="Angsana New"/>
+        <a:font script="Ethi" typeface="Nyala"/>
+        <a:font script="Beng" typeface="Vrinda"/>
+        <a:font script="Gujr" typeface="Shruti"/>
+        <a:font script="Khmr" typeface="MoolBoran"/>
+        <a:font script="Knda" typeface="Tunga"/>
+        <a:font script="Guru" typeface="Raavi"/>
+        <a:font script="Cans" typeface="Euphemia"/>
+        <a:font script="Cher" typeface="Plantagenet Cherokee"/>
+        <a:font script="Yiii" typeface="Microsoft Yi Baiti"/>
+        <a:font script="Tibt" typeface="Microsoft Himalaya"/>
+        <a:font script="Thaa" typeface="MV Boli"/>
+        <a:font script="Deva" typeface="Mangal"/>
+        <a:font script="Telu" typeface="Gautami"/>
+        <a:font script="Taml" typeface="Latha"/>
+        <a:font script="Syrc" typeface="Estrangelo Edessa"/>
+        <a:font script="Orya" typeface="Kalinga"/>
+        <a:font script="Mlym" typeface="Kartika"/>
+        <a:font script="Laoo" typeface="DokChampa"/>
+        <a:font script="Sinh" typeface="Iskoola Pota"/>
+        <a:font script="Mong" typeface="Mongolian Baiti"/>
+        <a:font script="Viet" typeface="Times New Roman"/>
+        <a:font script="Uigh" typeface="Microsoft Uighur"/>
+        <a:font script="Geor" typeface="Sylfaen"/>
+        <a:font script="Armn" typeface="Arial"/>
+        <a:font script="Bugi" typeface="Leelawadee UI"/>
+        <a:font script="Bopo" typeface="Microsoft JhengHei"/>
+        <a:font script="Java" typeface="Javanese Text"/>
+        <a:font script="Lisu" typeface="Segoe UI"/>
+        <a:font script="Mymr" typeface="Myanmar Text"/>
+        <a:font script="Nkoo" typeface="Ebrima"/>
+        <a:font script="Olck" typeface="Nirmala UI"/>
+        <a:font script="Osma" typeface="Ebrima"/>
+        <a:font script="Phag" typeface="Phagspa"/>
+        <a:font script="Syrn" typeface="Estrangelo Edessa"/>
+        <a:font script="Syrj" typeface="Estrangelo Edessa"/>
+        <a:font script="Syre" typeface="Estrangelo Edessa"/>
+        <a:font script="Sora" typeface="Nirmala UI"/>
+        <a:font script="Tale" typeface="Microsoft Tai Le"/>
+        <a:font script="Talu" typeface="Microsoft New Tai Lue"/>
+        <a:font script="Tfng" typeface="Ebrima"/>
+      </a:majorFont>
+      <a:minorFont>
+        <a:latin typeface="等线" panose="02110004020202020204"/>
+        <a:ea typeface=""/>
+        <a:cs typeface=""/>
+        <a:font script="Jpan" typeface="游ゴシック"/>
+        <a:font script="Hang" typeface="맑은 고딕"/>
+        <a:font script="Hans" typeface="等线"/>
+        <a:font script="Hant" typeface="新細明體"/>
+        <a:font script="Arab" typeface="Arial"/>
+        <a:font script="Hebr" typeface="Arial"/>
+        <a:font script="Thai" typeface="Cordia New"/>
+        <a:font script="Ethi" typeface="Nyala"/>
+        <a:font script="Beng" typeface="Vrinda"/>
+        <a:font script="Gujr" typeface="Shruti"/>
+        <a:font script="Khmr" typeface="DaunPenh"/>
+        <a:font script="Knda" typeface="Tunga"/>
+        <a:font script="Guru" typeface="Raavi"/>
+        <a:font script="Cans" typeface="Euphemia"/>
+        <a:font script="Cher" typeface="Plantagenet Cherokee"/>
+        <a:font script="Yiii" typeface="Microsoft Yi Baiti"/>
+        <a:font script="Tibt" typeface="Microsoft Himalaya"/>
+        <a:font script="Thaa" typeface="MV Boli"/>
+        <a:font script="Deva" typeface="Mangal"/>
+        <a:font script="Telu" typeface="Gautami"/>
+        <a:font script="Taml" typeface="Latha"/>
+        <a:font script="Syrc" typeface="Estrangelo Edessa"/>
+        <a:font script="Orya" typeface="Kalinga"/>
+        <a:font script="Mlym" typeface="Kartika"/>
+        <a:font script="Laoo" typeface="DokChampa"/>
+        <a:font script="Sinh" typeface="Iskoola Pota"/>
+        <a:font script="Mong" typeface="Mongolian Baiti"/>
+        <a:font script="Viet" typeface="Arial"/>
+        <a:font script="Uigh" typeface="Microsoft Uighur"/>
+        <a:font script="Geor" typeface="Sylfaen"/>
+        <a:font script="Armn" typeface="Arial"/>
+        <a:font script="Bugi" typeface="Leelawadee UI"/>
+        <a:font script="Bopo" typeface="Microsoft JhengHei"/>
+        <a:font script="Java" typeface="Javanese Text"/>
+        <a:font script="Lisu" typeface="Segoe UI"/>
+        <a:font script="Mymr" typeface="Myanmar Text"/>
+        <a:font script="Nkoo" typeface="Ebrima"/>
+        <a:font script="Olck" typeface="Nirmala UI"/>
+        <a:font script="Osma" typeface="Ebrima"/>
+        <a:font script="Phag" typeface="Phagspa"/>
+        <a:font script="Syrn" typeface="Estrangelo Edessa"/>
+        <a:font script="Syrj" typeface="Estrangelo Edessa"/>
+        <a:font script="Syre" typeface="Estrangelo Edessa"/>
+        <a:font script="Sora" typeface="Nirmala UI"/>
+        <a:font script="Tale" typeface="Microsoft Tai Le"/>
+        <a:font script="Talu" typeface="Microsoft New Tai Lue"/>
+        <a:font script="Tfng" typeface="Ebrima"/>
+      </a:minorFont>
+    </a:fontScheme>
+    <a:fmtScheme name="Office">
+      <a:fillStyleLst>
+        <a:solidFill>
+          <a:schemeClr val="phClr"/>
+        </a:solidFill>
+        <a:gradFill rotWithShape="1">
+          <a:gsLst>
+            <a:gs pos="0">
+              <a:schemeClr val="phClr">
+                <a:lumMod val="110000"/>
+                <a:satMod val="105000"/>
+                <a:tint val="67000"/>
+              </a:schemeClr>
+            </a:gs>
+            <a:gs pos="50000">
+              <a:schemeClr val="phClr">
+                <a:lumMod val="105000"/>
+                <a:satMod val="103000"/>
+                <a:tint val="73000"/>
+              </a:schemeClr>
+            </a:gs>
+            <a:gs pos="100000">
+              <a:schemeClr val="phClr">
+                <a:lumMod val="105000"/>
+                <a:satMod val="109000"/>
+                <a:tint val="81000"/>
+              </a:schemeClr>
+            </a:gs>
+          </a:gsLst>
+          <a:lin ang="5400000" scaled="0"/>
+        </a:gradFill>
+        <a:gradFill rotWithShape="1">
+          <a:gsLst>
+            <a:gs pos="0">
+              <a:schemeClr val="phClr">
+                <a:satMod val="103000"/>
+                <a:lumMod val="102000"/>
+                <a:tint val="94000"/>
+              </a:schemeClr>
+            </a:gs>
+            <a:gs pos="50000">
+              <a:schemeClr val="phClr">
+                <a:satMod val="110000"/>
+                <a:lumMod val="100000"/>
+                <a:shade val="100000"/>
+              </a:schemeClr>
+            </a:gs>
+            <a:gs pos="100000">
+              <a:schemeClr val="phClr">
+                <a:lumMod val="99000"/>
+                <a:satMod val="120000"/>
+                <a:shade val="78000"/>
+              </a:schemeClr>
+            </a:gs>
+          </a:gsLst>
+          <a:lin ang="5400000" scaled="0"/>
+        </a:gradFill>
+      </a:fillStyleLst>
+      <a:lnStyleLst>
+        <a:ln w="12700" cap="flat" cmpd="sng" algn="ctr">
+          <a:solidFill>
+            <a:schemeClr val="phClr"/>
+          </a:solidFill>
+          <a:prstDash val="solid"/>
+          <a:miter lim="800000"/>
+        </a:ln>
+        <a:ln w="19050" cap="flat" cmpd="sng" algn="ctr">
+          <a:solidFill>
+            <a:schemeClr val="phClr"/>
+          </a:solidFill>
+          <a:prstDash val="solid"/>
+          <a:miter lim="800000"/>
+        </a:ln>
+        <a:ln w="25400" cap="flat" cmpd="sng" algn="ctr">
+          <a:solidFill>
+            <a:schemeClr val="phClr"/>
+          </a:solidFill>
+          <a:prstDash val="solid"/>
+          <a:miter lim="800000"/>
+        </a:ln>
+      </a:lnStyleLst>
+      <a:effectStyleLst>
+        <a:effectStyle>
+          <a:effectLst/>
+        </a:effectStyle>
+        <a:effectStyle>
+          <a:effectLst/>
+        </a:effectStyle>
+        <a:effectStyle>
+          <a:effectLst>
+            <a:outerShdw blurRad="57150" dist="19050" dir="5400000" algn="ctr" rotWithShape="0">
+              <a:srgbClr val="000000">
+                <a:alpha val="63000"/>
+              </a:srgbClr>
+            </a:outerShdw>
+          </a:effectLst>
+        </a:effectStyle>
+      </a:effectStyleLst>
+      <a:bgFillStyleLst>
+        <a:solidFill>
+          <a:schemeClr val="phClr"/>
+        </a:solidFill>
+        <a:solidFill>
+          <a:schemeClr val="phClr">
+            <a:tint val="95000"/>
+            <a:satMod val="170000"/>
+          </a:schemeClr>
+        </a:solidFill>
+        <a:gradFill rotWithShape="1">
+          <a:gsLst>
+            <a:gs pos="0">
+              <a:schemeClr val="phClr">
+                <a:tint val="93000"/>
+                <a:satMod val="150000"/>
+                <a:shade val="98000"/>
+                <a:lumMod val="102000"/>
+              </a:schemeClr>
+            </a:gs>
+            <a:gs pos="50000">
+              <a:schemeClr val="phClr">
+                <a:tint val="98000"/>
+                <a:satMod val="130000"/>
+                <a:shade val="90000"/>
+                <a:lumMod val="103000"/>
+              </a:schemeClr>
+            </a:gs>
+            <a:gs pos="100000">
+              <a:schemeClr val="phClr">
+                <a:shade val="63000"/>
+                <a:satMod val="120000"/>
+              </a:schemeClr>
+            </a:gs>
+          </a:gsLst>
+          <a:lin ang="5400000" scaled="0"/>
+        </a:gradFill>
+      </a:bgFillStyleLst>
+    </a:fmtScheme>
+  </a:themeElements>
+  <a:objectDefaults>
+    <a:lnDef>
+      <a:spPr/>
+      <a:bodyPr/>
+      <a:lstStyle/>
+      <a:style>
+        <a:lnRef idx="2">
+          <a:schemeClr val="accent1"/>
+        </a:lnRef>
+        <a:fillRef idx="0">
+          <a:schemeClr val="accent1"/>
+        </a:fillRef>
+        <a:effectRef idx="1">
+          <a:schemeClr val="accent1"/>
+        </a:effectRef>
+        <a:fontRef idx="minor">
+          <a:schemeClr val="tx1"/>
+        </a:fontRef>
+      </a:style>
+    </a:lnDef>
+  </a:objectDefaults>
+  <a:extraClrSchemeLst/>
+  <a:extLst>
+    <a:ext uri="{05A4C25C-085E-4340-85A3-A5531E510DB2}">
+      <thm15:themeFamily xmlns:thm15="http://schemas.microsoft.com/office/thememl/2012/main" name="Office Theme" id="{2E142A2C-CD16-42D6-873A-C26D2A0506FA}" vid="{1BDDFF52-6CD6-40A5-AB3C-68EB2F1E4D0A}"/>
+    </a:ext>
+  </a:extLst>
+</a:theme>
 </file>